--- a/Poster.pptx
+++ b/Poster.pptx
@@ -104,6 +104,11 @@
       </a:defRPr>
     </a:lvl9pPr>
   </p:defaultTextStyle>
+  <p:extLst>
+    <p:ext uri="{EFAFB233-063F-42B5-8137-9DF3F51BA10A}">
+      <p15:sldGuideLst xmlns:p15="http://schemas.microsoft.com/office/powerpoint/2012/main"/>
+    </p:ext>
+  </p:extLst>
 </p:presentation>
 </file>
 
@@ -256,7 +261,7 @@
           <a:p>
             <a:fld id="{4D8B8339-4FF2-4F94-A1EB-9E8F959F09EC}" type="datetimeFigureOut">
               <a:rPr lang="en-GB" smtClean="0"/>
-              <a:t>10/03/2026</a:t>
+              <a:t>14/03/2026</a:t>
             </a:fld>
             <a:endParaRPr lang="en-GB"/>
           </a:p>
@@ -456,7 +461,7 @@
           <a:p>
             <a:fld id="{4D8B8339-4FF2-4F94-A1EB-9E8F959F09EC}" type="datetimeFigureOut">
               <a:rPr lang="en-GB" smtClean="0"/>
-              <a:t>10/03/2026</a:t>
+              <a:t>14/03/2026</a:t>
             </a:fld>
             <a:endParaRPr lang="en-GB"/>
           </a:p>
@@ -666,7 +671,7 @@
           <a:p>
             <a:fld id="{4D8B8339-4FF2-4F94-A1EB-9E8F959F09EC}" type="datetimeFigureOut">
               <a:rPr lang="en-GB" smtClean="0"/>
-              <a:t>10/03/2026</a:t>
+              <a:t>14/03/2026</a:t>
             </a:fld>
             <a:endParaRPr lang="en-GB"/>
           </a:p>
@@ -866,7 +871,7 @@
           <a:p>
             <a:fld id="{4D8B8339-4FF2-4F94-A1EB-9E8F959F09EC}" type="datetimeFigureOut">
               <a:rPr lang="en-GB" smtClean="0"/>
-              <a:t>10/03/2026</a:t>
+              <a:t>14/03/2026</a:t>
             </a:fld>
             <a:endParaRPr lang="en-GB"/>
           </a:p>
@@ -1142,7 +1147,7 @@
           <a:p>
             <a:fld id="{4D8B8339-4FF2-4F94-A1EB-9E8F959F09EC}" type="datetimeFigureOut">
               <a:rPr lang="en-GB" smtClean="0"/>
-              <a:t>10/03/2026</a:t>
+              <a:t>14/03/2026</a:t>
             </a:fld>
             <a:endParaRPr lang="en-GB"/>
           </a:p>
@@ -1410,7 +1415,7 @@
           <a:p>
             <a:fld id="{4D8B8339-4FF2-4F94-A1EB-9E8F959F09EC}" type="datetimeFigureOut">
               <a:rPr lang="en-GB" smtClean="0"/>
-              <a:t>10/03/2026</a:t>
+              <a:t>14/03/2026</a:t>
             </a:fld>
             <a:endParaRPr lang="en-GB"/>
           </a:p>
@@ -1825,7 +1830,7 @@
           <a:p>
             <a:fld id="{4D8B8339-4FF2-4F94-A1EB-9E8F959F09EC}" type="datetimeFigureOut">
               <a:rPr lang="en-GB" smtClean="0"/>
-              <a:t>10/03/2026</a:t>
+              <a:t>14/03/2026</a:t>
             </a:fld>
             <a:endParaRPr lang="en-GB"/>
           </a:p>
@@ -1967,7 +1972,7 @@
           <a:p>
             <a:fld id="{4D8B8339-4FF2-4F94-A1EB-9E8F959F09EC}" type="datetimeFigureOut">
               <a:rPr lang="en-GB" smtClean="0"/>
-              <a:t>10/03/2026</a:t>
+              <a:t>14/03/2026</a:t>
             </a:fld>
             <a:endParaRPr lang="en-GB"/>
           </a:p>
@@ -2080,7 +2085,7 @@
           <a:p>
             <a:fld id="{4D8B8339-4FF2-4F94-A1EB-9E8F959F09EC}" type="datetimeFigureOut">
               <a:rPr lang="en-GB" smtClean="0"/>
-              <a:t>10/03/2026</a:t>
+              <a:t>14/03/2026</a:t>
             </a:fld>
             <a:endParaRPr lang="en-GB"/>
           </a:p>
@@ -2393,7 +2398,7 @@
           <a:p>
             <a:fld id="{4D8B8339-4FF2-4F94-A1EB-9E8F959F09EC}" type="datetimeFigureOut">
               <a:rPr lang="en-GB" smtClean="0"/>
-              <a:t>10/03/2026</a:t>
+              <a:t>14/03/2026</a:t>
             </a:fld>
             <a:endParaRPr lang="en-GB"/>
           </a:p>
@@ -2682,7 +2687,7 @@
           <a:p>
             <a:fld id="{4D8B8339-4FF2-4F94-A1EB-9E8F959F09EC}" type="datetimeFigureOut">
               <a:rPr lang="en-GB" smtClean="0"/>
-              <a:t>10/03/2026</a:t>
+              <a:t>14/03/2026</a:t>
             </a:fld>
             <a:endParaRPr lang="en-GB"/>
           </a:p>
@@ -2925,7 +2930,7 @@
           <a:p>
             <a:fld id="{4D8B8339-4FF2-4F94-A1EB-9E8F959F09EC}" type="datetimeFigureOut">
               <a:rPr lang="en-GB" smtClean="0"/>
-              <a:t>10/03/2026</a:t>
+              <a:t>14/03/2026</a:t>
             </a:fld>
             <a:endParaRPr lang="en-GB"/>
           </a:p>
@@ -3417,7 +3422,7 @@
         <p:spPr>
           <a:xfrm>
             <a:off x="213360" y="419100"/>
-            <a:ext cx="3749040" cy="2862322"/>
+            <a:ext cx="3749040" cy="2462213"/>
           </a:xfrm>
           <a:prstGeom prst="rect">
             <a:avLst/>
@@ -3440,18 +3445,55 @@
           <a:lstStyle/>
           <a:p>
             <a:r>
-              <a:rPr lang="en-GB" dirty="0"/>
+              <a:rPr lang="en-GB" sz="1400" dirty="0"/>
               <a:t>What is Stronghold?</a:t>
             </a:r>
           </a:p>
           <a:p>
-            <a:endParaRPr lang="en-GB" dirty="0"/>
-          </a:p>
-          <a:p>
-            <a:r>
-              <a:rPr lang="en-GB" dirty="0"/>
-              <a:t>Stronghold is a security-focussed web browser with an aim of teaching children how to remain safe while online. It uses behavioural conditioning (rewards and punishments) and gamification to encourage safe browsing behaviour.</a:t>
-            </a:r>
+            <a:endParaRPr lang="en-GB" sz="1400" dirty="0"/>
+          </a:p>
+          <a:p>
+            <a:pPr marL="285750" indent="-285750">
+              <a:buFontTx/>
+              <a:buChar char="-"/>
+            </a:pPr>
+            <a:r>
+              <a:rPr lang="en-GB" sz="1400" dirty="0"/>
+              <a:t>Security-focussed web browser</a:t>
+            </a:r>
+          </a:p>
+          <a:p>
+            <a:pPr marL="285750" indent="-285750">
+              <a:buFontTx/>
+              <a:buChar char="-"/>
+            </a:pPr>
+            <a:r>
+              <a:rPr lang="en-GB" sz="1400" dirty="0"/>
+              <a:t>Aims to teach children safe browsing behaviours</a:t>
+            </a:r>
+          </a:p>
+          <a:p>
+            <a:pPr marL="285750" indent="-285750">
+              <a:buFontTx/>
+              <a:buChar char="-"/>
+            </a:pPr>
+            <a:r>
+              <a:rPr lang="en-GB" sz="1400" dirty="0"/>
+              <a:t>Utilises behavioural conditioning and gamification</a:t>
+            </a:r>
+          </a:p>
+          <a:p>
+            <a:pPr marL="285750" indent="-285750">
+              <a:buFontTx/>
+              <a:buChar char="-"/>
+            </a:pPr>
+            <a:r>
+              <a:rPr lang="en-GB" sz="1400" dirty="0"/>
+              <a:t>Rewards the user for browsing safely, punishes the user for browsing dangerously</a:t>
+            </a:r>
+          </a:p>
+          <a:p>
+            <a:endParaRPr lang="en-GB" sz="1400" dirty="0"/>
           </a:p>
         </p:txBody>
       </p:sp>
@@ -3470,7 +3512,7 @@
         <p:spPr>
           <a:xfrm>
             <a:off x="8564880" y="358140"/>
-            <a:ext cx="3162300" cy="369332"/>
+            <a:ext cx="3162300" cy="1384995"/>
           </a:xfrm>
           <a:prstGeom prst="rect">
             <a:avLst/>
@@ -3493,9 +3535,37 @@
           <a:lstStyle/>
           <a:p>
             <a:r>
-              <a:rPr lang="en-GB" dirty="0"/>
-              <a:t>About the Gamification</a:t>
-            </a:r>
+              <a:rPr lang="en-GB" sz="1400" dirty="0"/>
+              <a:t>Gamification</a:t>
+            </a:r>
+          </a:p>
+          <a:p>
+            <a:endParaRPr lang="en-GB" sz="1400" dirty="0"/>
+          </a:p>
+          <a:p>
+            <a:pPr marL="285750" indent="-285750">
+              <a:buFontTx/>
+              <a:buChar char="-"/>
+            </a:pPr>
+            <a:r>
+              <a:rPr lang="en-GB" sz="1400" dirty="0"/>
+              <a:t>Makes the browser more fun to use while also being educational</a:t>
+            </a:r>
+          </a:p>
+          <a:p>
+            <a:pPr marL="285750" indent="-285750">
+              <a:buFontTx/>
+              <a:buChar char="-"/>
+            </a:pPr>
+            <a:r>
+              <a:rPr lang="en-GB" sz="1400" dirty="0"/>
+              <a:t>SHOULD encourage children to want </a:t>
+            </a:r>
+            <a:r>
+              <a:rPr lang="en-GB" sz="1400"/>
+              <a:t>to use it more</a:t>
+            </a:r>
+            <a:endParaRPr lang="en-GB" sz="1400" dirty="0"/>
           </a:p>
         </p:txBody>
       </p:sp>
@@ -3513,8 +3583,8 @@
         </p:nvSpPr>
         <p:spPr>
           <a:xfrm>
-            <a:off x="8572500" y="1569720"/>
-            <a:ext cx="3162300" cy="369332"/>
+            <a:off x="8564880" y="4609312"/>
+            <a:ext cx="3162300" cy="1600438"/>
           </a:xfrm>
           <a:prstGeom prst="rect">
             <a:avLst/>
@@ -3537,9 +3607,52 @@
           <a:lstStyle/>
           <a:p>
             <a:r>
-              <a:rPr lang="en-GB" dirty="0"/>
-              <a:t>About the Dashboard</a:t>
-            </a:r>
+              <a:rPr lang="en-GB" sz="1400" dirty="0"/>
+              <a:t>Dashboard</a:t>
+            </a:r>
+          </a:p>
+          <a:p>
+            <a:endParaRPr lang="en-GB" sz="1400" dirty="0"/>
+          </a:p>
+          <a:p>
+            <a:pPr marL="285750" indent="-285750">
+              <a:buFontTx/>
+              <a:buChar char="-"/>
+            </a:pPr>
+            <a:r>
+              <a:rPr lang="en-GB" sz="1400" dirty="0"/>
+              <a:t>Shows stats for the user such as their level and </a:t>
+            </a:r>
+            <a:r>
+              <a:rPr lang="en-GB" sz="1400" dirty="0" err="1"/>
+              <a:t>xp</a:t>
+            </a:r>
+            <a:r>
+              <a:rPr lang="en-GB" sz="1400" dirty="0"/>
+              <a:t> points</a:t>
+            </a:r>
+          </a:p>
+          <a:p>
+            <a:pPr marL="285750" indent="-285750">
+              <a:buFontTx/>
+              <a:buChar char="-"/>
+            </a:pPr>
+            <a:r>
+              <a:rPr lang="en-GB" sz="1400" dirty="0"/>
+              <a:t>Allows access to quizzes and challenges for more </a:t>
+            </a:r>
+            <a:r>
+              <a:rPr lang="en-GB" sz="1400" dirty="0" err="1"/>
+              <a:t>xp</a:t>
+            </a:r>
+            <a:endParaRPr lang="en-GB" sz="1400" dirty="0"/>
+          </a:p>
+          <a:p>
+            <a:pPr marL="285750" indent="-285750">
+              <a:buFontTx/>
+              <a:buChar char="-"/>
+            </a:pPr>
+            <a:endParaRPr lang="en-GB" sz="1400" dirty="0"/>
           </a:p>
         </p:txBody>
       </p:sp>

--- a/Poster.pptx
+++ b/Poster.pptx
@@ -2,18 +2,18 @@
 <file path=ppt/presentation.xml><?xml version="1.0" encoding="utf-8"?>
 <p:presentation xmlns:a="http://schemas.openxmlformats.org/drawingml/2006/main" xmlns:r="http://schemas.openxmlformats.org/officeDocument/2006/relationships" xmlns:p="http://schemas.openxmlformats.org/presentationml/2006/main" saveSubsetFonts="1">
   <p:sldMasterIdLst>
-    <p:sldMasterId id="2147483648" r:id="rId1"/>
+    <p:sldMasterId id="2147483660" r:id="rId1"/>
   </p:sldMasterIdLst>
   <p:sldIdLst>
     <p:sldId id="256" r:id="rId2"/>
   </p:sldIdLst>
-  <p:sldSz cx="12192000" cy="6858000"/>
+  <p:sldSz cx="30275213" cy="21383625"/>
   <p:notesSz cx="6858000" cy="9144000"/>
   <p:defaultTextStyle>
     <a:defPPr>
       <a:defRPr lang="en-US"/>
     </a:defPPr>
-    <a:lvl1pPr marL="0" algn="l" defTabSz="914400" rtl="0" eaLnBrk="1" latinLnBrk="0" hangingPunct="1">
+    <a:lvl1pPr marL="0" algn="l" defTabSz="457200" rtl="0" eaLnBrk="1" latinLnBrk="0" hangingPunct="1">
       <a:defRPr sz="1800" kern="1200">
         <a:solidFill>
           <a:schemeClr val="tx1"/>
@@ -23,7 +23,7 @@
         <a:cs typeface="+mn-cs"/>
       </a:defRPr>
     </a:lvl1pPr>
-    <a:lvl2pPr marL="457200" algn="l" defTabSz="914400" rtl="0" eaLnBrk="1" latinLnBrk="0" hangingPunct="1">
+    <a:lvl2pPr marL="457200" algn="l" defTabSz="457200" rtl="0" eaLnBrk="1" latinLnBrk="0" hangingPunct="1">
       <a:defRPr sz="1800" kern="1200">
         <a:solidFill>
           <a:schemeClr val="tx1"/>
@@ -33,7 +33,7 @@
         <a:cs typeface="+mn-cs"/>
       </a:defRPr>
     </a:lvl2pPr>
-    <a:lvl3pPr marL="914400" algn="l" defTabSz="914400" rtl="0" eaLnBrk="1" latinLnBrk="0" hangingPunct="1">
+    <a:lvl3pPr marL="914400" algn="l" defTabSz="457200" rtl="0" eaLnBrk="1" latinLnBrk="0" hangingPunct="1">
       <a:defRPr sz="1800" kern="1200">
         <a:solidFill>
           <a:schemeClr val="tx1"/>
@@ -43,7 +43,7 @@
         <a:cs typeface="+mn-cs"/>
       </a:defRPr>
     </a:lvl3pPr>
-    <a:lvl4pPr marL="1371600" algn="l" defTabSz="914400" rtl="0" eaLnBrk="1" latinLnBrk="0" hangingPunct="1">
+    <a:lvl4pPr marL="1371600" algn="l" defTabSz="457200" rtl="0" eaLnBrk="1" latinLnBrk="0" hangingPunct="1">
       <a:defRPr sz="1800" kern="1200">
         <a:solidFill>
           <a:schemeClr val="tx1"/>
@@ -53,7 +53,7 @@
         <a:cs typeface="+mn-cs"/>
       </a:defRPr>
     </a:lvl4pPr>
-    <a:lvl5pPr marL="1828800" algn="l" defTabSz="914400" rtl="0" eaLnBrk="1" latinLnBrk="0" hangingPunct="1">
+    <a:lvl5pPr marL="1828800" algn="l" defTabSz="457200" rtl="0" eaLnBrk="1" latinLnBrk="0" hangingPunct="1">
       <a:defRPr sz="1800" kern="1200">
         <a:solidFill>
           <a:schemeClr val="tx1"/>
@@ -63,7 +63,7 @@
         <a:cs typeface="+mn-cs"/>
       </a:defRPr>
     </a:lvl5pPr>
-    <a:lvl6pPr marL="2286000" algn="l" defTabSz="914400" rtl="0" eaLnBrk="1" latinLnBrk="0" hangingPunct="1">
+    <a:lvl6pPr marL="2286000" algn="l" defTabSz="457200" rtl="0" eaLnBrk="1" latinLnBrk="0" hangingPunct="1">
       <a:defRPr sz="1800" kern="1200">
         <a:solidFill>
           <a:schemeClr val="tx1"/>
@@ -73,7 +73,7 @@
         <a:cs typeface="+mn-cs"/>
       </a:defRPr>
     </a:lvl6pPr>
-    <a:lvl7pPr marL="2743200" algn="l" defTabSz="914400" rtl="0" eaLnBrk="1" latinLnBrk="0" hangingPunct="1">
+    <a:lvl7pPr marL="2743200" algn="l" defTabSz="457200" rtl="0" eaLnBrk="1" latinLnBrk="0" hangingPunct="1">
       <a:defRPr sz="1800" kern="1200">
         <a:solidFill>
           <a:schemeClr val="tx1"/>
@@ -83,7 +83,7 @@
         <a:cs typeface="+mn-cs"/>
       </a:defRPr>
     </a:lvl7pPr>
-    <a:lvl8pPr marL="3200400" algn="l" defTabSz="914400" rtl="0" eaLnBrk="1" latinLnBrk="0" hangingPunct="1">
+    <a:lvl8pPr marL="3200400" algn="l" defTabSz="457200" rtl="0" eaLnBrk="1" latinLnBrk="0" hangingPunct="1">
       <a:defRPr sz="1800" kern="1200">
         <a:solidFill>
           <a:schemeClr val="tx1"/>
@@ -93,7 +93,7 @@
         <a:cs typeface="+mn-cs"/>
       </a:defRPr>
     </a:lvl8pPr>
-    <a:lvl9pPr marL="3657600" algn="l" defTabSz="914400" rtl="0" eaLnBrk="1" latinLnBrk="0" hangingPunct="1">
+    <a:lvl9pPr marL="3657600" algn="l" defTabSz="457200" rtl="0" eaLnBrk="1" latinLnBrk="0" hangingPunct="1">
       <a:defRPr sz="1800" kern="1200">
         <a:solidFill>
           <a:schemeClr val="tx1"/>
@@ -131,13 +131,7 @@
       </p:grpSpPr>
       <p:sp>
         <p:nvSpPr>
-          <p:cNvPr id="2" name="Title 1">
-            <a:extLst>
-              <a:ext uri="{FF2B5EF4-FFF2-40B4-BE49-F238E27FC236}">
-                <a16:creationId xmlns:a16="http://schemas.microsoft.com/office/drawing/2014/main" id="{83450350-7E99-E194-18D4-DC5BCAFE94FD}"/>
-              </a:ext>
-            </a:extLst>
-          </p:cNvPr>
+          <p:cNvPr id="2" name="Title 1"/>
           <p:cNvSpPr>
             <a:spLocks noGrp="1"/>
           </p:cNvSpPr>
@@ -147,35 +141,29 @@
         </p:nvSpPr>
         <p:spPr>
           <a:xfrm>
-            <a:off x="1524000" y="1122363"/>
-            <a:ext cx="9144000" cy="2387600"/>
+            <a:off x="2270641" y="3499590"/>
+            <a:ext cx="25733931" cy="7444669"/>
           </a:xfrm>
         </p:spPr>
         <p:txBody>
           <a:bodyPr anchor="b"/>
           <a:lstStyle>
             <a:lvl1pPr algn="ctr">
-              <a:defRPr sz="6000"/>
+              <a:defRPr sz="18709"/>
             </a:lvl1pPr>
           </a:lstStyle>
           <a:p>
             <a:r>
-              <a:rPr lang="en-US"/>
+              <a:rPr lang="en-GB"/>
               <a:t>Click to edit Master title style</a:t>
             </a:r>
-            <a:endParaRPr lang="en-GB"/>
-          </a:p>
-        </p:txBody>
-      </p:sp>
-      <p:sp>
-        <p:nvSpPr>
-          <p:cNvPr id="3" name="Subtitle 2">
-            <a:extLst>
-              <a:ext uri="{FF2B5EF4-FFF2-40B4-BE49-F238E27FC236}">
-                <a16:creationId xmlns:a16="http://schemas.microsoft.com/office/drawing/2014/main" id="{720F2BF0-D8B0-4970-5304-6A7676E030F4}"/>
-              </a:ext>
-            </a:extLst>
-          </p:cNvPr>
+            <a:endParaRPr lang="en-US" dirty="0"/>
+          </a:p>
+        </p:txBody>
+      </p:sp>
+      <p:sp>
+        <p:nvSpPr>
+          <p:cNvPr id="3" name="Subtitle 2"/>
           <p:cNvSpPr>
             <a:spLocks noGrp="1"/>
           </p:cNvSpPr>
@@ -185,8 +173,8 @@
         </p:nvSpPr>
         <p:spPr>
           <a:xfrm>
-            <a:off x="1524000" y="3602038"/>
-            <a:ext cx="9144000" cy="1655762"/>
+            <a:off x="3784402" y="11231355"/>
+            <a:ext cx="22706410" cy="5162758"/>
           </a:xfrm>
         </p:spPr>
         <p:txBody>
@@ -194,59 +182,53 @@
           <a:lstStyle>
             <a:lvl1pPr marL="0" indent="0" algn="ctr">
               <a:buNone/>
-              <a:defRPr sz="2400"/>
+              <a:defRPr sz="7483"/>
             </a:lvl1pPr>
-            <a:lvl2pPr marL="457200" indent="0" algn="ctr">
-              <a:buNone/>
-              <a:defRPr sz="2000"/>
+            <a:lvl2pPr marL="1425595" indent="0" algn="ctr">
+              <a:buNone/>
+              <a:defRPr sz="6236"/>
             </a:lvl2pPr>
-            <a:lvl3pPr marL="914400" indent="0" algn="ctr">
-              <a:buNone/>
-              <a:defRPr sz="1800"/>
+            <a:lvl3pPr marL="2851191" indent="0" algn="ctr">
+              <a:buNone/>
+              <a:defRPr sz="5613"/>
             </a:lvl3pPr>
-            <a:lvl4pPr marL="1371600" indent="0" algn="ctr">
-              <a:buNone/>
-              <a:defRPr sz="1600"/>
+            <a:lvl4pPr marL="4276786" indent="0" algn="ctr">
+              <a:buNone/>
+              <a:defRPr sz="4989"/>
             </a:lvl4pPr>
-            <a:lvl5pPr marL="1828800" indent="0" algn="ctr">
-              <a:buNone/>
-              <a:defRPr sz="1600"/>
+            <a:lvl5pPr marL="5702381" indent="0" algn="ctr">
+              <a:buNone/>
+              <a:defRPr sz="4989"/>
             </a:lvl5pPr>
-            <a:lvl6pPr marL="2286000" indent="0" algn="ctr">
-              <a:buNone/>
-              <a:defRPr sz="1600"/>
+            <a:lvl6pPr marL="7127977" indent="0" algn="ctr">
+              <a:buNone/>
+              <a:defRPr sz="4989"/>
             </a:lvl6pPr>
-            <a:lvl7pPr marL="2743200" indent="0" algn="ctr">
-              <a:buNone/>
-              <a:defRPr sz="1600"/>
+            <a:lvl7pPr marL="8553572" indent="0" algn="ctr">
+              <a:buNone/>
+              <a:defRPr sz="4989"/>
             </a:lvl7pPr>
-            <a:lvl8pPr marL="3200400" indent="0" algn="ctr">
-              <a:buNone/>
-              <a:defRPr sz="1600"/>
+            <a:lvl8pPr marL="9979167" indent="0" algn="ctr">
+              <a:buNone/>
+              <a:defRPr sz="4989"/>
             </a:lvl8pPr>
-            <a:lvl9pPr marL="3657600" indent="0" algn="ctr">
-              <a:buNone/>
-              <a:defRPr sz="1600"/>
+            <a:lvl9pPr marL="11404763" indent="0" algn="ctr">
+              <a:buNone/>
+              <a:defRPr sz="4989"/>
             </a:lvl9pPr>
           </a:lstStyle>
           <a:p>
             <a:r>
-              <a:rPr lang="en-US"/>
+              <a:rPr lang="en-GB"/>
               <a:t>Click to edit Master subtitle style</a:t>
             </a:r>
-            <a:endParaRPr lang="en-GB"/>
-          </a:p>
-        </p:txBody>
-      </p:sp>
-      <p:sp>
-        <p:nvSpPr>
-          <p:cNvPr id="4" name="Date Placeholder 3">
-            <a:extLst>
-              <a:ext uri="{FF2B5EF4-FFF2-40B4-BE49-F238E27FC236}">
-                <a16:creationId xmlns:a16="http://schemas.microsoft.com/office/drawing/2014/main" id="{DE92BB92-AD54-083B-ECA6-D6F6E6647488}"/>
-              </a:ext>
-            </a:extLst>
-          </p:cNvPr>
+            <a:endParaRPr lang="en-US" dirty="0"/>
+          </a:p>
+        </p:txBody>
+      </p:sp>
+      <p:sp>
+        <p:nvSpPr>
+          <p:cNvPr id="4" name="Date Placeholder 3"/>
           <p:cNvSpPr>
             <a:spLocks noGrp="1"/>
           </p:cNvSpPr>
@@ -269,13 +251,7 @@
       </p:sp>
       <p:sp>
         <p:nvSpPr>
-          <p:cNvPr id="5" name="Footer Placeholder 4">
-            <a:extLst>
-              <a:ext uri="{FF2B5EF4-FFF2-40B4-BE49-F238E27FC236}">
-                <a16:creationId xmlns:a16="http://schemas.microsoft.com/office/drawing/2014/main" id="{83B03A01-8A6A-3F75-6E25-4D17AF6842A8}"/>
-              </a:ext>
-            </a:extLst>
-          </p:cNvPr>
+          <p:cNvPr id="5" name="Footer Placeholder 4"/>
           <p:cNvSpPr>
             <a:spLocks noGrp="1"/>
           </p:cNvSpPr>
@@ -294,13 +270,7 @@
       </p:sp>
       <p:sp>
         <p:nvSpPr>
-          <p:cNvPr id="6" name="Slide Number Placeholder 5">
-            <a:extLst>
-              <a:ext uri="{FF2B5EF4-FFF2-40B4-BE49-F238E27FC236}">
-                <a16:creationId xmlns:a16="http://schemas.microsoft.com/office/drawing/2014/main" id="{95361EE1-51D1-0B91-816F-36A37F586E58}"/>
-              </a:ext>
-            </a:extLst>
-          </p:cNvPr>
+          <p:cNvPr id="6" name="Slide Number Placeholder 5"/>
           <p:cNvSpPr>
             <a:spLocks noGrp="1"/>
           </p:cNvSpPr>
@@ -324,7 +294,7 @@
     </p:spTree>
     <p:extLst>
       <p:ext uri="{BB962C8B-B14F-4D97-AF65-F5344CB8AC3E}">
-        <p14:creationId xmlns:p14="http://schemas.microsoft.com/office/powerpoint/2010/main" val="139273119"/>
+        <p14:creationId xmlns:p14="http://schemas.microsoft.com/office/powerpoint/2010/main" val="1717904925"/>
       </p:ext>
     </p:extLst>
   </p:cSld>
@@ -353,13 +323,7 @@
       </p:grpSpPr>
       <p:sp>
         <p:nvSpPr>
-          <p:cNvPr id="2" name="Title 1">
-            <a:extLst>
-              <a:ext uri="{FF2B5EF4-FFF2-40B4-BE49-F238E27FC236}">
-                <a16:creationId xmlns:a16="http://schemas.microsoft.com/office/drawing/2014/main" id="{6F2DD5E2-EDF2-0A66-7F58-80E8A1B02BBA}"/>
-              </a:ext>
-            </a:extLst>
-          </p:cNvPr>
+          <p:cNvPr id="2" name="Title 1"/>
           <p:cNvSpPr>
             <a:spLocks noGrp="1"/>
           </p:cNvSpPr>
@@ -373,22 +337,16 @@
           <a:lstStyle/>
           <a:p>
             <a:r>
-              <a:rPr lang="en-US"/>
+              <a:rPr lang="en-GB"/>
               <a:t>Click to edit Master title style</a:t>
             </a:r>
-            <a:endParaRPr lang="en-GB"/>
-          </a:p>
-        </p:txBody>
-      </p:sp>
-      <p:sp>
-        <p:nvSpPr>
-          <p:cNvPr id="3" name="Vertical Text Placeholder 2">
-            <a:extLst>
-              <a:ext uri="{FF2B5EF4-FFF2-40B4-BE49-F238E27FC236}">
-                <a16:creationId xmlns:a16="http://schemas.microsoft.com/office/drawing/2014/main" id="{6BF76E7C-2C01-CBC4-B8E9-4122177ABDEA}"/>
-              </a:ext>
-            </a:extLst>
-          </p:cNvPr>
+            <a:endParaRPr lang="en-US" dirty="0"/>
+          </a:p>
+        </p:txBody>
+      </p:sp>
+      <p:sp>
+        <p:nvSpPr>
+          <p:cNvPr id="3" name="Vertical Text Placeholder 2"/>
           <p:cNvSpPr>
             <a:spLocks noGrp="1"/>
           </p:cNvSpPr>
@@ -403,50 +361,44 @@
           <a:p>
             <a:pPr lvl="0"/>
             <a:r>
-              <a:rPr lang="en-US"/>
+              <a:rPr lang="en-GB"/>
               <a:t>Click to edit Master text styles</a:t>
             </a:r>
           </a:p>
           <a:p>
             <a:pPr lvl="1"/>
             <a:r>
-              <a:rPr lang="en-US"/>
+              <a:rPr lang="en-GB"/>
               <a:t>Second level</a:t>
             </a:r>
           </a:p>
           <a:p>
             <a:pPr lvl="2"/>
             <a:r>
-              <a:rPr lang="en-US"/>
+              <a:rPr lang="en-GB"/>
               <a:t>Third level</a:t>
             </a:r>
           </a:p>
           <a:p>
             <a:pPr lvl="3"/>
             <a:r>
-              <a:rPr lang="en-US"/>
+              <a:rPr lang="en-GB"/>
               <a:t>Fourth level</a:t>
             </a:r>
           </a:p>
           <a:p>
             <a:pPr lvl="4"/>
             <a:r>
-              <a:rPr lang="en-US"/>
+              <a:rPr lang="en-GB"/>
               <a:t>Fifth level</a:t>
             </a:r>
-            <a:endParaRPr lang="en-GB"/>
-          </a:p>
-        </p:txBody>
-      </p:sp>
-      <p:sp>
-        <p:nvSpPr>
-          <p:cNvPr id="4" name="Date Placeholder 3">
-            <a:extLst>
-              <a:ext uri="{FF2B5EF4-FFF2-40B4-BE49-F238E27FC236}">
-                <a16:creationId xmlns:a16="http://schemas.microsoft.com/office/drawing/2014/main" id="{549F7840-75CF-A420-7DFD-D845251E13C4}"/>
-              </a:ext>
-            </a:extLst>
-          </p:cNvPr>
+            <a:endParaRPr lang="en-US" dirty="0"/>
+          </a:p>
+        </p:txBody>
+      </p:sp>
+      <p:sp>
+        <p:nvSpPr>
+          <p:cNvPr id="4" name="Date Placeholder 3"/>
           <p:cNvSpPr>
             <a:spLocks noGrp="1"/>
           </p:cNvSpPr>
@@ -469,13 +421,7 @@
       </p:sp>
       <p:sp>
         <p:nvSpPr>
-          <p:cNvPr id="5" name="Footer Placeholder 4">
-            <a:extLst>
-              <a:ext uri="{FF2B5EF4-FFF2-40B4-BE49-F238E27FC236}">
-                <a16:creationId xmlns:a16="http://schemas.microsoft.com/office/drawing/2014/main" id="{6AA32B22-C016-EE44-73DF-6BC9C6FA38BA}"/>
-              </a:ext>
-            </a:extLst>
-          </p:cNvPr>
+          <p:cNvPr id="5" name="Footer Placeholder 4"/>
           <p:cNvSpPr>
             <a:spLocks noGrp="1"/>
           </p:cNvSpPr>
@@ -494,13 +440,7 @@
       </p:sp>
       <p:sp>
         <p:nvSpPr>
-          <p:cNvPr id="6" name="Slide Number Placeholder 5">
-            <a:extLst>
-              <a:ext uri="{FF2B5EF4-FFF2-40B4-BE49-F238E27FC236}">
-                <a16:creationId xmlns:a16="http://schemas.microsoft.com/office/drawing/2014/main" id="{3BCEBDD1-52C3-2F4C-C4AC-47DEDAE350E0}"/>
-              </a:ext>
-            </a:extLst>
-          </p:cNvPr>
+          <p:cNvPr id="6" name="Slide Number Placeholder 5"/>
           <p:cNvSpPr>
             <a:spLocks noGrp="1"/>
           </p:cNvSpPr>
@@ -524,7 +464,7 @@
     </p:spTree>
     <p:extLst>
       <p:ext uri="{BB962C8B-B14F-4D97-AF65-F5344CB8AC3E}">
-        <p14:creationId xmlns:p14="http://schemas.microsoft.com/office/powerpoint/2010/main" val="3515903601"/>
+        <p14:creationId xmlns:p14="http://schemas.microsoft.com/office/powerpoint/2010/main" val="317590302"/>
       </p:ext>
     </p:extLst>
   </p:cSld>
@@ -553,13 +493,7 @@
       </p:grpSpPr>
       <p:sp>
         <p:nvSpPr>
-          <p:cNvPr id="2" name="Vertical Title 1">
-            <a:extLst>
-              <a:ext uri="{FF2B5EF4-FFF2-40B4-BE49-F238E27FC236}">
-                <a16:creationId xmlns:a16="http://schemas.microsoft.com/office/drawing/2014/main" id="{2EB96126-C5E0-BD55-C4B0-DB02807D072C}"/>
-              </a:ext>
-            </a:extLst>
-          </p:cNvPr>
+          <p:cNvPr id="2" name="Vertical Title 1"/>
           <p:cNvSpPr>
             <a:spLocks noGrp="1"/>
           </p:cNvSpPr>
@@ -569,8 +503,8 @@
         </p:nvSpPr>
         <p:spPr>
           <a:xfrm>
-            <a:off x="8724900" y="365125"/>
-            <a:ext cx="2628900" cy="5811838"/>
+            <a:off x="21665701" y="1138480"/>
+            <a:ext cx="6528093" cy="18121634"/>
           </a:xfrm>
         </p:spPr>
         <p:txBody>
@@ -578,22 +512,16 @@
           <a:lstStyle/>
           <a:p>
             <a:r>
-              <a:rPr lang="en-US"/>
+              <a:rPr lang="en-GB"/>
               <a:t>Click to edit Master title style</a:t>
             </a:r>
-            <a:endParaRPr lang="en-GB"/>
-          </a:p>
-        </p:txBody>
-      </p:sp>
-      <p:sp>
-        <p:nvSpPr>
-          <p:cNvPr id="3" name="Vertical Text Placeholder 2">
-            <a:extLst>
-              <a:ext uri="{FF2B5EF4-FFF2-40B4-BE49-F238E27FC236}">
-                <a16:creationId xmlns:a16="http://schemas.microsoft.com/office/drawing/2014/main" id="{EBD237B2-BFB6-D2E9-3989-05645813F76F}"/>
-              </a:ext>
-            </a:extLst>
-          </p:cNvPr>
+            <a:endParaRPr lang="en-US" dirty="0"/>
+          </a:p>
+        </p:txBody>
+      </p:sp>
+      <p:sp>
+        <p:nvSpPr>
+          <p:cNvPr id="3" name="Vertical Text Placeholder 2"/>
           <p:cNvSpPr>
             <a:spLocks noGrp="1"/>
           </p:cNvSpPr>
@@ -603,8 +531,8 @@
         </p:nvSpPr>
         <p:spPr>
           <a:xfrm>
-            <a:off x="838200" y="365125"/>
-            <a:ext cx="7734300" cy="5811838"/>
+            <a:off x="2081423" y="1138480"/>
+            <a:ext cx="19205838" cy="18121634"/>
           </a:xfrm>
         </p:spPr>
         <p:txBody>
@@ -613,50 +541,44 @@
           <a:p>
             <a:pPr lvl="0"/>
             <a:r>
-              <a:rPr lang="en-US"/>
+              <a:rPr lang="en-GB"/>
               <a:t>Click to edit Master text styles</a:t>
             </a:r>
           </a:p>
           <a:p>
             <a:pPr lvl="1"/>
             <a:r>
-              <a:rPr lang="en-US"/>
+              <a:rPr lang="en-GB"/>
               <a:t>Second level</a:t>
             </a:r>
           </a:p>
           <a:p>
             <a:pPr lvl="2"/>
             <a:r>
-              <a:rPr lang="en-US"/>
+              <a:rPr lang="en-GB"/>
               <a:t>Third level</a:t>
             </a:r>
           </a:p>
           <a:p>
             <a:pPr lvl="3"/>
             <a:r>
-              <a:rPr lang="en-US"/>
+              <a:rPr lang="en-GB"/>
               <a:t>Fourth level</a:t>
             </a:r>
           </a:p>
           <a:p>
             <a:pPr lvl="4"/>
             <a:r>
-              <a:rPr lang="en-US"/>
+              <a:rPr lang="en-GB"/>
               <a:t>Fifth level</a:t>
             </a:r>
-            <a:endParaRPr lang="en-GB"/>
-          </a:p>
-        </p:txBody>
-      </p:sp>
-      <p:sp>
-        <p:nvSpPr>
-          <p:cNvPr id="4" name="Date Placeholder 3">
-            <a:extLst>
-              <a:ext uri="{FF2B5EF4-FFF2-40B4-BE49-F238E27FC236}">
-                <a16:creationId xmlns:a16="http://schemas.microsoft.com/office/drawing/2014/main" id="{49CE576F-34C3-17F0-AA75-8369BFC01959}"/>
-              </a:ext>
-            </a:extLst>
-          </p:cNvPr>
+            <a:endParaRPr lang="en-US" dirty="0"/>
+          </a:p>
+        </p:txBody>
+      </p:sp>
+      <p:sp>
+        <p:nvSpPr>
+          <p:cNvPr id="4" name="Date Placeholder 3"/>
           <p:cNvSpPr>
             <a:spLocks noGrp="1"/>
           </p:cNvSpPr>
@@ -679,13 +601,7 @@
       </p:sp>
       <p:sp>
         <p:nvSpPr>
-          <p:cNvPr id="5" name="Footer Placeholder 4">
-            <a:extLst>
-              <a:ext uri="{FF2B5EF4-FFF2-40B4-BE49-F238E27FC236}">
-                <a16:creationId xmlns:a16="http://schemas.microsoft.com/office/drawing/2014/main" id="{60A8861F-2F7B-39D6-464C-06DF12776556}"/>
-              </a:ext>
-            </a:extLst>
-          </p:cNvPr>
+          <p:cNvPr id="5" name="Footer Placeholder 4"/>
           <p:cNvSpPr>
             <a:spLocks noGrp="1"/>
           </p:cNvSpPr>
@@ -704,13 +620,7 @@
       </p:sp>
       <p:sp>
         <p:nvSpPr>
-          <p:cNvPr id="6" name="Slide Number Placeholder 5">
-            <a:extLst>
-              <a:ext uri="{FF2B5EF4-FFF2-40B4-BE49-F238E27FC236}">
-                <a16:creationId xmlns:a16="http://schemas.microsoft.com/office/drawing/2014/main" id="{8B27B664-6399-FFA9-AA27-FC2A9609F5A1}"/>
-              </a:ext>
-            </a:extLst>
-          </p:cNvPr>
+          <p:cNvPr id="6" name="Slide Number Placeholder 5"/>
           <p:cNvSpPr>
             <a:spLocks noGrp="1"/>
           </p:cNvSpPr>
@@ -734,7 +644,7 @@
     </p:spTree>
     <p:extLst>
       <p:ext uri="{BB962C8B-B14F-4D97-AF65-F5344CB8AC3E}">
-        <p14:creationId xmlns:p14="http://schemas.microsoft.com/office/powerpoint/2010/main" val="3287225797"/>
+        <p14:creationId xmlns:p14="http://schemas.microsoft.com/office/powerpoint/2010/main" val="2753228946"/>
       </p:ext>
     </p:extLst>
   </p:cSld>
@@ -763,13 +673,7 @@
       </p:grpSpPr>
       <p:sp>
         <p:nvSpPr>
-          <p:cNvPr id="2" name="Title 1">
-            <a:extLst>
-              <a:ext uri="{FF2B5EF4-FFF2-40B4-BE49-F238E27FC236}">
-                <a16:creationId xmlns:a16="http://schemas.microsoft.com/office/drawing/2014/main" id="{63727DE5-C920-D517-A8D0-5A15816D2118}"/>
-              </a:ext>
-            </a:extLst>
-          </p:cNvPr>
+          <p:cNvPr id="2" name="Title 1"/>
           <p:cNvSpPr>
             <a:spLocks noGrp="1"/>
           </p:cNvSpPr>
@@ -783,22 +687,16 @@
           <a:lstStyle/>
           <a:p>
             <a:r>
-              <a:rPr lang="en-US"/>
+              <a:rPr lang="en-GB"/>
               <a:t>Click to edit Master title style</a:t>
             </a:r>
-            <a:endParaRPr lang="en-GB"/>
-          </a:p>
-        </p:txBody>
-      </p:sp>
-      <p:sp>
-        <p:nvSpPr>
-          <p:cNvPr id="3" name="Content Placeholder 2">
-            <a:extLst>
-              <a:ext uri="{FF2B5EF4-FFF2-40B4-BE49-F238E27FC236}">
-                <a16:creationId xmlns:a16="http://schemas.microsoft.com/office/drawing/2014/main" id="{8E4F0DD5-97B1-75BE-5DE1-63D31D69F5DC}"/>
-              </a:ext>
-            </a:extLst>
-          </p:cNvPr>
+            <a:endParaRPr lang="en-US" dirty="0"/>
+          </a:p>
+        </p:txBody>
+      </p:sp>
+      <p:sp>
+        <p:nvSpPr>
+          <p:cNvPr id="3" name="Content Placeholder 2"/>
           <p:cNvSpPr>
             <a:spLocks noGrp="1"/>
           </p:cNvSpPr>
@@ -813,50 +711,44 @@
           <a:p>
             <a:pPr lvl="0"/>
             <a:r>
-              <a:rPr lang="en-US"/>
+              <a:rPr lang="en-GB"/>
               <a:t>Click to edit Master text styles</a:t>
             </a:r>
           </a:p>
           <a:p>
             <a:pPr lvl="1"/>
             <a:r>
-              <a:rPr lang="en-US"/>
+              <a:rPr lang="en-GB"/>
               <a:t>Second level</a:t>
             </a:r>
           </a:p>
           <a:p>
             <a:pPr lvl="2"/>
             <a:r>
-              <a:rPr lang="en-US"/>
+              <a:rPr lang="en-GB"/>
               <a:t>Third level</a:t>
             </a:r>
           </a:p>
           <a:p>
             <a:pPr lvl="3"/>
             <a:r>
-              <a:rPr lang="en-US"/>
+              <a:rPr lang="en-GB"/>
               <a:t>Fourth level</a:t>
             </a:r>
           </a:p>
           <a:p>
             <a:pPr lvl="4"/>
             <a:r>
-              <a:rPr lang="en-US"/>
+              <a:rPr lang="en-GB"/>
               <a:t>Fifth level</a:t>
             </a:r>
-            <a:endParaRPr lang="en-GB"/>
-          </a:p>
-        </p:txBody>
-      </p:sp>
-      <p:sp>
-        <p:nvSpPr>
-          <p:cNvPr id="4" name="Date Placeholder 3">
-            <a:extLst>
-              <a:ext uri="{FF2B5EF4-FFF2-40B4-BE49-F238E27FC236}">
-                <a16:creationId xmlns:a16="http://schemas.microsoft.com/office/drawing/2014/main" id="{5D6771F1-A256-591E-BED7-8E5EC8D1AEF3}"/>
-              </a:ext>
-            </a:extLst>
-          </p:cNvPr>
+            <a:endParaRPr lang="en-US" dirty="0"/>
+          </a:p>
+        </p:txBody>
+      </p:sp>
+      <p:sp>
+        <p:nvSpPr>
+          <p:cNvPr id="4" name="Date Placeholder 3"/>
           <p:cNvSpPr>
             <a:spLocks noGrp="1"/>
           </p:cNvSpPr>
@@ -879,13 +771,7 @@
       </p:sp>
       <p:sp>
         <p:nvSpPr>
-          <p:cNvPr id="5" name="Footer Placeholder 4">
-            <a:extLst>
-              <a:ext uri="{FF2B5EF4-FFF2-40B4-BE49-F238E27FC236}">
-                <a16:creationId xmlns:a16="http://schemas.microsoft.com/office/drawing/2014/main" id="{386810FB-BACD-E805-234E-A6D823A76B85}"/>
-              </a:ext>
-            </a:extLst>
-          </p:cNvPr>
+          <p:cNvPr id="5" name="Footer Placeholder 4"/>
           <p:cNvSpPr>
             <a:spLocks noGrp="1"/>
           </p:cNvSpPr>
@@ -904,13 +790,7 @@
       </p:sp>
       <p:sp>
         <p:nvSpPr>
-          <p:cNvPr id="6" name="Slide Number Placeholder 5">
-            <a:extLst>
-              <a:ext uri="{FF2B5EF4-FFF2-40B4-BE49-F238E27FC236}">
-                <a16:creationId xmlns:a16="http://schemas.microsoft.com/office/drawing/2014/main" id="{9FCE4B7F-7A7C-F563-4AB0-3445C09EC161}"/>
-              </a:ext>
-            </a:extLst>
-          </p:cNvPr>
+          <p:cNvPr id="6" name="Slide Number Placeholder 5"/>
           <p:cNvSpPr>
             <a:spLocks noGrp="1"/>
           </p:cNvSpPr>
@@ -934,7 +814,7 @@
     </p:spTree>
     <p:extLst>
       <p:ext uri="{BB962C8B-B14F-4D97-AF65-F5344CB8AC3E}">
-        <p14:creationId xmlns:p14="http://schemas.microsoft.com/office/powerpoint/2010/main" val="4099862097"/>
+        <p14:creationId xmlns:p14="http://schemas.microsoft.com/office/powerpoint/2010/main" val="1669359075"/>
       </p:ext>
     </p:extLst>
   </p:cSld>
@@ -963,13 +843,7 @@
       </p:grpSpPr>
       <p:sp>
         <p:nvSpPr>
-          <p:cNvPr id="2" name="Title 1">
-            <a:extLst>
-              <a:ext uri="{FF2B5EF4-FFF2-40B4-BE49-F238E27FC236}">
-                <a16:creationId xmlns:a16="http://schemas.microsoft.com/office/drawing/2014/main" id="{CDAAAF33-4CB3-1D46-3DB8-48ABD52C25D6}"/>
-              </a:ext>
-            </a:extLst>
-          </p:cNvPr>
+          <p:cNvPr id="2" name="Title 1"/>
           <p:cNvSpPr>
             <a:spLocks noGrp="1"/>
           </p:cNvSpPr>
@@ -979,35 +853,29 @@
         </p:nvSpPr>
         <p:spPr>
           <a:xfrm>
-            <a:off x="831850" y="1709738"/>
-            <a:ext cx="10515600" cy="2852737"/>
+            <a:off x="2065654" y="5331063"/>
+            <a:ext cx="26112371" cy="8894992"/>
           </a:xfrm>
         </p:spPr>
         <p:txBody>
           <a:bodyPr anchor="b"/>
           <a:lstStyle>
             <a:lvl1pPr>
-              <a:defRPr sz="6000"/>
+              <a:defRPr sz="18709"/>
             </a:lvl1pPr>
           </a:lstStyle>
           <a:p>
             <a:r>
-              <a:rPr lang="en-US"/>
+              <a:rPr lang="en-GB"/>
               <a:t>Click to edit Master title style</a:t>
             </a:r>
-            <a:endParaRPr lang="en-GB"/>
-          </a:p>
-        </p:txBody>
-      </p:sp>
-      <p:sp>
-        <p:nvSpPr>
-          <p:cNvPr id="3" name="Text Placeholder 2">
-            <a:extLst>
-              <a:ext uri="{FF2B5EF4-FFF2-40B4-BE49-F238E27FC236}">
-                <a16:creationId xmlns:a16="http://schemas.microsoft.com/office/drawing/2014/main" id="{3AC7CD0C-898E-1478-5D96-9448808B7197}"/>
-              </a:ext>
-            </a:extLst>
-          </p:cNvPr>
+            <a:endParaRPr lang="en-US" dirty="0"/>
+          </a:p>
+        </p:txBody>
+      </p:sp>
+      <p:sp>
+        <p:nvSpPr>
+          <p:cNvPr id="3" name="Text Placeholder 2"/>
           <p:cNvSpPr>
             <a:spLocks noGrp="1"/>
           </p:cNvSpPr>
@@ -1017,8 +885,8 @@
         </p:nvSpPr>
         <p:spPr>
           <a:xfrm>
-            <a:off x="831850" y="4589463"/>
-            <a:ext cx="10515600" cy="1500187"/>
+            <a:off x="2065654" y="14310205"/>
+            <a:ext cx="26112371" cy="4677666"/>
           </a:xfrm>
         </p:spPr>
         <p:txBody>
@@ -1026,7 +894,7 @@
           <a:lstStyle>
             <a:lvl1pPr marL="0" indent="0">
               <a:buNone/>
-              <a:defRPr sz="2400">
+              <a:defRPr sz="7483">
                 <a:solidFill>
                   <a:schemeClr val="tx1">
                     <a:tint val="82000"/>
@@ -1034,9 +902,9 @@
                 </a:solidFill>
               </a:defRPr>
             </a:lvl1pPr>
-            <a:lvl2pPr marL="457200" indent="0">
-              <a:buNone/>
-              <a:defRPr sz="2000">
+            <a:lvl2pPr marL="1425595" indent="0">
+              <a:buNone/>
+              <a:defRPr sz="6236">
                 <a:solidFill>
                   <a:schemeClr val="tx1">
                     <a:tint val="82000"/>
@@ -1044,9 +912,9 @@
                 </a:solidFill>
               </a:defRPr>
             </a:lvl2pPr>
-            <a:lvl3pPr marL="914400" indent="0">
-              <a:buNone/>
-              <a:defRPr sz="1800">
+            <a:lvl3pPr marL="2851191" indent="0">
+              <a:buNone/>
+              <a:defRPr sz="5613">
                 <a:solidFill>
                   <a:schemeClr val="tx1">
                     <a:tint val="82000"/>
@@ -1054,9 +922,9 @@
                 </a:solidFill>
               </a:defRPr>
             </a:lvl3pPr>
-            <a:lvl4pPr marL="1371600" indent="0">
-              <a:buNone/>
-              <a:defRPr sz="1600">
+            <a:lvl4pPr marL="4276786" indent="0">
+              <a:buNone/>
+              <a:defRPr sz="4989">
                 <a:solidFill>
                   <a:schemeClr val="tx1">
                     <a:tint val="82000"/>
@@ -1064,9 +932,9 @@
                 </a:solidFill>
               </a:defRPr>
             </a:lvl4pPr>
-            <a:lvl5pPr marL="1828800" indent="0">
-              <a:buNone/>
-              <a:defRPr sz="1600">
+            <a:lvl5pPr marL="5702381" indent="0">
+              <a:buNone/>
+              <a:defRPr sz="4989">
                 <a:solidFill>
                   <a:schemeClr val="tx1">
                     <a:tint val="82000"/>
@@ -1074,9 +942,9 @@
                 </a:solidFill>
               </a:defRPr>
             </a:lvl5pPr>
-            <a:lvl6pPr marL="2286000" indent="0">
-              <a:buNone/>
-              <a:defRPr sz="1600">
+            <a:lvl6pPr marL="7127977" indent="0">
+              <a:buNone/>
+              <a:defRPr sz="4989">
                 <a:solidFill>
                   <a:schemeClr val="tx1">
                     <a:tint val="82000"/>
@@ -1084,9 +952,9 @@
                 </a:solidFill>
               </a:defRPr>
             </a:lvl6pPr>
-            <a:lvl7pPr marL="2743200" indent="0">
-              <a:buNone/>
-              <a:defRPr sz="1600">
+            <a:lvl7pPr marL="8553572" indent="0">
+              <a:buNone/>
+              <a:defRPr sz="4989">
                 <a:solidFill>
                   <a:schemeClr val="tx1">
                     <a:tint val="82000"/>
@@ -1094,9 +962,9 @@
                 </a:solidFill>
               </a:defRPr>
             </a:lvl7pPr>
-            <a:lvl8pPr marL="3200400" indent="0">
-              <a:buNone/>
-              <a:defRPr sz="1600">
+            <a:lvl8pPr marL="9979167" indent="0">
+              <a:buNone/>
+              <a:defRPr sz="4989">
                 <a:solidFill>
                   <a:schemeClr val="tx1">
                     <a:tint val="82000"/>
@@ -1104,9 +972,9 @@
                 </a:solidFill>
               </a:defRPr>
             </a:lvl8pPr>
-            <a:lvl9pPr marL="3657600" indent="0">
-              <a:buNone/>
-              <a:defRPr sz="1600">
+            <a:lvl9pPr marL="11404763" indent="0">
+              <a:buNone/>
+              <a:defRPr sz="4989">
                 <a:solidFill>
                   <a:schemeClr val="tx1">
                     <a:tint val="82000"/>
@@ -1118,7 +986,7 @@
           <a:p>
             <a:pPr lvl="0"/>
             <a:r>
-              <a:rPr lang="en-US"/>
+              <a:rPr lang="en-GB"/>
               <a:t>Click to edit Master text styles</a:t>
             </a:r>
           </a:p>
@@ -1126,13 +994,7 @@
       </p:sp>
       <p:sp>
         <p:nvSpPr>
-          <p:cNvPr id="4" name="Date Placeholder 3">
-            <a:extLst>
-              <a:ext uri="{FF2B5EF4-FFF2-40B4-BE49-F238E27FC236}">
-                <a16:creationId xmlns:a16="http://schemas.microsoft.com/office/drawing/2014/main" id="{96BC78E4-4815-3437-EB62-1129C00FF7EB}"/>
-              </a:ext>
-            </a:extLst>
-          </p:cNvPr>
+          <p:cNvPr id="4" name="Date Placeholder 3"/>
           <p:cNvSpPr>
             <a:spLocks noGrp="1"/>
           </p:cNvSpPr>
@@ -1155,13 +1017,7 @@
       </p:sp>
       <p:sp>
         <p:nvSpPr>
-          <p:cNvPr id="5" name="Footer Placeholder 4">
-            <a:extLst>
-              <a:ext uri="{FF2B5EF4-FFF2-40B4-BE49-F238E27FC236}">
-                <a16:creationId xmlns:a16="http://schemas.microsoft.com/office/drawing/2014/main" id="{5AA160BC-3AC8-168F-9CB1-CE0F3B22DAE6}"/>
-              </a:ext>
-            </a:extLst>
-          </p:cNvPr>
+          <p:cNvPr id="5" name="Footer Placeholder 4"/>
           <p:cNvSpPr>
             <a:spLocks noGrp="1"/>
           </p:cNvSpPr>
@@ -1180,13 +1036,7 @@
       </p:sp>
       <p:sp>
         <p:nvSpPr>
-          <p:cNvPr id="6" name="Slide Number Placeholder 5">
-            <a:extLst>
-              <a:ext uri="{FF2B5EF4-FFF2-40B4-BE49-F238E27FC236}">
-                <a16:creationId xmlns:a16="http://schemas.microsoft.com/office/drawing/2014/main" id="{2761A0B8-238E-BBFB-1C8A-25661F6B3B4E}"/>
-              </a:ext>
-            </a:extLst>
-          </p:cNvPr>
+          <p:cNvPr id="6" name="Slide Number Placeholder 5"/>
           <p:cNvSpPr>
             <a:spLocks noGrp="1"/>
           </p:cNvSpPr>
@@ -1210,7 +1060,7 @@
     </p:spTree>
     <p:extLst>
       <p:ext uri="{BB962C8B-B14F-4D97-AF65-F5344CB8AC3E}">
-        <p14:creationId xmlns:p14="http://schemas.microsoft.com/office/powerpoint/2010/main" val="1439003350"/>
+        <p14:creationId xmlns:p14="http://schemas.microsoft.com/office/powerpoint/2010/main" val="2184752961"/>
       </p:ext>
     </p:extLst>
   </p:cSld>
@@ -1239,13 +1089,7 @@
       </p:grpSpPr>
       <p:sp>
         <p:nvSpPr>
-          <p:cNvPr id="2" name="Title 1">
-            <a:extLst>
-              <a:ext uri="{FF2B5EF4-FFF2-40B4-BE49-F238E27FC236}">
-                <a16:creationId xmlns:a16="http://schemas.microsoft.com/office/drawing/2014/main" id="{26AC60A2-F109-A919-530C-C4689EA29205}"/>
-              </a:ext>
-            </a:extLst>
-          </p:cNvPr>
+          <p:cNvPr id="2" name="Title 1"/>
           <p:cNvSpPr>
             <a:spLocks noGrp="1"/>
           </p:cNvSpPr>
@@ -1259,22 +1103,16 @@
           <a:lstStyle/>
           <a:p>
             <a:r>
-              <a:rPr lang="en-US"/>
+              <a:rPr lang="en-GB"/>
               <a:t>Click to edit Master title style</a:t>
             </a:r>
-            <a:endParaRPr lang="en-GB"/>
-          </a:p>
-        </p:txBody>
-      </p:sp>
-      <p:sp>
-        <p:nvSpPr>
-          <p:cNvPr id="3" name="Content Placeholder 2">
-            <a:extLst>
-              <a:ext uri="{FF2B5EF4-FFF2-40B4-BE49-F238E27FC236}">
-                <a16:creationId xmlns:a16="http://schemas.microsoft.com/office/drawing/2014/main" id="{396F208B-0441-4075-84F3-DBE95EDCDB98}"/>
-              </a:ext>
-            </a:extLst>
-          </p:cNvPr>
+            <a:endParaRPr lang="en-US" dirty="0"/>
+          </a:p>
+        </p:txBody>
+      </p:sp>
+      <p:sp>
+        <p:nvSpPr>
+          <p:cNvPr id="3" name="Content Placeholder 2"/>
           <p:cNvSpPr>
             <a:spLocks noGrp="1"/>
           </p:cNvSpPr>
@@ -1284,8 +1122,8 @@
         </p:nvSpPr>
         <p:spPr>
           <a:xfrm>
-            <a:off x="838200" y="1825625"/>
-            <a:ext cx="5181600" cy="4351338"/>
+            <a:off x="2081421" y="5692400"/>
+            <a:ext cx="12866966" cy="13567714"/>
           </a:xfrm>
         </p:spPr>
         <p:txBody>
@@ -1294,50 +1132,44 @@
           <a:p>
             <a:pPr lvl="0"/>
             <a:r>
-              <a:rPr lang="en-US"/>
+              <a:rPr lang="en-GB"/>
               <a:t>Click to edit Master text styles</a:t>
             </a:r>
           </a:p>
           <a:p>
             <a:pPr lvl="1"/>
             <a:r>
-              <a:rPr lang="en-US"/>
+              <a:rPr lang="en-GB"/>
               <a:t>Second level</a:t>
             </a:r>
           </a:p>
           <a:p>
             <a:pPr lvl="2"/>
             <a:r>
-              <a:rPr lang="en-US"/>
+              <a:rPr lang="en-GB"/>
               <a:t>Third level</a:t>
             </a:r>
           </a:p>
           <a:p>
             <a:pPr lvl="3"/>
             <a:r>
-              <a:rPr lang="en-US"/>
+              <a:rPr lang="en-GB"/>
               <a:t>Fourth level</a:t>
             </a:r>
           </a:p>
           <a:p>
             <a:pPr lvl="4"/>
             <a:r>
-              <a:rPr lang="en-US"/>
+              <a:rPr lang="en-GB"/>
               <a:t>Fifth level</a:t>
             </a:r>
-            <a:endParaRPr lang="en-GB"/>
-          </a:p>
-        </p:txBody>
-      </p:sp>
-      <p:sp>
-        <p:nvSpPr>
-          <p:cNvPr id="4" name="Content Placeholder 3">
-            <a:extLst>
-              <a:ext uri="{FF2B5EF4-FFF2-40B4-BE49-F238E27FC236}">
-                <a16:creationId xmlns:a16="http://schemas.microsoft.com/office/drawing/2014/main" id="{8DB7B7C2-B48E-071C-8DE8-394D6E7B830C}"/>
-              </a:ext>
-            </a:extLst>
-          </p:cNvPr>
+            <a:endParaRPr lang="en-US" dirty="0"/>
+          </a:p>
+        </p:txBody>
+      </p:sp>
+      <p:sp>
+        <p:nvSpPr>
+          <p:cNvPr id="4" name="Content Placeholder 3"/>
           <p:cNvSpPr>
             <a:spLocks noGrp="1"/>
           </p:cNvSpPr>
@@ -1347,8 +1179,8 @@
         </p:nvSpPr>
         <p:spPr>
           <a:xfrm>
-            <a:off x="6172200" y="1825625"/>
-            <a:ext cx="5181600" cy="4351338"/>
+            <a:off x="15326826" y="5692400"/>
+            <a:ext cx="12866966" cy="13567714"/>
           </a:xfrm>
         </p:spPr>
         <p:txBody>
@@ -1357,50 +1189,44 @@
           <a:p>
             <a:pPr lvl="0"/>
             <a:r>
-              <a:rPr lang="en-US"/>
+              <a:rPr lang="en-GB"/>
               <a:t>Click to edit Master text styles</a:t>
             </a:r>
           </a:p>
           <a:p>
             <a:pPr lvl="1"/>
             <a:r>
-              <a:rPr lang="en-US"/>
+              <a:rPr lang="en-GB"/>
               <a:t>Second level</a:t>
             </a:r>
           </a:p>
           <a:p>
             <a:pPr lvl="2"/>
             <a:r>
-              <a:rPr lang="en-US"/>
+              <a:rPr lang="en-GB"/>
               <a:t>Third level</a:t>
             </a:r>
           </a:p>
           <a:p>
             <a:pPr lvl="3"/>
             <a:r>
-              <a:rPr lang="en-US"/>
+              <a:rPr lang="en-GB"/>
               <a:t>Fourth level</a:t>
             </a:r>
           </a:p>
           <a:p>
             <a:pPr lvl="4"/>
             <a:r>
-              <a:rPr lang="en-US"/>
+              <a:rPr lang="en-GB"/>
               <a:t>Fifth level</a:t>
             </a:r>
-            <a:endParaRPr lang="en-GB"/>
-          </a:p>
-        </p:txBody>
-      </p:sp>
-      <p:sp>
-        <p:nvSpPr>
-          <p:cNvPr id="5" name="Date Placeholder 4">
-            <a:extLst>
-              <a:ext uri="{FF2B5EF4-FFF2-40B4-BE49-F238E27FC236}">
-                <a16:creationId xmlns:a16="http://schemas.microsoft.com/office/drawing/2014/main" id="{64790B54-CEC7-7D93-E225-FD053A3A19FE}"/>
-              </a:ext>
-            </a:extLst>
-          </p:cNvPr>
+            <a:endParaRPr lang="en-US" dirty="0"/>
+          </a:p>
+        </p:txBody>
+      </p:sp>
+      <p:sp>
+        <p:nvSpPr>
+          <p:cNvPr id="5" name="Date Placeholder 4"/>
           <p:cNvSpPr>
             <a:spLocks noGrp="1"/>
           </p:cNvSpPr>
@@ -1423,13 +1249,7 @@
       </p:sp>
       <p:sp>
         <p:nvSpPr>
-          <p:cNvPr id="6" name="Footer Placeholder 5">
-            <a:extLst>
-              <a:ext uri="{FF2B5EF4-FFF2-40B4-BE49-F238E27FC236}">
-                <a16:creationId xmlns:a16="http://schemas.microsoft.com/office/drawing/2014/main" id="{9B1868C8-826B-65FA-195F-19B73BF0A87D}"/>
-              </a:ext>
-            </a:extLst>
-          </p:cNvPr>
+          <p:cNvPr id="6" name="Footer Placeholder 5"/>
           <p:cNvSpPr>
             <a:spLocks noGrp="1"/>
           </p:cNvSpPr>
@@ -1448,13 +1268,7 @@
       </p:sp>
       <p:sp>
         <p:nvSpPr>
-          <p:cNvPr id="7" name="Slide Number Placeholder 6">
-            <a:extLst>
-              <a:ext uri="{FF2B5EF4-FFF2-40B4-BE49-F238E27FC236}">
-                <a16:creationId xmlns:a16="http://schemas.microsoft.com/office/drawing/2014/main" id="{EEA3F6FC-76D5-38A2-6983-7DD198F68477}"/>
-              </a:ext>
-            </a:extLst>
-          </p:cNvPr>
+          <p:cNvPr id="7" name="Slide Number Placeholder 6"/>
           <p:cNvSpPr>
             <a:spLocks noGrp="1"/>
           </p:cNvSpPr>
@@ -1478,7 +1292,7 @@
     </p:spTree>
     <p:extLst>
       <p:ext uri="{BB962C8B-B14F-4D97-AF65-F5344CB8AC3E}">
-        <p14:creationId xmlns:p14="http://schemas.microsoft.com/office/powerpoint/2010/main" val="1075791609"/>
+        <p14:creationId xmlns:p14="http://schemas.microsoft.com/office/powerpoint/2010/main" val="1800160686"/>
       </p:ext>
     </p:extLst>
   </p:cSld>
@@ -1507,13 +1321,7 @@
       </p:grpSpPr>
       <p:sp>
         <p:nvSpPr>
-          <p:cNvPr id="2" name="Title 1">
-            <a:extLst>
-              <a:ext uri="{FF2B5EF4-FFF2-40B4-BE49-F238E27FC236}">
-                <a16:creationId xmlns:a16="http://schemas.microsoft.com/office/drawing/2014/main" id="{E3F3E78E-BDA2-6D2B-AB03-115A04B44CF1}"/>
-              </a:ext>
-            </a:extLst>
-          </p:cNvPr>
+          <p:cNvPr id="2" name="Title 1"/>
           <p:cNvSpPr>
             <a:spLocks noGrp="1"/>
           </p:cNvSpPr>
@@ -1523,8 +1331,8 @@
         </p:nvSpPr>
         <p:spPr>
           <a:xfrm>
-            <a:off x="839788" y="365125"/>
-            <a:ext cx="10515600" cy="1325563"/>
+            <a:off x="2085364" y="1138485"/>
+            <a:ext cx="26112371" cy="4133179"/>
           </a:xfrm>
         </p:spPr>
         <p:txBody>
@@ -1532,22 +1340,16 @@
           <a:lstStyle/>
           <a:p>
             <a:r>
-              <a:rPr lang="en-US"/>
+              <a:rPr lang="en-GB"/>
               <a:t>Click to edit Master title style</a:t>
             </a:r>
-            <a:endParaRPr lang="en-GB"/>
-          </a:p>
-        </p:txBody>
-      </p:sp>
-      <p:sp>
-        <p:nvSpPr>
-          <p:cNvPr id="3" name="Text Placeholder 2">
-            <a:extLst>
-              <a:ext uri="{FF2B5EF4-FFF2-40B4-BE49-F238E27FC236}">
-                <a16:creationId xmlns:a16="http://schemas.microsoft.com/office/drawing/2014/main" id="{D2FD78CE-AEA1-74A5-2208-278FD4308712}"/>
-              </a:ext>
-            </a:extLst>
-          </p:cNvPr>
+            <a:endParaRPr lang="en-US" dirty="0"/>
+          </a:p>
+        </p:txBody>
+      </p:sp>
+      <p:sp>
+        <p:nvSpPr>
+          <p:cNvPr id="3" name="Text Placeholder 2"/>
           <p:cNvSpPr>
             <a:spLocks noGrp="1"/>
           </p:cNvSpPr>
@@ -1557,8 +1359,8 @@
         </p:nvSpPr>
         <p:spPr>
           <a:xfrm>
-            <a:off x="839788" y="1681163"/>
-            <a:ext cx="5157787" cy="823912"/>
+            <a:off x="2085368" y="5241960"/>
+            <a:ext cx="12807832" cy="2569003"/>
           </a:xfrm>
         </p:spPr>
         <p:txBody>
@@ -1566,45 +1368,45 @@
           <a:lstStyle>
             <a:lvl1pPr marL="0" indent="0">
               <a:buNone/>
-              <a:defRPr sz="2400" b="1"/>
+              <a:defRPr sz="7483" b="1"/>
             </a:lvl1pPr>
-            <a:lvl2pPr marL="457200" indent="0">
-              <a:buNone/>
-              <a:defRPr sz="2000" b="1"/>
+            <a:lvl2pPr marL="1425595" indent="0">
+              <a:buNone/>
+              <a:defRPr sz="6236" b="1"/>
             </a:lvl2pPr>
-            <a:lvl3pPr marL="914400" indent="0">
-              <a:buNone/>
-              <a:defRPr sz="1800" b="1"/>
+            <a:lvl3pPr marL="2851191" indent="0">
+              <a:buNone/>
+              <a:defRPr sz="5613" b="1"/>
             </a:lvl3pPr>
-            <a:lvl4pPr marL="1371600" indent="0">
-              <a:buNone/>
-              <a:defRPr sz="1600" b="1"/>
+            <a:lvl4pPr marL="4276786" indent="0">
+              <a:buNone/>
+              <a:defRPr sz="4989" b="1"/>
             </a:lvl4pPr>
-            <a:lvl5pPr marL="1828800" indent="0">
-              <a:buNone/>
-              <a:defRPr sz="1600" b="1"/>
+            <a:lvl5pPr marL="5702381" indent="0">
+              <a:buNone/>
+              <a:defRPr sz="4989" b="1"/>
             </a:lvl5pPr>
-            <a:lvl6pPr marL="2286000" indent="0">
-              <a:buNone/>
-              <a:defRPr sz="1600" b="1"/>
+            <a:lvl6pPr marL="7127977" indent="0">
+              <a:buNone/>
+              <a:defRPr sz="4989" b="1"/>
             </a:lvl6pPr>
-            <a:lvl7pPr marL="2743200" indent="0">
-              <a:buNone/>
-              <a:defRPr sz="1600" b="1"/>
+            <a:lvl7pPr marL="8553572" indent="0">
+              <a:buNone/>
+              <a:defRPr sz="4989" b="1"/>
             </a:lvl7pPr>
-            <a:lvl8pPr marL="3200400" indent="0">
-              <a:buNone/>
-              <a:defRPr sz="1600" b="1"/>
+            <a:lvl8pPr marL="9979167" indent="0">
+              <a:buNone/>
+              <a:defRPr sz="4989" b="1"/>
             </a:lvl8pPr>
-            <a:lvl9pPr marL="3657600" indent="0">
-              <a:buNone/>
-              <a:defRPr sz="1600" b="1"/>
+            <a:lvl9pPr marL="11404763" indent="0">
+              <a:buNone/>
+              <a:defRPr sz="4989" b="1"/>
             </a:lvl9pPr>
           </a:lstStyle>
           <a:p>
             <a:pPr lvl="0"/>
             <a:r>
-              <a:rPr lang="en-US"/>
+              <a:rPr lang="en-GB"/>
               <a:t>Click to edit Master text styles</a:t>
             </a:r>
           </a:p>
@@ -1612,13 +1414,7 @@
       </p:sp>
       <p:sp>
         <p:nvSpPr>
-          <p:cNvPr id="4" name="Content Placeholder 3">
-            <a:extLst>
-              <a:ext uri="{FF2B5EF4-FFF2-40B4-BE49-F238E27FC236}">
-                <a16:creationId xmlns:a16="http://schemas.microsoft.com/office/drawing/2014/main" id="{E4F21B74-CE2C-AE8B-EA1B-0B3D1116965E}"/>
-              </a:ext>
-            </a:extLst>
-          </p:cNvPr>
+          <p:cNvPr id="4" name="Content Placeholder 3"/>
           <p:cNvSpPr>
             <a:spLocks noGrp="1"/>
           </p:cNvSpPr>
@@ -1628,8 +1424,8 @@
         </p:nvSpPr>
         <p:spPr>
           <a:xfrm>
-            <a:off x="839788" y="2505075"/>
-            <a:ext cx="5157787" cy="3684588"/>
+            <a:off x="2085368" y="7810963"/>
+            <a:ext cx="12807832" cy="11488750"/>
           </a:xfrm>
         </p:spPr>
         <p:txBody>
@@ -1638,50 +1434,44 @@
           <a:p>
             <a:pPr lvl="0"/>
             <a:r>
-              <a:rPr lang="en-US"/>
+              <a:rPr lang="en-GB"/>
               <a:t>Click to edit Master text styles</a:t>
             </a:r>
           </a:p>
           <a:p>
             <a:pPr lvl="1"/>
             <a:r>
-              <a:rPr lang="en-US"/>
+              <a:rPr lang="en-GB"/>
               <a:t>Second level</a:t>
             </a:r>
           </a:p>
           <a:p>
             <a:pPr lvl="2"/>
             <a:r>
-              <a:rPr lang="en-US"/>
+              <a:rPr lang="en-GB"/>
               <a:t>Third level</a:t>
             </a:r>
           </a:p>
           <a:p>
             <a:pPr lvl="3"/>
             <a:r>
-              <a:rPr lang="en-US"/>
+              <a:rPr lang="en-GB"/>
               <a:t>Fourth level</a:t>
             </a:r>
           </a:p>
           <a:p>
             <a:pPr lvl="4"/>
             <a:r>
-              <a:rPr lang="en-US"/>
+              <a:rPr lang="en-GB"/>
               <a:t>Fifth level</a:t>
             </a:r>
-            <a:endParaRPr lang="en-GB"/>
-          </a:p>
-        </p:txBody>
-      </p:sp>
-      <p:sp>
-        <p:nvSpPr>
-          <p:cNvPr id="5" name="Text Placeholder 4">
-            <a:extLst>
-              <a:ext uri="{FF2B5EF4-FFF2-40B4-BE49-F238E27FC236}">
-                <a16:creationId xmlns:a16="http://schemas.microsoft.com/office/drawing/2014/main" id="{B3062D53-FCFE-6F28-765F-E810002DC1E9}"/>
-              </a:ext>
-            </a:extLst>
-          </p:cNvPr>
+            <a:endParaRPr lang="en-US" dirty="0"/>
+          </a:p>
+        </p:txBody>
+      </p:sp>
+      <p:sp>
+        <p:nvSpPr>
+          <p:cNvPr id="5" name="Text Placeholder 4"/>
           <p:cNvSpPr>
             <a:spLocks noGrp="1"/>
           </p:cNvSpPr>
@@ -1691,8 +1481,8 @@
         </p:nvSpPr>
         <p:spPr>
           <a:xfrm>
-            <a:off x="6172200" y="1681163"/>
-            <a:ext cx="5183188" cy="823912"/>
+            <a:off x="15326828" y="5241960"/>
+            <a:ext cx="12870909" cy="2569003"/>
           </a:xfrm>
         </p:spPr>
         <p:txBody>
@@ -1700,45 +1490,45 @@
           <a:lstStyle>
             <a:lvl1pPr marL="0" indent="0">
               <a:buNone/>
-              <a:defRPr sz="2400" b="1"/>
+              <a:defRPr sz="7483" b="1"/>
             </a:lvl1pPr>
-            <a:lvl2pPr marL="457200" indent="0">
-              <a:buNone/>
-              <a:defRPr sz="2000" b="1"/>
+            <a:lvl2pPr marL="1425595" indent="0">
+              <a:buNone/>
+              <a:defRPr sz="6236" b="1"/>
             </a:lvl2pPr>
-            <a:lvl3pPr marL="914400" indent="0">
-              <a:buNone/>
-              <a:defRPr sz="1800" b="1"/>
+            <a:lvl3pPr marL="2851191" indent="0">
+              <a:buNone/>
+              <a:defRPr sz="5613" b="1"/>
             </a:lvl3pPr>
-            <a:lvl4pPr marL="1371600" indent="0">
-              <a:buNone/>
-              <a:defRPr sz="1600" b="1"/>
+            <a:lvl4pPr marL="4276786" indent="0">
+              <a:buNone/>
+              <a:defRPr sz="4989" b="1"/>
             </a:lvl4pPr>
-            <a:lvl5pPr marL="1828800" indent="0">
-              <a:buNone/>
-              <a:defRPr sz="1600" b="1"/>
+            <a:lvl5pPr marL="5702381" indent="0">
+              <a:buNone/>
+              <a:defRPr sz="4989" b="1"/>
             </a:lvl5pPr>
-            <a:lvl6pPr marL="2286000" indent="0">
-              <a:buNone/>
-              <a:defRPr sz="1600" b="1"/>
+            <a:lvl6pPr marL="7127977" indent="0">
+              <a:buNone/>
+              <a:defRPr sz="4989" b="1"/>
             </a:lvl6pPr>
-            <a:lvl7pPr marL="2743200" indent="0">
-              <a:buNone/>
-              <a:defRPr sz="1600" b="1"/>
+            <a:lvl7pPr marL="8553572" indent="0">
+              <a:buNone/>
+              <a:defRPr sz="4989" b="1"/>
             </a:lvl7pPr>
-            <a:lvl8pPr marL="3200400" indent="0">
-              <a:buNone/>
-              <a:defRPr sz="1600" b="1"/>
+            <a:lvl8pPr marL="9979167" indent="0">
+              <a:buNone/>
+              <a:defRPr sz="4989" b="1"/>
             </a:lvl8pPr>
-            <a:lvl9pPr marL="3657600" indent="0">
-              <a:buNone/>
-              <a:defRPr sz="1600" b="1"/>
+            <a:lvl9pPr marL="11404763" indent="0">
+              <a:buNone/>
+              <a:defRPr sz="4989" b="1"/>
             </a:lvl9pPr>
           </a:lstStyle>
           <a:p>
             <a:pPr lvl="0"/>
             <a:r>
-              <a:rPr lang="en-US"/>
+              <a:rPr lang="en-GB"/>
               <a:t>Click to edit Master text styles</a:t>
             </a:r>
           </a:p>
@@ -1746,13 +1536,7 @@
       </p:sp>
       <p:sp>
         <p:nvSpPr>
-          <p:cNvPr id="6" name="Content Placeholder 5">
-            <a:extLst>
-              <a:ext uri="{FF2B5EF4-FFF2-40B4-BE49-F238E27FC236}">
-                <a16:creationId xmlns:a16="http://schemas.microsoft.com/office/drawing/2014/main" id="{905A90F4-33DA-FE3C-EB38-9E048BB95CA6}"/>
-              </a:ext>
-            </a:extLst>
-          </p:cNvPr>
+          <p:cNvPr id="6" name="Content Placeholder 5"/>
           <p:cNvSpPr>
             <a:spLocks noGrp="1"/>
           </p:cNvSpPr>
@@ -1762,8 +1546,8 @@
         </p:nvSpPr>
         <p:spPr>
           <a:xfrm>
-            <a:off x="6172200" y="2505075"/>
-            <a:ext cx="5183188" cy="3684588"/>
+            <a:off x="15326828" y="7810963"/>
+            <a:ext cx="12870909" cy="11488750"/>
           </a:xfrm>
         </p:spPr>
         <p:txBody>
@@ -1772,50 +1556,44 @@
           <a:p>
             <a:pPr lvl="0"/>
             <a:r>
-              <a:rPr lang="en-US"/>
+              <a:rPr lang="en-GB"/>
               <a:t>Click to edit Master text styles</a:t>
             </a:r>
           </a:p>
           <a:p>
             <a:pPr lvl="1"/>
             <a:r>
-              <a:rPr lang="en-US"/>
+              <a:rPr lang="en-GB"/>
               <a:t>Second level</a:t>
             </a:r>
           </a:p>
           <a:p>
             <a:pPr lvl="2"/>
             <a:r>
-              <a:rPr lang="en-US"/>
+              <a:rPr lang="en-GB"/>
               <a:t>Third level</a:t>
             </a:r>
           </a:p>
           <a:p>
             <a:pPr lvl="3"/>
             <a:r>
-              <a:rPr lang="en-US"/>
+              <a:rPr lang="en-GB"/>
               <a:t>Fourth level</a:t>
             </a:r>
           </a:p>
           <a:p>
             <a:pPr lvl="4"/>
             <a:r>
-              <a:rPr lang="en-US"/>
+              <a:rPr lang="en-GB"/>
               <a:t>Fifth level</a:t>
             </a:r>
-            <a:endParaRPr lang="en-GB"/>
-          </a:p>
-        </p:txBody>
-      </p:sp>
-      <p:sp>
-        <p:nvSpPr>
-          <p:cNvPr id="7" name="Date Placeholder 6">
-            <a:extLst>
-              <a:ext uri="{FF2B5EF4-FFF2-40B4-BE49-F238E27FC236}">
-                <a16:creationId xmlns:a16="http://schemas.microsoft.com/office/drawing/2014/main" id="{E919C5FD-5014-AF47-A316-319CF4839162}"/>
-              </a:ext>
-            </a:extLst>
-          </p:cNvPr>
+            <a:endParaRPr lang="en-US" dirty="0"/>
+          </a:p>
+        </p:txBody>
+      </p:sp>
+      <p:sp>
+        <p:nvSpPr>
+          <p:cNvPr id="7" name="Date Placeholder 6"/>
           <p:cNvSpPr>
             <a:spLocks noGrp="1"/>
           </p:cNvSpPr>
@@ -1838,13 +1616,7 @@
       </p:sp>
       <p:sp>
         <p:nvSpPr>
-          <p:cNvPr id="8" name="Footer Placeholder 7">
-            <a:extLst>
-              <a:ext uri="{FF2B5EF4-FFF2-40B4-BE49-F238E27FC236}">
-                <a16:creationId xmlns:a16="http://schemas.microsoft.com/office/drawing/2014/main" id="{9EF169B7-1767-331E-42BB-AE54F2F3952F}"/>
-              </a:ext>
-            </a:extLst>
-          </p:cNvPr>
+          <p:cNvPr id="8" name="Footer Placeholder 7"/>
           <p:cNvSpPr>
             <a:spLocks noGrp="1"/>
           </p:cNvSpPr>
@@ -1863,13 +1635,7 @@
       </p:sp>
       <p:sp>
         <p:nvSpPr>
-          <p:cNvPr id="9" name="Slide Number Placeholder 8">
-            <a:extLst>
-              <a:ext uri="{FF2B5EF4-FFF2-40B4-BE49-F238E27FC236}">
-                <a16:creationId xmlns:a16="http://schemas.microsoft.com/office/drawing/2014/main" id="{BBBCDC84-C9F1-086D-4787-8C77EC59FA99}"/>
-              </a:ext>
-            </a:extLst>
-          </p:cNvPr>
+          <p:cNvPr id="9" name="Slide Number Placeholder 8"/>
           <p:cNvSpPr>
             <a:spLocks noGrp="1"/>
           </p:cNvSpPr>
@@ -1893,7 +1659,7 @@
     </p:spTree>
     <p:extLst>
       <p:ext uri="{BB962C8B-B14F-4D97-AF65-F5344CB8AC3E}">
-        <p14:creationId xmlns:p14="http://schemas.microsoft.com/office/powerpoint/2010/main" val="285415460"/>
+        <p14:creationId xmlns:p14="http://schemas.microsoft.com/office/powerpoint/2010/main" val="4230026907"/>
       </p:ext>
     </p:extLst>
   </p:cSld>
@@ -1922,13 +1688,7 @@
       </p:grpSpPr>
       <p:sp>
         <p:nvSpPr>
-          <p:cNvPr id="2" name="Title 1">
-            <a:extLst>
-              <a:ext uri="{FF2B5EF4-FFF2-40B4-BE49-F238E27FC236}">
-                <a16:creationId xmlns:a16="http://schemas.microsoft.com/office/drawing/2014/main" id="{19ECBC70-B1F5-F471-677D-E0597394458B}"/>
-              </a:ext>
-            </a:extLst>
-          </p:cNvPr>
+          <p:cNvPr id="2" name="Title 1"/>
           <p:cNvSpPr>
             <a:spLocks noGrp="1"/>
           </p:cNvSpPr>
@@ -1942,22 +1702,16 @@
           <a:lstStyle/>
           <a:p>
             <a:r>
-              <a:rPr lang="en-US"/>
+              <a:rPr lang="en-GB"/>
               <a:t>Click to edit Master title style</a:t>
             </a:r>
-            <a:endParaRPr lang="en-GB"/>
-          </a:p>
-        </p:txBody>
-      </p:sp>
-      <p:sp>
-        <p:nvSpPr>
-          <p:cNvPr id="3" name="Date Placeholder 2">
-            <a:extLst>
-              <a:ext uri="{FF2B5EF4-FFF2-40B4-BE49-F238E27FC236}">
-                <a16:creationId xmlns:a16="http://schemas.microsoft.com/office/drawing/2014/main" id="{5A9E2C45-F0C0-8DB6-2DD0-F88E712FD1BC}"/>
-              </a:ext>
-            </a:extLst>
-          </p:cNvPr>
+            <a:endParaRPr lang="en-US" dirty="0"/>
+          </a:p>
+        </p:txBody>
+      </p:sp>
+      <p:sp>
+        <p:nvSpPr>
+          <p:cNvPr id="3" name="Date Placeholder 2"/>
           <p:cNvSpPr>
             <a:spLocks noGrp="1"/>
           </p:cNvSpPr>
@@ -1980,13 +1734,7 @@
       </p:sp>
       <p:sp>
         <p:nvSpPr>
-          <p:cNvPr id="4" name="Footer Placeholder 3">
-            <a:extLst>
-              <a:ext uri="{FF2B5EF4-FFF2-40B4-BE49-F238E27FC236}">
-                <a16:creationId xmlns:a16="http://schemas.microsoft.com/office/drawing/2014/main" id="{33DF4DE0-23C8-C585-4D2A-66D7D73CD845}"/>
-              </a:ext>
-            </a:extLst>
-          </p:cNvPr>
+          <p:cNvPr id="4" name="Footer Placeholder 3"/>
           <p:cNvSpPr>
             <a:spLocks noGrp="1"/>
           </p:cNvSpPr>
@@ -2005,13 +1753,7 @@
       </p:sp>
       <p:sp>
         <p:nvSpPr>
-          <p:cNvPr id="5" name="Slide Number Placeholder 4">
-            <a:extLst>
-              <a:ext uri="{FF2B5EF4-FFF2-40B4-BE49-F238E27FC236}">
-                <a16:creationId xmlns:a16="http://schemas.microsoft.com/office/drawing/2014/main" id="{C9F04A39-4849-F12D-DE0E-CE516529D27D}"/>
-              </a:ext>
-            </a:extLst>
-          </p:cNvPr>
+          <p:cNvPr id="5" name="Slide Number Placeholder 4"/>
           <p:cNvSpPr>
             <a:spLocks noGrp="1"/>
           </p:cNvSpPr>
@@ -2035,7 +1777,7 @@
     </p:spTree>
     <p:extLst>
       <p:ext uri="{BB962C8B-B14F-4D97-AF65-F5344CB8AC3E}">
-        <p14:creationId xmlns:p14="http://schemas.microsoft.com/office/powerpoint/2010/main" val="1762982498"/>
+        <p14:creationId xmlns:p14="http://schemas.microsoft.com/office/powerpoint/2010/main" val="3673719997"/>
       </p:ext>
     </p:extLst>
   </p:cSld>
@@ -2064,13 +1806,7 @@
       </p:grpSpPr>
       <p:sp>
         <p:nvSpPr>
-          <p:cNvPr id="2" name="Date Placeholder 1">
-            <a:extLst>
-              <a:ext uri="{FF2B5EF4-FFF2-40B4-BE49-F238E27FC236}">
-                <a16:creationId xmlns:a16="http://schemas.microsoft.com/office/drawing/2014/main" id="{B7DBFD66-A08C-6822-BE46-2CA332D7C796}"/>
-              </a:ext>
-            </a:extLst>
-          </p:cNvPr>
+          <p:cNvPr id="2" name="Date Placeholder 1"/>
           <p:cNvSpPr>
             <a:spLocks noGrp="1"/>
           </p:cNvSpPr>
@@ -2093,13 +1829,7 @@
       </p:sp>
       <p:sp>
         <p:nvSpPr>
-          <p:cNvPr id="3" name="Footer Placeholder 2">
-            <a:extLst>
-              <a:ext uri="{FF2B5EF4-FFF2-40B4-BE49-F238E27FC236}">
-                <a16:creationId xmlns:a16="http://schemas.microsoft.com/office/drawing/2014/main" id="{7CEAAA98-A511-1955-5E3B-DC95EABC5360}"/>
-              </a:ext>
-            </a:extLst>
-          </p:cNvPr>
+          <p:cNvPr id="3" name="Footer Placeholder 2"/>
           <p:cNvSpPr>
             <a:spLocks noGrp="1"/>
           </p:cNvSpPr>
@@ -2118,13 +1848,7 @@
       </p:sp>
       <p:sp>
         <p:nvSpPr>
-          <p:cNvPr id="4" name="Slide Number Placeholder 3">
-            <a:extLst>
-              <a:ext uri="{FF2B5EF4-FFF2-40B4-BE49-F238E27FC236}">
-                <a16:creationId xmlns:a16="http://schemas.microsoft.com/office/drawing/2014/main" id="{0648E66A-5294-D9CC-2DDD-AFB57C96B2D4}"/>
-              </a:ext>
-            </a:extLst>
-          </p:cNvPr>
+          <p:cNvPr id="4" name="Slide Number Placeholder 3"/>
           <p:cNvSpPr>
             <a:spLocks noGrp="1"/>
           </p:cNvSpPr>
@@ -2148,7 +1872,7 @@
     </p:spTree>
     <p:extLst>
       <p:ext uri="{BB962C8B-B14F-4D97-AF65-F5344CB8AC3E}">
-        <p14:creationId xmlns:p14="http://schemas.microsoft.com/office/powerpoint/2010/main" val="3297056635"/>
+        <p14:creationId xmlns:p14="http://schemas.microsoft.com/office/powerpoint/2010/main" val="737245702"/>
       </p:ext>
     </p:extLst>
   </p:cSld>
@@ -2177,13 +1901,7 @@
       </p:grpSpPr>
       <p:sp>
         <p:nvSpPr>
-          <p:cNvPr id="2" name="Title 1">
-            <a:extLst>
-              <a:ext uri="{FF2B5EF4-FFF2-40B4-BE49-F238E27FC236}">
-                <a16:creationId xmlns:a16="http://schemas.microsoft.com/office/drawing/2014/main" id="{64032C3D-075D-BCBE-84E9-0D94FC03F401}"/>
-              </a:ext>
-            </a:extLst>
-          </p:cNvPr>
+          <p:cNvPr id="2" name="Title 1"/>
           <p:cNvSpPr>
             <a:spLocks noGrp="1"/>
           </p:cNvSpPr>
@@ -2193,35 +1911,29 @@
         </p:nvSpPr>
         <p:spPr>
           <a:xfrm>
-            <a:off x="839788" y="457200"/>
-            <a:ext cx="3932237" cy="1600200"/>
+            <a:off x="2085364" y="1425575"/>
+            <a:ext cx="9764544" cy="4989513"/>
           </a:xfrm>
         </p:spPr>
         <p:txBody>
           <a:bodyPr anchor="b"/>
           <a:lstStyle>
             <a:lvl1pPr>
-              <a:defRPr sz="3200"/>
+              <a:defRPr sz="9978"/>
             </a:lvl1pPr>
           </a:lstStyle>
           <a:p>
             <a:r>
-              <a:rPr lang="en-US"/>
+              <a:rPr lang="en-GB"/>
               <a:t>Click to edit Master title style</a:t>
             </a:r>
-            <a:endParaRPr lang="en-GB"/>
-          </a:p>
-        </p:txBody>
-      </p:sp>
-      <p:sp>
-        <p:nvSpPr>
-          <p:cNvPr id="3" name="Content Placeholder 2">
-            <a:extLst>
-              <a:ext uri="{FF2B5EF4-FFF2-40B4-BE49-F238E27FC236}">
-                <a16:creationId xmlns:a16="http://schemas.microsoft.com/office/drawing/2014/main" id="{C0C1D56D-5FFE-1473-C343-EAF852555FD5}"/>
-              </a:ext>
-            </a:extLst>
-          </p:cNvPr>
+            <a:endParaRPr lang="en-US" dirty="0"/>
+          </a:p>
+        </p:txBody>
+      </p:sp>
+      <p:sp>
+        <p:nvSpPr>
+          <p:cNvPr id="3" name="Content Placeholder 2"/>
           <p:cNvSpPr>
             <a:spLocks noGrp="1"/>
           </p:cNvSpPr>
@@ -2231,88 +1943,82 @@
         </p:nvSpPr>
         <p:spPr>
           <a:xfrm>
-            <a:off x="5183188" y="987425"/>
-            <a:ext cx="6172200" cy="4873625"/>
+            <a:off x="12870909" y="3078850"/>
+            <a:ext cx="15326827" cy="15196234"/>
           </a:xfrm>
         </p:spPr>
         <p:txBody>
           <a:bodyPr/>
           <a:lstStyle>
             <a:lvl1pPr>
-              <a:defRPr sz="3200"/>
+              <a:defRPr sz="9978"/>
             </a:lvl1pPr>
             <a:lvl2pPr>
-              <a:defRPr sz="2800"/>
+              <a:defRPr sz="8731"/>
             </a:lvl2pPr>
             <a:lvl3pPr>
-              <a:defRPr sz="2400"/>
+              <a:defRPr sz="7483"/>
             </a:lvl3pPr>
             <a:lvl4pPr>
-              <a:defRPr sz="2000"/>
+              <a:defRPr sz="6236"/>
             </a:lvl4pPr>
             <a:lvl5pPr>
-              <a:defRPr sz="2000"/>
+              <a:defRPr sz="6236"/>
             </a:lvl5pPr>
             <a:lvl6pPr>
-              <a:defRPr sz="2000"/>
+              <a:defRPr sz="6236"/>
             </a:lvl6pPr>
             <a:lvl7pPr>
-              <a:defRPr sz="2000"/>
+              <a:defRPr sz="6236"/>
             </a:lvl7pPr>
             <a:lvl8pPr>
-              <a:defRPr sz="2000"/>
+              <a:defRPr sz="6236"/>
             </a:lvl8pPr>
             <a:lvl9pPr>
-              <a:defRPr sz="2000"/>
+              <a:defRPr sz="6236"/>
             </a:lvl9pPr>
           </a:lstStyle>
           <a:p>
             <a:pPr lvl="0"/>
             <a:r>
-              <a:rPr lang="en-US"/>
+              <a:rPr lang="en-GB"/>
               <a:t>Click to edit Master text styles</a:t>
             </a:r>
           </a:p>
           <a:p>
             <a:pPr lvl="1"/>
             <a:r>
-              <a:rPr lang="en-US"/>
+              <a:rPr lang="en-GB"/>
               <a:t>Second level</a:t>
             </a:r>
           </a:p>
           <a:p>
             <a:pPr lvl="2"/>
             <a:r>
-              <a:rPr lang="en-US"/>
+              <a:rPr lang="en-GB"/>
               <a:t>Third level</a:t>
             </a:r>
           </a:p>
           <a:p>
             <a:pPr lvl="3"/>
             <a:r>
-              <a:rPr lang="en-US"/>
+              <a:rPr lang="en-GB"/>
               <a:t>Fourth level</a:t>
             </a:r>
           </a:p>
           <a:p>
             <a:pPr lvl="4"/>
             <a:r>
-              <a:rPr lang="en-US"/>
+              <a:rPr lang="en-GB"/>
               <a:t>Fifth level</a:t>
             </a:r>
-            <a:endParaRPr lang="en-GB"/>
-          </a:p>
-        </p:txBody>
-      </p:sp>
-      <p:sp>
-        <p:nvSpPr>
-          <p:cNvPr id="4" name="Text Placeholder 3">
-            <a:extLst>
-              <a:ext uri="{FF2B5EF4-FFF2-40B4-BE49-F238E27FC236}">
-                <a16:creationId xmlns:a16="http://schemas.microsoft.com/office/drawing/2014/main" id="{0CD2A2FE-42FB-CA8C-F8BA-349D857B4608}"/>
-              </a:ext>
-            </a:extLst>
-          </p:cNvPr>
+            <a:endParaRPr lang="en-US" dirty="0"/>
+          </a:p>
+        </p:txBody>
+      </p:sp>
+      <p:sp>
+        <p:nvSpPr>
+          <p:cNvPr id="4" name="Text Placeholder 3"/>
           <p:cNvSpPr>
             <a:spLocks noGrp="1"/>
           </p:cNvSpPr>
@@ -2322,8 +2028,8 @@
         </p:nvSpPr>
         <p:spPr>
           <a:xfrm>
-            <a:off x="839788" y="2057400"/>
-            <a:ext cx="3932237" cy="3811588"/>
+            <a:off x="2085364" y="6415088"/>
+            <a:ext cx="9764544" cy="11884743"/>
           </a:xfrm>
         </p:spPr>
         <p:txBody>
@@ -2331,45 +2037,45 @@
           <a:lstStyle>
             <a:lvl1pPr marL="0" indent="0">
               <a:buNone/>
-              <a:defRPr sz="1600"/>
+              <a:defRPr sz="4989"/>
             </a:lvl1pPr>
-            <a:lvl2pPr marL="457200" indent="0">
-              <a:buNone/>
-              <a:defRPr sz="1400"/>
+            <a:lvl2pPr marL="1425595" indent="0">
+              <a:buNone/>
+              <a:defRPr sz="4365"/>
             </a:lvl2pPr>
-            <a:lvl3pPr marL="914400" indent="0">
-              <a:buNone/>
-              <a:defRPr sz="1200"/>
+            <a:lvl3pPr marL="2851191" indent="0">
+              <a:buNone/>
+              <a:defRPr sz="3742"/>
             </a:lvl3pPr>
-            <a:lvl4pPr marL="1371600" indent="0">
-              <a:buNone/>
-              <a:defRPr sz="1000"/>
+            <a:lvl4pPr marL="4276786" indent="0">
+              <a:buNone/>
+              <a:defRPr sz="3118"/>
             </a:lvl4pPr>
-            <a:lvl5pPr marL="1828800" indent="0">
-              <a:buNone/>
-              <a:defRPr sz="1000"/>
+            <a:lvl5pPr marL="5702381" indent="0">
+              <a:buNone/>
+              <a:defRPr sz="3118"/>
             </a:lvl5pPr>
-            <a:lvl6pPr marL="2286000" indent="0">
-              <a:buNone/>
-              <a:defRPr sz="1000"/>
+            <a:lvl6pPr marL="7127977" indent="0">
+              <a:buNone/>
+              <a:defRPr sz="3118"/>
             </a:lvl6pPr>
-            <a:lvl7pPr marL="2743200" indent="0">
-              <a:buNone/>
-              <a:defRPr sz="1000"/>
+            <a:lvl7pPr marL="8553572" indent="0">
+              <a:buNone/>
+              <a:defRPr sz="3118"/>
             </a:lvl7pPr>
-            <a:lvl8pPr marL="3200400" indent="0">
-              <a:buNone/>
-              <a:defRPr sz="1000"/>
+            <a:lvl8pPr marL="9979167" indent="0">
+              <a:buNone/>
+              <a:defRPr sz="3118"/>
             </a:lvl8pPr>
-            <a:lvl9pPr marL="3657600" indent="0">
-              <a:buNone/>
-              <a:defRPr sz="1000"/>
+            <a:lvl9pPr marL="11404763" indent="0">
+              <a:buNone/>
+              <a:defRPr sz="3118"/>
             </a:lvl9pPr>
           </a:lstStyle>
           <a:p>
             <a:pPr lvl="0"/>
             <a:r>
-              <a:rPr lang="en-US"/>
+              <a:rPr lang="en-GB"/>
               <a:t>Click to edit Master text styles</a:t>
             </a:r>
           </a:p>
@@ -2377,13 +2083,7 @@
       </p:sp>
       <p:sp>
         <p:nvSpPr>
-          <p:cNvPr id="5" name="Date Placeholder 4">
-            <a:extLst>
-              <a:ext uri="{FF2B5EF4-FFF2-40B4-BE49-F238E27FC236}">
-                <a16:creationId xmlns:a16="http://schemas.microsoft.com/office/drawing/2014/main" id="{ABE3115B-127F-A0A2-1414-87BD34C0080B}"/>
-              </a:ext>
-            </a:extLst>
-          </p:cNvPr>
+          <p:cNvPr id="5" name="Date Placeholder 4"/>
           <p:cNvSpPr>
             <a:spLocks noGrp="1"/>
           </p:cNvSpPr>
@@ -2406,13 +2106,7 @@
       </p:sp>
       <p:sp>
         <p:nvSpPr>
-          <p:cNvPr id="6" name="Footer Placeholder 5">
-            <a:extLst>
-              <a:ext uri="{FF2B5EF4-FFF2-40B4-BE49-F238E27FC236}">
-                <a16:creationId xmlns:a16="http://schemas.microsoft.com/office/drawing/2014/main" id="{B3ED6B78-87B5-4283-ABA1-1B315DC698CF}"/>
-              </a:ext>
-            </a:extLst>
-          </p:cNvPr>
+          <p:cNvPr id="6" name="Footer Placeholder 5"/>
           <p:cNvSpPr>
             <a:spLocks noGrp="1"/>
           </p:cNvSpPr>
@@ -2431,13 +2125,7 @@
       </p:sp>
       <p:sp>
         <p:nvSpPr>
-          <p:cNvPr id="7" name="Slide Number Placeholder 6">
-            <a:extLst>
-              <a:ext uri="{FF2B5EF4-FFF2-40B4-BE49-F238E27FC236}">
-                <a16:creationId xmlns:a16="http://schemas.microsoft.com/office/drawing/2014/main" id="{D74BF9CF-4CC2-06E7-EE66-CD1F083CF4A7}"/>
-              </a:ext>
-            </a:extLst>
-          </p:cNvPr>
+          <p:cNvPr id="7" name="Slide Number Placeholder 6"/>
           <p:cNvSpPr>
             <a:spLocks noGrp="1"/>
           </p:cNvSpPr>
@@ -2461,7 +2149,7 @@
     </p:spTree>
     <p:extLst>
       <p:ext uri="{BB962C8B-B14F-4D97-AF65-F5344CB8AC3E}">
-        <p14:creationId xmlns:p14="http://schemas.microsoft.com/office/powerpoint/2010/main" val="1943667847"/>
+        <p14:creationId xmlns:p14="http://schemas.microsoft.com/office/powerpoint/2010/main" val="1099657561"/>
       </p:ext>
     </p:extLst>
   </p:cSld>
@@ -2490,13 +2178,7 @@
       </p:grpSpPr>
       <p:sp>
         <p:nvSpPr>
-          <p:cNvPr id="2" name="Title 1">
-            <a:extLst>
-              <a:ext uri="{FF2B5EF4-FFF2-40B4-BE49-F238E27FC236}">
-                <a16:creationId xmlns:a16="http://schemas.microsoft.com/office/drawing/2014/main" id="{D0C6EA75-1E6A-8B44-A85B-D001A4080DD2}"/>
-              </a:ext>
-            </a:extLst>
-          </p:cNvPr>
+          <p:cNvPr id="2" name="Title 1"/>
           <p:cNvSpPr>
             <a:spLocks noGrp="1"/>
           </p:cNvSpPr>
@@ -2506,37 +2188,31 @@
         </p:nvSpPr>
         <p:spPr>
           <a:xfrm>
-            <a:off x="839788" y="457200"/>
-            <a:ext cx="3932237" cy="1600200"/>
+            <a:off x="2085364" y="1425575"/>
+            <a:ext cx="9764544" cy="4989513"/>
           </a:xfrm>
         </p:spPr>
         <p:txBody>
           <a:bodyPr anchor="b"/>
           <a:lstStyle>
             <a:lvl1pPr>
-              <a:defRPr sz="3200"/>
+              <a:defRPr sz="9978"/>
             </a:lvl1pPr>
           </a:lstStyle>
           <a:p>
             <a:r>
-              <a:rPr lang="en-US"/>
+              <a:rPr lang="en-GB"/>
               <a:t>Click to edit Master title style</a:t>
             </a:r>
-            <a:endParaRPr lang="en-GB"/>
-          </a:p>
-        </p:txBody>
-      </p:sp>
-      <p:sp>
-        <p:nvSpPr>
-          <p:cNvPr id="3" name="Picture Placeholder 2">
-            <a:extLst>
-              <a:ext uri="{FF2B5EF4-FFF2-40B4-BE49-F238E27FC236}">
-                <a16:creationId xmlns:a16="http://schemas.microsoft.com/office/drawing/2014/main" id="{F0EA5D55-6E0F-9F55-9CAF-37BA96874D24}"/>
-              </a:ext>
-            </a:extLst>
-          </p:cNvPr>
-          <p:cNvSpPr>
-            <a:spLocks noGrp="1"/>
+            <a:endParaRPr lang="en-US" dirty="0"/>
+          </a:p>
+        </p:txBody>
+      </p:sp>
+      <p:sp>
+        <p:nvSpPr>
+          <p:cNvPr id="3" name="Picture Placeholder 2"/>
+          <p:cNvSpPr>
+            <a:spLocks noGrp="1" noChangeAspect="1"/>
           </p:cNvSpPr>
           <p:nvPr>
             <p:ph type="pic" idx="1"/>
@@ -2544,64 +2220,62 @@
         </p:nvSpPr>
         <p:spPr>
           <a:xfrm>
-            <a:off x="5183188" y="987425"/>
-            <a:ext cx="6172200" cy="4873625"/>
+            <a:off x="12870909" y="3078850"/>
+            <a:ext cx="15326827" cy="15196234"/>
           </a:xfrm>
         </p:spPr>
         <p:txBody>
-          <a:bodyPr/>
+          <a:bodyPr anchor="t"/>
           <a:lstStyle>
             <a:lvl1pPr marL="0" indent="0">
               <a:buNone/>
-              <a:defRPr sz="3200"/>
+              <a:defRPr sz="9978"/>
             </a:lvl1pPr>
-            <a:lvl2pPr marL="457200" indent="0">
-              <a:buNone/>
-              <a:defRPr sz="2800"/>
+            <a:lvl2pPr marL="1425595" indent="0">
+              <a:buNone/>
+              <a:defRPr sz="8731"/>
             </a:lvl2pPr>
-            <a:lvl3pPr marL="914400" indent="0">
-              <a:buNone/>
-              <a:defRPr sz="2400"/>
+            <a:lvl3pPr marL="2851191" indent="0">
+              <a:buNone/>
+              <a:defRPr sz="7483"/>
             </a:lvl3pPr>
-            <a:lvl4pPr marL="1371600" indent="0">
-              <a:buNone/>
-              <a:defRPr sz="2000"/>
+            <a:lvl4pPr marL="4276786" indent="0">
+              <a:buNone/>
+              <a:defRPr sz="6236"/>
             </a:lvl4pPr>
-            <a:lvl5pPr marL="1828800" indent="0">
-              <a:buNone/>
-              <a:defRPr sz="2000"/>
+            <a:lvl5pPr marL="5702381" indent="0">
+              <a:buNone/>
+              <a:defRPr sz="6236"/>
             </a:lvl5pPr>
-            <a:lvl6pPr marL="2286000" indent="0">
-              <a:buNone/>
-              <a:defRPr sz="2000"/>
+            <a:lvl6pPr marL="7127977" indent="0">
+              <a:buNone/>
+              <a:defRPr sz="6236"/>
             </a:lvl6pPr>
-            <a:lvl7pPr marL="2743200" indent="0">
-              <a:buNone/>
-              <a:defRPr sz="2000"/>
+            <a:lvl7pPr marL="8553572" indent="0">
+              <a:buNone/>
+              <a:defRPr sz="6236"/>
             </a:lvl7pPr>
-            <a:lvl8pPr marL="3200400" indent="0">
-              <a:buNone/>
-              <a:defRPr sz="2000"/>
+            <a:lvl8pPr marL="9979167" indent="0">
+              <a:buNone/>
+              <a:defRPr sz="6236"/>
             </a:lvl8pPr>
-            <a:lvl9pPr marL="3657600" indent="0">
-              <a:buNone/>
-              <a:defRPr sz="2000"/>
+            <a:lvl9pPr marL="11404763" indent="0">
+              <a:buNone/>
+              <a:defRPr sz="6236"/>
             </a:lvl9pPr>
           </a:lstStyle>
           <a:p>
-            <a:endParaRPr lang="en-GB"/>
-          </a:p>
-        </p:txBody>
-      </p:sp>
-      <p:sp>
-        <p:nvSpPr>
-          <p:cNvPr id="4" name="Text Placeholder 3">
-            <a:extLst>
-              <a:ext uri="{FF2B5EF4-FFF2-40B4-BE49-F238E27FC236}">
-                <a16:creationId xmlns:a16="http://schemas.microsoft.com/office/drawing/2014/main" id="{A8E0044B-5966-B882-55A8-D3692D1C0E31}"/>
-              </a:ext>
-            </a:extLst>
-          </p:cNvPr>
+            <a:r>
+              <a:rPr lang="en-GB"/>
+              <a:t>Click icon to add picture</a:t>
+            </a:r>
+            <a:endParaRPr lang="en-US" dirty="0"/>
+          </a:p>
+        </p:txBody>
+      </p:sp>
+      <p:sp>
+        <p:nvSpPr>
+          <p:cNvPr id="4" name="Text Placeholder 3"/>
           <p:cNvSpPr>
             <a:spLocks noGrp="1"/>
           </p:cNvSpPr>
@@ -2611,8 +2285,8 @@
         </p:nvSpPr>
         <p:spPr>
           <a:xfrm>
-            <a:off x="839788" y="2057400"/>
-            <a:ext cx="3932237" cy="3811588"/>
+            <a:off x="2085364" y="6415088"/>
+            <a:ext cx="9764544" cy="11884743"/>
           </a:xfrm>
         </p:spPr>
         <p:txBody>
@@ -2620,45 +2294,45 @@
           <a:lstStyle>
             <a:lvl1pPr marL="0" indent="0">
               <a:buNone/>
-              <a:defRPr sz="1600"/>
+              <a:defRPr sz="4989"/>
             </a:lvl1pPr>
-            <a:lvl2pPr marL="457200" indent="0">
-              <a:buNone/>
-              <a:defRPr sz="1400"/>
+            <a:lvl2pPr marL="1425595" indent="0">
+              <a:buNone/>
+              <a:defRPr sz="4365"/>
             </a:lvl2pPr>
-            <a:lvl3pPr marL="914400" indent="0">
-              <a:buNone/>
-              <a:defRPr sz="1200"/>
+            <a:lvl3pPr marL="2851191" indent="0">
+              <a:buNone/>
+              <a:defRPr sz="3742"/>
             </a:lvl3pPr>
-            <a:lvl4pPr marL="1371600" indent="0">
-              <a:buNone/>
-              <a:defRPr sz="1000"/>
+            <a:lvl4pPr marL="4276786" indent="0">
+              <a:buNone/>
+              <a:defRPr sz="3118"/>
             </a:lvl4pPr>
-            <a:lvl5pPr marL="1828800" indent="0">
-              <a:buNone/>
-              <a:defRPr sz="1000"/>
+            <a:lvl5pPr marL="5702381" indent="0">
+              <a:buNone/>
+              <a:defRPr sz="3118"/>
             </a:lvl5pPr>
-            <a:lvl6pPr marL="2286000" indent="0">
-              <a:buNone/>
-              <a:defRPr sz="1000"/>
+            <a:lvl6pPr marL="7127977" indent="0">
+              <a:buNone/>
+              <a:defRPr sz="3118"/>
             </a:lvl6pPr>
-            <a:lvl7pPr marL="2743200" indent="0">
-              <a:buNone/>
-              <a:defRPr sz="1000"/>
+            <a:lvl7pPr marL="8553572" indent="0">
+              <a:buNone/>
+              <a:defRPr sz="3118"/>
             </a:lvl7pPr>
-            <a:lvl8pPr marL="3200400" indent="0">
-              <a:buNone/>
-              <a:defRPr sz="1000"/>
+            <a:lvl8pPr marL="9979167" indent="0">
+              <a:buNone/>
+              <a:defRPr sz="3118"/>
             </a:lvl8pPr>
-            <a:lvl9pPr marL="3657600" indent="0">
-              <a:buNone/>
-              <a:defRPr sz="1000"/>
+            <a:lvl9pPr marL="11404763" indent="0">
+              <a:buNone/>
+              <a:defRPr sz="3118"/>
             </a:lvl9pPr>
           </a:lstStyle>
           <a:p>
             <a:pPr lvl="0"/>
             <a:r>
-              <a:rPr lang="en-US"/>
+              <a:rPr lang="en-GB"/>
               <a:t>Click to edit Master text styles</a:t>
             </a:r>
           </a:p>
@@ -2666,13 +2340,7 @@
       </p:sp>
       <p:sp>
         <p:nvSpPr>
-          <p:cNvPr id="5" name="Date Placeholder 4">
-            <a:extLst>
-              <a:ext uri="{FF2B5EF4-FFF2-40B4-BE49-F238E27FC236}">
-                <a16:creationId xmlns:a16="http://schemas.microsoft.com/office/drawing/2014/main" id="{958A1450-D96E-D315-8805-20BF016F2E3B}"/>
-              </a:ext>
-            </a:extLst>
-          </p:cNvPr>
+          <p:cNvPr id="5" name="Date Placeholder 4"/>
           <p:cNvSpPr>
             <a:spLocks noGrp="1"/>
           </p:cNvSpPr>
@@ -2695,13 +2363,7 @@
       </p:sp>
       <p:sp>
         <p:nvSpPr>
-          <p:cNvPr id="6" name="Footer Placeholder 5">
-            <a:extLst>
-              <a:ext uri="{FF2B5EF4-FFF2-40B4-BE49-F238E27FC236}">
-                <a16:creationId xmlns:a16="http://schemas.microsoft.com/office/drawing/2014/main" id="{635EB336-D412-BE52-AD77-3BC5C5DCD91F}"/>
-              </a:ext>
-            </a:extLst>
-          </p:cNvPr>
+          <p:cNvPr id="6" name="Footer Placeholder 5"/>
           <p:cNvSpPr>
             <a:spLocks noGrp="1"/>
           </p:cNvSpPr>
@@ -2720,13 +2382,7 @@
       </p:sp>
       <p:sp>
         <p:nvSpPr>
-          <p:cNvPr id="7" name="Slide Number Placeholder 6">
-            <a:extLst>
-              <a:ext uri="{FF2B5EF4-FFF2-40B4-BE49-F238E27FC236}">
-                <a16:creationId xmlns:a16="http://schemas.microsoft.com/office/drawing/2014/main" id="{4C997307-44CE-F6D8-7C9D-F094FF31F023}"/>
-              </a:ext>
-            </a:extLst>
-          </p:cNvPr>
+          <p:cNvPr id="7" name="Slide Number Placeholder 6"/>
           <p:cNvSpPr>
             <a:spLocks noGrp="1"/>
           </p:cNvSpPr>
@@ -2750,7 +2406,7 @@
     </p:spTree>
     <p:extLst>
       <p:ext uri="{BB962C8B-B14F-4D97-AF65-F5344CB8AC3E}">
-        <p14:creationId xmlns:p14="http://schemas.microsoft.com/office/powerpoint/2010/main" val="308908376"/>
+        <p14:creationId xmlns:p14="http://schemas.microsoft.com/office/powerpoint/2010/main" val="3409211804"/>
       </p:ext>
     </p:extLst>
   </p:cSld>
@@ -2784,13 +2440,7 @@
       </p:grpSpPr>
       <p:sp>
         <p:nvSpPr>
-          <p:cNvPr id="2" name="Title Placeholder 1">
-            <a:extLst>
-              <a:ext uri="{FF2B5EF4-FFF2-40B4-BE49-F238E27FC236}">
-                <a16:creationId xmlns:a16="http://schemas.microsoft.com/office/drawing/2014/main" id="{1C10D491-4ABB-A2A3-036E-7723CAC79415}"/>
-              </a:ext>
-            </a:extLst>
-          </p:cNvPr>
+          <p:cNvPr id="2" name="Title Placeholder 1"/>
           <p:cNvSpPr>
             <a:spLocks noGrp="1"/>
           </p:cNvSpPr>
@@ -2800,8 +2450,8 @@
         </p:nvSpPr>
         <p:spPr>
           <a:xfrm>
-            <a:off x="838200" y="365125"/>
-            <a:ext cx="10515600" cy="1325563"/>
+            <a:off x="2081421" y="1138485"/>
+            <a:ext cx="26112371" cy="4133179"/>
           </a:xfrm>
           <a:prstGeom prst="rect">
             <a:avLst/>
@@ -2814,22 +2464,16 @@
           <a:lstStyle/>
           <a:p>
             <a:r>
-              <a:rPr lang="en-US"/>
+              <a:rPr lang="en-GB"/>
               <a:t>Click to edit Master title style</a:t>
             </a:r>
-            <a:endParaRPr lang="en-GB"/>
-          </a:p>
-        </p:txBody>
-      </p:sp>
-      <p:sp>
-        <p:nvSpPr>
-          <p:cNvPr id="3" name="Text Placeholder 2">
-            <a:extLst>
-              <a:ext uri="{FF2B5EF4-FFF2-40B4-BE49-F238E27FC236}">
-                <a16:creationId xmlns:a16="http://schemas.microsoft.com/office/drawing/2014/main" id="{C1D59C40-0B46-557C-EBA3-B9A4B79CC429}"/>
-              </a:ext>
-            </a:extLst>
-          </p:cNvPr>
+            <a:endParaRPr lang="en-US" dirty="0"/>
+          </a:p>
+        </p:txBody>
+      </p:sp>
+      <p:sp>
+        <p:nvSpPr>
+          <p:cNvPr id="3" name="Text Placeholder 2"/>
           <p:cNvSpPr>
             <a:spLocks noGrp="1"/>
           </p:cNvSpPr>
@@ -2839,8 +2483,8 @@
         </p:nvSpPr>
         <p:spPr>
           <a:xfrm>
-            <a:off x="838200" y="1825625"/>
-            <a:ext cx="10515600" cy="4351338"/>
+            <a:off x="2081421" y="5692400"/>
+            <a:ext cx="26112371" cy="13567714"/>
           </a:xfrm>
           <a:prstGeom prst="rect">
             <a:avLst/>
@@ -2854,50 +2498,44 @@
           <a:p>
             <a:pPr lvl="0"/>
             <a:r>
-              <a:rPr lang="en-US"/>
+              <a:rPr lang="en-GB"/>
               <a:t>Click to edit Master text styles</a:t>
             </a:r>
           </a:p>
           <a:p>
             <a:pPr lvl="1"/>
             <a:r>
-              <a:rPr lang="en-US"/>
+              <a:rPr lang="en-GB"/>
               <a:t>Second level</a:t>
             </a:r>
           </a:p>
           <a:p>
             <a:pPr lvl="2"/>
             <a:r>
-              <a:rPr lang="en-US"/>
+              <a:rPr lang="en-GB"/>
               <a:t>Third level</a:t>
             </a:r>
           </a:p>
           <a:p>
             <a:pPr lvl="3"/>
             <a:r>
-              <a:rPr lang="en-US"/>
+              <a:rPr lang="en-GB"/>
               <a:t>Fourth level</a:t>
             </a:r>
           </a:p>
           <a:p>
             <a:pPr lvl="4"/>
             <a:r>
-              <a:rPr lang="en-US"/>
+              <a:rPr lang="en-GB"/>
               <a:t>Fifth level</a:t>
             </a:r>
-            <a:endParaRPr lang="en-GB"/>
-          </a:p>
-        </p:txBody>
-      </p:sp>
-      <p:sp>
-        <p:nvSpPr>
-          <p:cNvPr id="4" name="Date Placeholder 3">
-            <a:extLst>
-              <a:ext uri="{FF2B5EF4-FFF2-40B4-BE49-F238E27FC236}">
-                <a16:creationId xmlns:a16="http://schemas.microsoft.com/office/drawing/2014/main" id="{B5F94810-1622-40BB-D554-B7C7678828C2}"/>
-              </a:ext>
-            </a:extLst>
-          </p:cNvPr>
+            <a:endParaRPr lang="en-US" dirty="0"/>
+          </a:p>
+        </p:txBody>
+      </p:sp>
+      <p:sp>
+        <p:nvSpPr>
+          <p:cNvPr id="4" name="Date Placeholder 3"/>
           <p:cNvSpPr>
             <a:spLocks noGrp="1"/>
           </p:cNvSpPr>
@@ -2907,8 +2545,8 @@
         </p:nvSpPr>
         <p:spPr>
           <a:xfrm>
-            <a:off x="838200" y="6356350"/>
-            <a:ext cx="2743200" cy="365125"/>
+            <a:off x="2081421" y="19819457"/>
+            <a:ext cx="6811923" cy="1138480"/>
           </a:xfrm>
           <a:prstGeom prst="rect">
             <a:avLst/>
@@ -2918,7 +2556,7 @@
           <a:bodyPr vert="horz" lIns="91440" tIns="45720" rIns="91440" bIns="45720" rtlCol="0" anchor="ctr"/>
           <a:lstStyle>
             <a:lvl1pPr algn="l">
-              <a:defRPr sz="1200">
+              <a:defRPr sz="3742">
                 <a:solidFill>
                   <a:schemeClr val="tx1">
                     <a:tint val="82000"/>
@@ -2938,13 +2576,7 @@
       </p:sp>
       <p:sp>
         <p:nvSpPr>
-          <p:cNvPr id="5" name="Footer Placeholder 4">
-            <a:extLst>
-              <a:ext uri="{FF2B5EF4-FFF2-40B4-BE49-F238E27FC236}">
-                <a16:creationId xmlns:a16="http://schemas.microsoft.com/office/drawing/2014/main" id="{67975241-C196-EC88-FD8A-18504DF16E36}"/>
-              </a:ext>
-            </a:extLst>
-          </p:cNvPr>
+          <p:cNvPr id="5" name="Footer Placeholder 4"/>
           <p:cNvSpPr>
             <a:spLocks noGrp="1"/>
           </p:cNvSpPr>
@@ -2954,8 +2586,8 @@
         </p:nvSpPr>
         <p:spPr>
           <a:xfrm>
-            <a:off x="4038600" y="6356350"/>
-            <a:ext cx="4114800" cy="365125"/>
+            <a:off x="10028665" y="19819457"/>
+            <a:ext cx="10217884" cy="1138480"/>
           </a:xfrm>
           <a:prstGeom prst="rect">
             <a:avLst/>
@@ -2965,7 +2597,7 @@
           <a:bodyPr vert="horz" lIns="91440" tIns="45720" rIns="91440" bIns="45720" rtlCol="0" anchor="ctr"/>
           <a:lstStyle>
             <a:lvl1pPr algn="ctr">
-              <a:defRPr sz="1200">
+              <a:defRPr sz="3742">
                 <a:solidFill>
                   <a:schemeClr val="tx1">
                     <a:tint val="82000"/>
@@ -2981,13 +2613,7 @@
       </p:sp>
       <p:sp>
         <p:nvSpPr>
-          <p:cNvPr id="6" name="Slide Number Placeholder 5">
-            <a:extLst>
-              <a:ext uri="{FF2B5EF4-FFF2-40B4-BE49-F238E27FC236}">
-                <a16:creationId xmlns:a16="http://schemas.microsoft.com/office/drawing/2014/main" id="{7C5B7FB7-3C00-A267-B1EA-E2E86D085E7D}"/>
-              </a:ext>
-            </a:extLst>
-          </p:cNvPr>
+          <p:cNvPr id="6" name="Slide Number Placeholder 5"/>
           <p:cNvSpPr>
             <a:spLocks noGrp="1"/>
           </p:cNvSpPr>
@@ -2997,8 +2623,8 @@
         </p:nvSpPr>
         <p:spPr>
           <a:xfrm>
-            <a:off x="8610600" y="6356350"/>
-            <a:ext cx="2743200" cy="365125"/>
+            <a:off x="21381869" y="19819457"/>
+            <a:ext cx="6811923" cy="1138480"/>
           </a:xfrm>
           <a:prstGeom prst="rect">
             <a:avLst/>
@@ -3008,7 +2634,7 @@
           <a:bodyPr vert="horz" lIns="91440" tIns="45720" rIns="91440" bIns="45720" rtlCol="0" anchor="ctr"/>
           <a:lstStyle>
             <a:lvl1pPr algn="r">
-              <a:defRPr sz="1200">
+              <a:defRPr sz="3742">
                 <a:solidFill>
                   <a:schemeClr val="tx1">
                     <a:tint val="82000"/>
@@ -3029,27 +2655,27 @@
     </p:spTree>
     <p:extLst>
       <p:ext uri="{BB962C8B-B14F-4D97-AF65-F5344CB8AC3E}">
-        <p14:creationId xmlns:p14="http://schemas.microsoft.com/office/powerpoint/2010/main" val="1289863877"/>
+        <p14:creationId xmlns:p14="http://schemas.microsoft.com/office/powerpoint/2010/main" val="1956542163"/>
       </p:ext>
     </p:extLst>
   </p:cSld>
   <p:clrMap bg1="lt1" tx1="dk1" bg2="lt2" tx2="dk2" accent1="accent1" accent2="accent2" accent3="accent3" accent4="accent4" accent5="accent5" accent6="accent6" hlink="hlink" folHlink="folHlink"/>
   <p:sldLayoutIdLst>
-    <p:sldLayoutId id="2147483649" r:id="rId1"/>
-    <p:sldLayoutId id="2147483650" r:id="rId2"/>
-    <p:sldLayoutId id="2147483651" r:id="rId3"/>
-    <p:sldLayoutId id="2147483652" r:id="rId4"/>
-    <p:sldLayoutId id="2147483653" r:id="rId5"/>
-    <p:sldLayoutId id="2147483654" r:id="rId6"/>
-    <p:sldLayoutId id="2147483655" r:id="rId7"/>
-    <p:sldLayoutId id="2147483656" r:id="rId8"/>
-    <p:sldLayoutId id="2147483657" r:id="rId9"/>
-    <p:sldLayoutId id="2147483658" r:id="rId10"/>
-    <p:sldLayoutId id="2147483659" r:id="rId11"/>
+    <p:sldLayoutId id="2147483661" r:id="rId1"/>
+    <p:sldLayoutId id="2147483662" r:id="rId2"/>
+    <p:sldLayoutId id="2147483663" r:id="rId3"/>
+    <p:sldLayoutId id="2147483664" r:id="rId4"/>
+    <p:sldLayoutId id="2147483665" r:id="rId5"/>
+    <p:sldLayoutId id="2147483666" r:id="rId6"/>
+    <p:sldLayoutId id="2147483667" r:id="rId7"/>
+    <p:sldLayoutId id="2147483668" r:id="rId8"/>
+    <p:sldLayoutId id="2147483669" r:id="rId9"/>
+    <p:sldLayoutId id="2147483670" r:id="rId10"/>
+    <p:sldLayoutId id="2147483671" r:id="rId11"/>
   </p:sldLayoutIdLst>
   <p:txStyles>
     <p:titleStyle>
-      <a:lvl1pPr algn="l" defTabSz="914400" rtl="0" eaLnBrk="1" latinLnBrk="0" hangingPunct="1">
+      <a:lvl1pPr algn="l" defTabSz="2851191" rtl="0" eaLnBrk="1" latinLnBrk="0" hangingPunct="1">
         <a:lnSpc>
           <a:spcPct val="90000"/>
         </a:lnSpc>
@@ -3057,7 +2683,7 @@
           <a:spcPct val="0"/>
         </a:spcBef>
         <a:buNone/>
-        <a:defRPr sz="4400" kern="1200">
+        <a:defRPr sz="13720" kern="1200">
           <a:solidFill>
             <a:schemeClr val="tx1"/>
           </a:solidFill>
@@ -3068,16 +2694,16 @@
       </a:lvl1pPr>
     </p:titleStyle>
     <p:bodyStyle>
-      <a:lvl1pPr marL="228600" indent="-228600" algn="l" defTabSz="914400" rtl="0" eaLnBrk="1" latinLnBrk="0" hangingPunct="1">
+      <a:lvl1pPr marL="712798" indent="-712798" algn="l" defTabSz="2851191" rtl="0" eaLnBrk="1" latinLnBrk="0" hangingPunct="1">
         <a:lnSpc>
           <a:spcPct val="90000"/>
         </a:lnSpc>
         <a:spcBef>
-          <a:spcPts val="1000"/>
+          <a:spcPts val="3118"/>
         </a:spcBef>
         <a:buFont typeface="Arial" panose="020B0604020202020204" pitchFamily="34" charset="0"/>
         <a:buChar char="•"/>
-        <a:defRPr sz="2800" kern="1200">
+        <a:defRPr sz="8731" kern="1200">
           <a:solidFill>
             <a:schemeClr val="tx1"/>
           </a:solidFill>
@@ -3086,16 +2712,16 @@
           <a:cs typeface="+mn-cs"/>
         </a:defRPr>
       </a:lvl1pPr>
-      <a:lvl2pPr marL="685800" indent="-228600" algn="l" defTabSz="914400" rtl="0" eaLnBrk="1" latinLnBrk="0" hangingPunct="1">
+      <a:lvl2pPr marL="2138393" indent="-712798" algn="l" defTabSz="2851191" rtl="0" eaLnBrk="1" latinLnBrk="0" hangingPunct="1">
         <a:lnSpc>
           <a:spcPct val="90000"/>
         </a:lnSpc>
         <a:spcBef>
-          <a:spcPts val="500"/>
+          <a:spcPts val="1559"/>
         </a:spcBef>
         <a:buFont typeface="Arial" panose="020B0604020202020204" pitchFamily="34" charset="0"/>
         <a:buChar char="•"/>
-        <a:defRPr sz="2400" kern="1200">
+        <a:defRPr sz="7483" kern="1200">
           <a:solidFill>
             <a:schemeClr val="tx1"/>
           </a:solidFill>
@@ -3104,16 +2730,16 @@
           <a:cs typeface="+mn-cs"/>
         </a:defRPr>
       </a:lvl2pPr>
-      <a:lvl3pPr marL="1143000" indent="-228600" algn="l" defTabSz="914400" rtl="0" eaLnBrk="1" latinLnBrk="0" hangingPunct="1">
+      <a:lvl3pPr marL="3563988" indent="-712798" algn="l" defTabSz="2851191" rtl="0" eaLnBrk="1" latinLnBrk="0" hangingPunct="1">
         <a:lnSpc>
           <a:spcPct val="90000"/>
         </a:lnSpc>
         <a:spcBef>
-          <a:spcPts val="500"/>
+          <a:spcPts val="1559"/>
         </a:spcBef>
         <a:buFont typeface="Arial" panose="020B0604020202020204" pitchFamily="34" charset="0"/>
         <a:buChar char="•"/>
-        <a:defRPr sz="2000" kern="1200">
+        <a:defRPr sz="6236" kern="1200">
           <a:solidFill>
             <a:schemeClr val="tx1"/>
           </a:solidFill>
@@ -3122,16 +2748,16 @@
           <a:cs typeface="+mn-cs"/>
         </a:defRPr>
       </a:lvl3pPr>
-      <a:lvl4pPr marL="1600200" indent="-228600" algn="l" defTabSz="914400" rtl="0" eaLnBrk="1" latinLnBrk="0" hangingPunct="1">
+      <a:lvl4pPr marL="4989584" indent="-712798" algn="l" defTabSz="2851191" rtl="0" eaLnBrk="1" latinLnBrk="0" hangingPunct="1">
         <a:lnSpc>
           <a:spcPct val="90000"/>
         </a:lnSpc>
         <a:spcBef>
-          <a:spcPts val="500"/>
+          <a:spcPts val="1559"/>
         </a:spcBef>
         <a:buFont typeface="Arial" panose="020B0604020202020204" pitchFamily="34" charset="0"/>
         <a:buChar char="•"/>
-        <a:defRPr sz="1800" kern="1200">
+        <a:defRPr sz="5613" kern="1200">
           <a:solidFill>
             <a:schemeClr val="tx1"/>
           </a:solidFill>
@@ -3140,16 +2766,16 @@
           <a:cs typeface="+mn-cs"/>
         </a:defRPr>
       </a:lvl4pPr>
-      <a:lvl5pPr marL="2057400" indent="-228600" algn="l" defTabSz="914400" rtl="0" eaLnBrk="1" latinLnBrk="0" hangingPunct="1">
+      <a:lvl5pPr marL="6415179" indent="-712798" algn="l" defTabSz="2851191" rtl="0" eaLnBrk="1" latinLnBrk="0" hangingPunct="1">
         <a:lnSpc>
           <a:spcPct val="90000"/>
         </a:lnSpc>
         <a:spcBef>
-          <a:spcPts val="500"/>
+          <a:spcPts val="1559"/>
         </a:spcBef>
         <a:buFont typeface="Arial" panose="020B0604020202020204" pitchFamily="34" charset="0"/>
         <a:buChar char="•"/>
-        <a:defRPr sz="1800" kern="1200">
+        <a:defRPr sz="5613" kern="1200">
           <a:solidFill>
             <a:schemeClr val="tx1"/>
           </a:solidFill>
@@ -3158,16 +2784,16 @@
           <a:cs typeface="+mn-cs"/>
         </a:defRPr>
       </a:lvl5pPr>
-      <a:lvl6pPr marL="2514600" indent="-228600" algn="l" defTabSz="914400" rtl="0" eaLnBrk="1" latinLnBrk="0" hangingPunct="1">
+      <a:lvl6pPr marL="7840774" indent="-712798" algn="l" defTabSz="2851191" rtl="0" eaLnBrk="1" latinLnBrk="0" hangingPunct="1">
         <a:lnSpc>
           <a:spcPct val="90000"/>
         </a:lnSpc>
         <a:spcBef>
-          <a:spcPts val="500"/>
+          <a:spcPts val="1559"/>
         </a:spcBef>
         <a:buFont typeface="Arial" panose="020B0604020202020204" pitchFamily="34" charset="0"/>
         <a:buChar char="•"/>
-        <a:defRPr sz="1800" kern="1200">
+        <a:defRPr sz="5613" kern="1200">
           <a:solidFill>
             <a:schemeClr val="tx1"/>
           </a:solidFill>
@@ -3176,16 +2802,16 @@
           <a:cs typeface="+mn-cs"/>
         </a:defRPr>
       </a:lvl6pPr>
-      <a:lvl7pPr marL="2971800" indent="-228600" algn="l" defTabSz="914400" rtl="0" eaLnBrk="1" latinLnBrk="0" hangingPunct="1">
+      <a:lvl7pPr marL="9266370" indent="-712798" algn="l" defTabSz="2851191" rtl="0" eaLnBrk="1" latinLnBrk="0" hangingPunct="1">
         <a:lnSpc>
           <a:spcPct val="90000"/>
         </a:lnSpc>
         <a:spcBef>
-          <a:spcPts val="500"/>
+          <a:spcPts val="1559"/>
         </a:spcBef>
         <a:buFont typeface="Arial" panose="020B0604020202020204" pitchFamily="34" charset="0"/>
         <a:buChar char="•"/>
-        <a:defRPr sz="1800" kern="1200">
+        <a:defRPr sz="5613" kern="1200">
           <a:solidFill>
             <a:schemeClr val="tx1"/>
           </a:solidFill>
@@ -3194,16 +2820,16 @@
           <a:cs typeface="+mn-cs"/>
         </a:defRPr>
       </a:lvl7pPr>
-      <a:lvl8pPr marL="3429000" indent="-228600" algn="l" defTabSz="914400" rtl="0" eaLnBrk="1" latinLnBrk="0" hangingPunct="1">
+      <a:lvl8pPr marL="10691965" indent="-712798" algn="l" defTabSz="2851191" rtl="0" eaLnBrk="1" latinLnBrk="0" hangingPunct="1">
         <a:lnSpc>
           <a:spcPct val="90000"/>
         </a:lnSpc>
         <a:spcBef>
-          <a:spcPts val="500"/>
+          <a:spcPts val="1559"/>
         </a:spcBef>
         <a:buFont typeface="Arial" panose="020B0604020202020204" pitchFamily="34" charset="0"/>
         <a:buChar char="•"/>
-        <a:defRPr sz="1800" kern="1200">
+        <a:defRPr sz="5613" kern="1200">
           <a:solidFill>
             <a:schemeClr val="tx1"/>
           </a:solidFill>
@@ -3212,16 +2838,16 @@
           <a:cs typeface="+mn-cs"/>
         </a:defRPr>
       </a:lvl8pPr>
-      <a:lvl9pPr marL="3886200" indent="-228600" algn="l" defTabSz="914400" rtl="0" eaLnBrk="1" latinLnBrk="0" hangingPunct="1">
+      <a:lvl9pPr marL="12117560" indent="-712798" algn="l" defTabSz="2851191" rtl="0" eaLnBrk="1" latinLnBrk="0" hangingPunct="1">
         <a:lnSpc>
           <a:spcPct val="90000"/>
         </a:lnSpc>
         <a:spcBef>
-          <a:spcPts val="500"/>
+          <a:spcPts val="1559"/>
         </a:spcBef>
         <a:buFont typeface="Arial" panose="020B0604020202020204" pitchFamily="34" charset="0"/>
         <a:buChar char="•"/>
-        <a:defRPr sz="1800" kern="1200">
+        <a:defRPr sz="5613" kern="1200">
           <a:solidFill>
             <a:schemeClr val="tx1"/>
           </a:solidFill>
@@ -3235,8 +2861,8 @@
       <a:defPPr>
         <a:defRPr lang="en-US"/>
       </a:defPPr>
-      <a:lvl1pPr marL="0" algn="l" defTabSz="914400" rtl="0" eaLnBrk="1" latinLnBrk="0" hangingPunct="1">
-        <a:defRPr sz="1800" kern="1200">
+      <a:lvl1pPr marL="0" algn="l" defTabSz="2851191" rtl="0" eaLnBrk="1" latinLnBrk="0" hangingPunct="1">
+        <a:defRPr sz="5613" kern="1200">
           <a:solidFill>
             <a:schemeClr val="tx1"/>
           </a:solidFill>
@@ -3245,8 +2871,8 @@
           <a:cs typeface="+mn-cs"/>
         </a:defRPr>
       </a:lvl1pPr>
-      <a:lvl2pPr marL="457200" algn="l" defTabSz="914400" rtl="0" eaLnBrk="1" latinLnBrk="0" hangingPunct="1">
-        <a:defRPr sz="1800" kern="1200">
+      <a:lvl2pPr marL="1425595" algn="l" defTabSz="2851191" rtl="0" eaLnBrk="1" latinLnBrk="0" hangingPunct="1">
+        <a:defRPr sz="5613" kern="1200">
           <a:solidFill>
             <a:schemeClr val="tx1"/>
           </a:solidFill>
@@ -3255,8 +2881,8 @@
           <a:cs typeface="+mn-cs"/>
         </a:defRPr>
       </a:lvl2pPr>
-      <a:lvl3pPr marL="914400" algn="l" defTabSz="914400" rtl="0" eaLnBrk="1" latinLnBrk="0" hangingPunct="1">
-        <a:defRPr sz="1800" kern="1200">
+      <a:lvl3pPr marL="2851191" algn="l" defTabSz="2851191" rtl="0" eaLnBrk="1" latinLnBrk="0" hangingPunct="1">
+        <a:defRPr sz="5613" kern="1200">
           <a:solidFill>
             <a:schemeClr val="tx1"/>
           </a:solidFill>
@@ -3265,8 +2891,8 @@
           <a:cs typeface="+mn-cs"/>
         </a:defRPr>
       </a:lvl3pPr>
-      <a:lvl4pPr marL="1371600" algn="l" defTabSz="914400" rtl="0" eaLnBrk="1" latinLnBrk="0" hangingPunct="1">
-        <a:defRPr sz="1800" kern="1200">
+      <a:lvl4pPr marL="4276786" algn="l" defTabSz="2851191" rtl="0" eaLnBrk="1" latinLnBrk="0" hangingPunct="1">
+        <a:defRPr sz="5613" kern="1200">
           <a:solidFill>
             <a:schemeClr val="tx1"/>
           </a:solidFill>
@@ -3275,8 +2901,8 @@
           <a:cs typeface="+mn-cs"/>
         </a:defRPr>
       </a:lvl4pPr>
-      <a:lvl5pPr marL="1828800" algn="l" defTabSz="914400" rtl="0" eaLnBrk="1" latinLnBrk="0" hangingPunct="1">
-        <a:defRPr sz="1800" kern="1200">
+      <a:lvl5pPr marL="5702381" algn="l" defTabSz="2851191" rtl="0" eaLnBrk="1" latinLnBrk="0" hangingPunct="1">
+        <a:defRPr sz="5613" kern="1200">
           <a:solidFill>
             <a:schemeClr val="tx1"/>
           </a:solidFill>
@@ -3285,8 +2911,8 @@
           <a:cs typeface="+mn-cs"/>
         </a:defRPr>
       </a:lvl5pPr>
-      <a:lvl6pPr marL="2286000" algn="l" defTabSz="914400" rtl="0" eaLnBrk="1" latinLnBrk="0" hangingPunct="1">
-        <a:defRPr sz="1800" kern="1200">
+      <a:lvl6pPr marL="7127977" algn="l" defTabSz="2851191" rtl="0" eaLnBrk="1" latinLnBrk="0" hangingPunct="1">
+        <a:defRPr sz="5613" kern="1200">
           <a:solidFill>
             <a:schemeClr val="tx1"/>
           </a:solidFill>
@@ -3295,8 +2921,8 @@
           <a:cs typeface="+mn-cs"/>
         </a:defRPr>
       </a:lvl6pPr>
-      <a:lvl7pPr marL="2743200" algn="l" defTabSz="914400" rtl="0" eaLnBrk="1" latinLnBrk="0" hangingPunct="1">
-        <a:defRPr sz="1800" kern="1200">
+      <a:lvl7pPr marL="8553572" algn="l" defTabSz="2851191" rtl="0" eaLnBrk="1" latinLnBrk="0" hangingPunct="1">
+        <a:defRPr sz="5613" kern="1200">
           <a:solidFill>
             <a:schemeClr val="tx1"/>
           </a:solidFill>
@@ -3305,8 +2931,8 @@
           <a:cs typeface="+mn-cs"/>
         </a:defRPr>
       </a:lvl7pPr>
-      <a:lvl8pPr marL="3200400" algn="l" defTabSz="914400" rtl="0" eaLnBrk="1" latinLnBrk="0" hangingPunct="1">
-        <a:defRPr sz="1800" kern="1200">
+      <a:lvl8pPr marL="9979167" algn="l" defTabSz="2851191" rtl="0" eaLnBrk="1" latinLnBrk="0" hangingPunct="1">
+        <a:defRPr sz="5613" kern="1200">
           <a:solidFill>
             <a:schemeClr val="tx1"/>
           </a:solidFill>
@@ -3315,8 +2941,8 @@
           <a:cs typeface="+mn-cs"/>
         </a:defRPr>
       </a:lvl8pPr>
-      <a:lvl9pPr marL="3657600" algn="l" defTabSz="914400" rtl="0" eaLnBrk="1" latinLnBrk="0" hangingPunct="1">
-        <a:defRPr sz="1800" kern="1200">
+      <a:lvl9pPr marL="11404763" algn="l" defTabSz="2851191" rtl="0" eaLnBrk="1" latinLnBrk="0" hangingPunct="1">
+        <a:defRPr sz="5613" kern="1200">
           <a:solidFill>
             <a:schemeClr val="tx1"/>
           </a:solidFill>
@@ -3333,6 +2959,14 @@
 <file path=ppt/slides/slide1.xml><?xml version="1.0" encoding="utf-8"?>
 <p:sld xmlns:a="http://schemas.openxmlformats.org/drawingml/2006/main" xmlns:r="http://schemas.openxmlformats.org/officeDocument/2006/relationships" xmlns:p="http://schemas.openxmlformats.org/presentationml/2006/main">
   <p:cSld>
+    <p:bg>
+      <p:bgPr>
+        <a:solidFill>
+          <a:schemeClr val="bg1"/>
+        </a:solidFill>
+        <a:effectLst/>
+      </p:bgPr>
+    </p:bg>
     <p:spTree>
       <p:nvGrpSpPr>
         <p:cNvPr id="1" name=""/>
@@ -3347,156 +2981,6 @@
           <a:chExt cx="0" cy="0"/>
         </a:xfrm>
       </p:grpSpPr>
-      <p:pic>
-        <p:nvPicPr>
-          <p:cNvPr id="7" name="Picture 6">
-            <a:extLst>
-              <a:ext uri="{FF2B5EF4-FFF2-40B4-BE49-F238E27FC236}">
-                <a16:creationId xmlns:a16="http://schemas.microsoft.com/office/drawing/2014/main" id="{BF38F544-C49E-F940-229B-A28A0B815281}"/>
-              </a:ext>
-            </a:extLst>
-          </p:cNvPr>
-          <p:cNvPicPr>
-            <a:picLocks noChangeAspect="1"/>
-          </p:cNvPicPr>
-          <p:nvPr/>
-        </p:nvPicPr>
-        <p:blipFill>
-          <a:blip r:embed="rId2"/>
-          <a:stretch>
-            <a:fillRect/>
-          </a:stretch>
-        </p:blipFill>
-        <p:spPr>
-          <a:xfrm>
-            <a:off x="0" y="7470"/>
-            <a:ext cx="12192000" cy="6843059"/>
-          </a:xfrm>
-          <a:prstGeom prst="rect">
-            <a:avLst/>
-          </a:prstGeom>
-        </p:spPr>
-      </p:pic>
-      <p:pic>
-        <p:nvPicPr>
-          <p:cNvPr id="9" name="Picture 8">
-            <a:extLst>
-              <a:ext uri="{FF2B5EF4-FFF2-40B4-BE49-F238E27FC236}">
-                <a16:creationId xmlns:a16="http://schemas.microsoft.com/office/drawing/2014/main" id="{EAE22C9C-6018-C974-B4B6-0399AB1CF954}"/>
-              </a:ext>
-            </a:extLst>
-          </p:cNvPr>
-          <p:cNvPicPr>
-            <a:picLocks noChangeAspect="1"/>
-          </p:cNvPicPr>
-          <p:nvPr/>
-        </p:nvPicPr>
-        <p:blipFill>
-          <a:blip r:embed="rId3"/>
-          <a:stretch>
-            <a:fillRect/>
-          </a:stretch>
-        </p:blipFill>
-        <p:spPr>
-          <a:xfrm>
-            <a:off x="0" y="26598"/>
-            <a:ext cx="12192000" cy="6831402"/>
-          </a:xfrm>
-          <a:prstGeom prst="rect">
-            <a:avLst/>
-          </a:prstGeom>
-        </p:spPr>
-      </p:pic>
-      <p:sp>
-        <p:nvSpPr>
-          <p:cNvPr id="10" name="TextBox 9">
-            <a:extLst>
-              <a:ext uri="{FF2B5EF4-FFF2-40B4-BE49-F238E27FC236}">
-                <a16:creationId xmlns:a16="http://schemas.microsoft.com/office/drawing/2014/main" id="{C1179AF4-A669-0178-7A43-D666C2188AE7}"/>
-              </a:ext>
-            </a:extLst>
-          </p:cNvPr>
-          <p:cNvSpPr txBox="1"/>
-          <p:nvPr/>
-        </p:nvSpPr>
-        <p:spPr>
-          <a:xfrm>
-            <a:off x="213360" y="419100"/>
-            <a:ext cx="3749040" cy="2462213"/>
-          </a:xfrm>
-          <a:prstGeom prst="rect">
-            <a:avLst/>
-          </a:prstGeom>
-          <a:solidFill>
-            <a:schemeClr val="bg1">
-              <a:lumMod val="65000"/>
-            </a:schemeClr>
-          </a:solidFill>
-          <a:ln>
-            <a:solidFill>
-              <a:schemeClr val="tx1"/>
-            </a:solidFill>
-          </a:ln>
-        </p:spPr>
-        <p:txBody>
-          <a:bodyPr wrap="square" rtlCol="0">
-            <a:spAutoFit/>
-          </a:bodyPr>
-          <a:lstStyle/>
-          <a:p>
-            <a:r>
-              <a:rPr lang="en-GB" sz="1400" dirty="0"/>
-              <a:t>What is Stronghold?</a:t>
-            </a:r>
-          </a:p>
-          <a:p>
-            <a:endParaRPr lang="en-GB" sz="1400" dirty="0"/>
-          </a:p>
-          <a:p>
-            <a:pPr marL="285750" indent="-285750">
-              <a:buFontTx/>
-              <a:buChar char="-"/>
-            </a:pPr>
-            <a:r>
-              <a:rPr lang="en-GB" sz="1400" dirty="0"/>
-              <a:t>Security-focussed web browser</a:t>
-            </a:r>
-          </a:p>
-          <a:p>
-            <a:pPr marL="285750" indent="-285750">
-              <a:buFontTx/>
-              <a:buChar char="-"/>
-            </a:pPr>
-            <a:r>
-              <a:rPr lang="en-GB" sz="1400" dirty="0"/>
-              <a:t>Aims to teach children safe browsing behaviours</a:t>
-            </a:r>
-          </a:p>
-          <a:p>
-            <a:pPr marL="285750" indent="-285750">
-              <a:buFontTx/>
-              <a:buChar char="-"/>
-            </a:pPr>
-            <a:r>
-              <a:rPr lang="en-GB" sz="1400" dirty="0"/>
-              <a:t>Utilises behavioural conditioning and gamification</a:t>
-            </a:r>
-          </a:p>
-          <a:p>
-            <a:pPr marL="285750" indent="-285750">
-              <a:buFontTx/>
-              <a:buChar char="-"/>
-            </a:pPr>
-            <a:r>
-              <a:rPr lang="en-GB" sz="1400" dirty="0"/>
-              <a:t>Rewards the user for browsing safely, punishes the user for browsing dangerously</a:t>
-            </a:r>
-          </a:p>
-          <a:p>
-            <a:endParaRPr lang="en-GB" sz="1400" dirty="0"/>
-          </a:p>
-        </p:txBody>
-      </p:sp>
       <p:sp>
         <p:nvSpPr>
           <p:cNvPr id="11" name="TextBox 10">
@@ -3511,15 +2995,15 @@
         </p:nvSpPr>
         <p:spPr>
           <a:xfrm>
-            <a:off x="8564880" y="358140"/>
-            <a:ext cx="3162300" cy="1384995"/>
+            <a:off x="20068836" y="12961011"/>
+            <a:ext cx="9579858" cy="4524315"/>
           </a:xfrm>
           <a:prstGeom prst="rect">
             <a:avLst/>
           </a:prstGeom>
           <a:solidFill>
             <a:schemeClr val="bg1">
-              <a:lumMod val="65000"/>
+              <a:lumMod val="85000"/>
             </a:schemeClr>
           </a:solidFill>
           <a:ln>
@@ -3534,38 +3018,59 @@
           </a:bodyPr>
           <a:lstStyle/>
           <a:p>
-            <a:r>
-              <a:rPr lang="en-GB" sz="1400" dirty="0"/>
-              <a:t>Gamification</a:t>
-            </a:r>
-          </a:p>
-          <a:p>
-            <a:endParaRPr lang="en-GB" sz="1400" dirty="0"/>
-          </a:p>
-          <a:p>
-            <a:pPr marL="285750" indent="-285750">
-              <a:buFontTx/>
-              <a:buChar char="-"/>
+            <a:pPr marL="571500" indent="-571500">
+              <a:buFont typeface="Arial" panose="020B0604020202020204" pitchFamily="34" charset="0"/>
+              <a:buChar char="•"/>
             </a:pPr>
             <a:r>
-              <a:rPr lang="en-GB" sz="1400" dirty="0"/>
-              <a:t>Makes the browser more fun to use while also being educational</a:t>
-            </a:r>
-          </a:p>
-          <a:p>
-            <a:pPr marL="285750" indent="-285750">
-              <a:buFontTx/>
-              <a:buChar char="-"/>
+              <a:rPr lang="en-GB" sz="3600" dirty="0"/>
+              <a:t>Encourages user engagement while remaining educational</a:t>
+            </a:r>
+          </a:p>
+          <a:p>
+            <a:pPr marL="571500" indent="-571500">
+              <a:buFont typeface="Arial" panose="020B0604020202020204" pitchFamily="34" charset="0"/>
+              <a:buChar char="•"/>
             </a:pPr>
             <a:r>
-              <a:rPr lang="en-GB" sz="1400" dirty="0"/>
-              <a:t>SHOULD encourage children to want </a:t>
-            </a:r>
-            <a:r>
-              <a:rPr lang="en-GB" sz="1400"/>
-              <a:t>to use it more</a:t>
-            </a:r>
-            <a:endParaRPr lang="en-GB" sz="1400" dirty="0"/>
+              <a:rPr lang="en-GB" sz="3600" dirty="0">
+                <a:solidFill>
+                  <a:schemeClr val="accent6">
+                    <a:lumMod val="75000"/>
+                  </a:schemeClr>
+                </a:solidFill>
+              </a:rPr>
+              <a:t>Provides experience points on safe browsing</a:t>
+            </a:r>
+          </a:p>
+          <a:p>
+            <a:pPr marL="571500" indent="-571500">
+              <a:buFont typeface="Arial" panose="020B0604020202020204" pitchFamily="34" charset="0"/>
+              <a:buChar char="•"/>
+            </a:pPr>
+            <a:r>
+              <a:rPr lang="en-GB" sz="3600" dirty="0">
+                <a:solidFill>
+                  <a:schemeClr val="accent2">
+                    <a:lumMod val="75000"/>
+                  </a:schemeClr>
+                </a:solidFill>
+              </a:rPr>
+              <a:t>Removes experience points on unsafe browsing</a:t>
+            </a:r>
+          </a:p>
+          <a:p>
+            <a:pPr marL="571500" indent="-571500">
+              <a:buFont typeface="Arial" panose="020B0604020202020204" pitchFamily="34" charset="0"/>
+              <a:buChar char="•"/>
+            </a:pPr>
+            <a:r>
+              <a:rPr lang="en-GB" sz="3600" dirty="0"/>
+              <a:t>Higher levels unlock additional features to encourage gameplay</a:t>
+            </a:r>
+          </a:p>
+          <a:p>
+            <a:endParaRPr lang="en-GB" sz="3600" dirty="0"/>
           </a:p>
         </p:txBody>
       </p:sp>
@@ -3583,15 +3088,15 @@
         </p:nvSpPr>
         <p:spPr>
           <a:xfrm>
-            <a:off x="8564880" y="4609312"/>
-            <a:ext cx="3162300" cy="1600438"/>
+            <a:off x="20068836" y="7418803"/>
+            <a:ext cx="9579858" cy="3970318"/>
           </a:xfrm>
           <a:prstGeom prst="rect">
             <a:avLst/>
           </a:prstGeom>
           <a:solidFill>
             <a:schemeClr val="bg1">
-              <a:lumMod val="65000"/>
+              <a:lumMod val="85000"/>
             </a:schemeClr>
           </a:solidFill>
           <a:ln>
@@ -3606,53 +3111,736 @@
           </a:bodyPr>
           <a:lstStyle/>
           <a:p>
-            <a:r>
-              <a:rPr lang="en-GB" sz="1400" dirty="0"/>
+            <a:pPr marL="571500" indent="-571500">
+              <a:buFont typeface="Arial" panose="020B0604020202020204" pitchFamily="34" charset="0"/>
+              <a:buChar char="•"/>
+            </a:pPr>
+            <a:r>
+              <a:rPr lang="en-GB" sz="3600" dirty="0"/>
+              <a:t>Tracks user’s stats such as levels and experience points</a:t>
+            </a:r>
+          </a:p>
+          <a:p>
+            <a:pPr marL="571500" indent="-571500">
+              <a:buFont typeface="Arial" panose="020B0604020202020204" pitchFamily="34" charset="0"/>
+              <a:buChar char="•"/>
+            </a:pPr>
+            <a:r>
+              <a:rPr lang="en-GB" sz="3600" dirty="0"/>
+              <a:t>Contains quizzes and challenges</a:t>
+            </a:r>
+          </a:p>
+          <a:p>
+            <a:pPr marL="571500" indent="-571500">
+              <a:buFont typeface="Arial" panose="020B0604020202020204" pitchFamily="34" charset="0"/>
+              <a:buChar char="•"/>
+            </a:pPr>
+            <a:r>
+              <a:rPr lang="en-GB" sz="3600" dirty="0"/>
+              <a:t>Displays user’s browsing safety</a:t>
+            </a:r>
+          </a:p>
+          <a:p>
+            <a:pPr marL="571500" indent="-571500">
+              <a:buFont typeface="Arial" panose="020B0604020202020204" pitchFamily="34" charset="0"/>
+              <a:buChar char="•"/>
+            </a:pPr>
+            <a:r>
+              <a:rPr lang="en-GB" sz="3600" dirty="0"/>
+              <a:t>Charts which can show averages and safety history</a:t>
+            </a:r>
+          </a:p>
+          <a:p>
+            <a:endParaRPr lang="en-GB" sz="3600" dirty="0"/>
+          </a:p>
+        </p:txBody>
+      </p:sp>
+      <p:sp>
+        <p:nvSpPr>
+          <p:cNvPr id="2" name="TextBox 1">
+            <a:extLst>
+              <a:ext uri="{FF2B5EF4-FFF2-40B4-BE49-F238E27FC236}">
+                <a16:creationId xmlns:a16="http://schemas.microsoft.com/office/drawing/2014/main" id="{1E1AC732-D44F-24EF-BDB0-A099D4F52527}"/>
+              </a:ext>
+            </a:extLst>
+          </p:cNvPr>
+          <p:cNvSpPr txBox="1"/>
+          <p:nvPr/>
+        </p:nvSpPr>
+        <p:spPr>
+          <a:xfrm>
+            <a:off x="626518" y="5766010"/>
+            <a:ext cx="9579858" cy="6186309"/>
+          </a:xfrm>
+          <a:prstGeom prst="rect">
+            <a:avLst/>
+          </a:prstGeom>
+          <a:solidFill>
+            <a:schemeClr val="bg1">
+              <a:lumMod val="85000"/>
+            </a:schemeClr>
+          </a:solidFill>
+          <a:ln>
+            <a:solidFill>
+              <a:schemeClr val="tx1"/>
+            </a:solidFill>
+          </a:ln>
+        </p:spPr>
+        <p:txBody>
+          <a:bodyPr wrap="square" rtlCol="0">
+            <a:spAutoFit/>
+          </a:bodyPr>
+          <a:lstStyle/>
+          <a:p>
+            <a:pPr marL="571500" indent="-571500">
+              <a:buFont typeface="Arial" panose="020B0604020202020204" pitchFamily="34" charset="0"/>
+              <a:buChar char="•"/>
+            </a:pPr>
+            <a:r>
+              <a:rPr lang="en-GB" sz="3600" dirty="0"/>
+              <a:t>Children are accessing the internet at increasingly younger ages</a:t>
+            </a:r>
+          </a:p>
+          <a:p>
+            <a:pPr marL="571500" indent="-571500">
+              <a:buFont typeface="Arial" panose="020B0604020202020204" pitchFamily="34" charset="0"/>
+              <a:buChar char="•"/>
+            </a:pPr>
+            <a:r>
+              <a:rPr lang="en-GB" sz="3600" dirty="0"/>
+              <a:t>They lack awareness of potential threats while online</a:t>
+            </a:r>
+          </a:p>
+          <a:p>
+            <a:pPr marL="571500" indent="-571500">
+              <a:buFont typeface="Arial" panose="020B0604020202020204" pitchFamily="34" charset="0"/>
+              <a:buChar char="•"/>
+            </a:pPr>
+            <a:r>
+              <a:rPr lang="en-GB" sz="3600" dirty="0"/>
+              <a:t>Traditional parental controls block behaviour but do not teach</a:t>
+            </a:r>
+          </a:p>
+          <a:p>
+            <a:pPr marL="571500" indent="-571500">
+              <a:buFont typeface="Arial" panose="020B0604020202020204" pitchFamily="34" charset="0"/>
+              <a:buChar char="•"/>
+            </a:pPr>
+            <a:r>
+              <a:rPr lang="en-GB" sz="3600" dirty="0"/>
+              <a:t>Stronghold aims to teach why a behaviour is dangerous while preventing it</a:t>
+            </a:r>
+          </a:p>
+          <a:p>
+            <a:pPr marL="571500" indent="-571500">
+              <a:buFont typeface="Arial" panose="020B0604020202020204" pitchFamily="34" charset="0"/>
+              <a:buChar char="•"/>
+            </a:pPr>
+            <a:r>
+              <a:rPr lang="en-GB" sz="3600" dirty="0"/>
+              <a:t>Behavioural conditioning is a highly effective method for modifying behaviour</a:t>
+            </a:r>
+          </a:p>
+          <a:p>
+            <a:pPr marL="571500" indent="-571500">
+              <a:buFont typeface="Arial" panose="020B0604020202020204" pitchFamily="34" charset="0"/>
+              <a:buChar char="•"/>
+            </a:pPr>
+            <a:endParaRPr lang="en-GB" sz="3600" dirty="0"/>
+          </a:p>
+        </p:txBody>
+      </p:sp>
+      <p:sp>
+        <p:nvSpPr>
+          <p:cNvPr id="5" name="TextBox 4">
+            <a:extLst>
+              <a:ext uri="{FF2B5EF4-FFF2-40B4-BE49-F238E27FC236}">
+                <a16:creationId xmlns:a16="http://schemas.microsoft.com/office/drawing/2014/main" id="{EEBE0434-CEDB-3B4A-8A5D-1223E9884CFB}"/>
+              </a:ext>
+            </a:extLst>
+          </p:cNvPr>
+          <p:cNvSpPr txBox="1"/>
+          <p:nvPr/>
+        </p:nvSpPr>
+        <p:spPr>
+          <a:xfrm>
+            <a:off x="10206376" y="2302017"/>
+            <a:ext cx="9862458" cy="2477601"/>
+          </a:xfrm>
+          <a:prstGeom prst="rect">
+            <a:avLst/>
+          </a:prstGeom>
+          <a:noFill/>
+        </p:spPr>
+        <p:txBody>
+          <a:bodyPr wrap="square" rtlCol="0">
+            <a:spAutoFit/>
+          </a:bodyPr>
+          <a:lstStyle/>
+          <a:p>
+            <a:r>
+              <a:rPr lang="en-US" sz="11500" b="1" u="sng" dirty="0"/>
+              <a:t>STRONGHOLD</a:t>
+            </a:r>
+          </a:p>
+          <a:p>
+            <a:pPr algn="ctr"/>
+            <a:r>
+              <a:rPr lang="en-US" sz="4000" i="1" dirty="0"/>
+              <a:t>By Mark Hardy</a:t>
+            </a:r>
+            <a:endParaRPr lang="en-US" sz="11500" i="1" dirty="0"/>
+          </a:p>
+        </p:txBody>
+      </p:sp>
+      <p:sp>
+        <p:nvSpPr>
+          <p:cNvPr id="8" name="TextBox 7">
+            <a:extLst>
+              <a:ext uri="{FF2B5EF4-FFF2-40B4-BE49-F238E27FC236}">
+                <a16:creationId xmlns:a16="http://schemas.microsoft.com/office/drawing/2014/main" id="{FDDF774C-E6E4-FABD-CE7E-198541257231}"/>
+              </a:ext>
+            </a:extLst>
+          </p:cNvPr>
+          <p:cNvSpPr txBox="1"/>
+          <p:nvPr/>
+        </p:nvSpPr>
+        <p:spPr>
+          <a:xfrm>
+            <a:off x="626519" y="13781200"/>
+            <a:ext cx="9579857" cy="5632311"/>
+          </a:xfrm>
+          <a:prstGeom prst="rect">
+            <a:avLst/>
+          </a:prstGeom>
+          <a:solidFill>
+            <a:schemeClr val="bg1">
+              <a:lumMod val="85000"/>
+            </a:schemeClr>
+          </a:solidFill>
+          <a:ln>
+            <a:solidFill>
+              <a:schemeClr val="tx1"/>
+            </a:solidFill>
+          </a:ln>
+        </p:spPr>
+        <p:txBody>
+          <a:bodyPr wrap="square" rtlCol="0">
+            <a:spAutoFit/>
+          </a:bodyPr>
+          <a:lstStyle/>
+          <a:p>
+            <a:pPr marL="571500" indent="-571500">
+              <a:buFont typeface="Arial" panose="020B0604020202020204" pitchFamily="34" charset="0"/>
+              <a:buChar char="•"/>
+            </a:pPr>
+            <a:r>
+              <a:rPr lang="en-GB" sz="3600" dirty="0"/>
+              <a:t>Security-focussed web browser</a:t>
+            </a:r>
+          </a:p>
+          <a:p>
+            <a:pPr marL="571500" indent="-571500">
+              <a:buFont typeface="Arial" panose="020B0604020202020204" pitchFamily="34" charset="0"/>
+              <a:buChar char="•"/>
+            </a:pPr>
+            <a:r>
+              <a:rPr lang="en-GB" sz="3600" dirty="0"/>
+              <a:t>Teach children safe browsing behaviours</a:t>
+            </a:r>
+          </a:p>
+          <a:p>
+            <a:pPr marL="571500" indent="-571500">
+              <a:buFont typeface="Arial" panose="020B0604020202020204" pitchFamily="34" charset="0"/>
+              <a:buChar char="•"/>
+            </a:pPr>
+            <a:r>
+              <a:rPr lang="en-GB" sz="3600" dirty="0"/>
+              <a:t>Uses behavioural conditioning and gamification</a:t>
+            </a:r>
+          </a:p>
+          <a:p>
+            <a:pPr marL="571500" indent="-571500">
+              <a:buFont typeface="Arial" panose="020B0604020202020204" pitchFamily="34" charset="0"/>
+              <a:buChar char="•"/>
+            </a:pPr>
+            <a:r>
+              <a:rPr lang="en-GB" sz="3600" dirty="0">
+                <a:solidFill>
+                  <a:schemeClr val="accent6">
+                    <a:lumMod val="75000"/>
+                  </a:schemeClr>
+                </a:solidFill>
+              </a:rPr>
+              <a:t>Rewards for safe browsing</a:t>
+            </a:r>
+          </a:p>
+          <a:p>
+            <a:pPr marL="571500" indent="-571500">
+              <a:buFont typeface="Arial" panose="020B0604020202020204" pitchFamily="34" charset="0"/>
+              <a:buChar char="•"/>
+            </a:pPr>
+            <a:r>
+              <a:rPr lang="en-GB" sz="3600" dirty="0">
+                <a:solidFill>
+                  <a:schemeClr val="accent2">
+                    <a:lumMod val="75000"/>
+                  </a:schemeClr>
+                </a:solidFill>
+              </a:rPr>
+              <a:t>Penalises unsafe browsing</a:t>
+            </a:r>
+          </a:p>
+          <a:p>
+            <a:pPr marL="571500" indent="-571500">
+              <a:buFont typeface="Arial" panose="020B0604020202020204" pitchFamily="34" charset="0"/>
+              <a:buChar char="•"/>
+            </a:pPr>
+            <a:r>
+              <a:rPr lang="en-GB" sz="3600" dirty="0">
+                <a:solidFill>
+                  <a:schemeClr val="accent6">
+                    <a:lumMod val="75000"/>
+                  </a:schemeClr>
+                </a:solidFill>
+              </a:rPr>
+              <a:t>Educates through hints and challenges providing interactive feedback</a:t>
+            </a:r>
+          </a:p>
+          <a:p>
+            <a:pPr marL="571500" indent="-571500">
+              <a:buFont typeface="Arial" panose="020B0604020202020204" pitchFamily="34" charset="0"/>
+              <a:buChar char="•"/>
+            </a:pPr>
+            <a:r>
+              <a:rPr lang="en-GB" sz="3600" dirty="0">
+                <a:solidFill>
+                  <a:schemeClr val="accent2">
+                    <a:lumMod val="75000"/>
+                  </a:schemeClr>
+                </a:solidFill>
+              </a:rPr>
+              <a:t>Blocks malicious content and explains risks</a:t>
+            </a:r>
+          </a:p>
+          <a:p>
+            <a:endParaRPr lang="en-GB" sz="3600" dirty="0"/>
+          </a:p>
+        </p:txBody>
+      </p:sp>
+      <p:sp>
+        <p:nvSpPr>
+          <p:cNvPr id="13" name="TextBox 12">
+            <a:extLst>
+              <a:ext uri="{FF2B5EF4-FFF2-40B4-BE49-F238E27FC236}">
+                <a16:creationId xmlns:a16="http://schemas.microsoft.com/office/drawing/2014/main" id="{E14C5081-44E4-DE23-E173-D0A8E239F4E0}"/>
+              </a:ext>
+            </a:extLst>
+          </p:cNvPr>
+          <p:cNvSpPr txBox="1"/>
+          <p:nvPr/>
+        </p:nvSpPr>
+        <p:spPr>
+          <a:xfrm>
+            <a:off x="11458390" y="6957138"/>
+            <a:ext cx="7358432" cy="9510296"/>
+          </a:xfrm>
+          <a:prstGeom prst="rect">
+            <a:avLst/>
+          </a:prstGeom>
+          <a:solidFill>
+            <a:schemeClr val="bg1">
+              <a:lumMod val="85000"/>
+            </a:schemeClr>
+          </a:solidFill>
+          <a:ln>
+            <a:solidFill>
+              <a:schemeClr val="tx1"/>
+            </a:solidFill>
+          </a:ln>
+        </p:spPr>
+        <p:txBody>
+          <a:bodyPr wrap="square" rtlCol="0">
+            <a:spAutoFit/>
+          </a:bodyPr>
+          <a:lstStyle/>
+          <a:p>
+            <a:pPr marL="571500" indent="-571500">
+              <a:buFont typeface="Arial" panose="020B0604020202020204" pitchFamily="34" charset="0"/>
+              <a:buChar char="•"/>
+            </a:pPr>
+            <a:r>
+              <a:rPr lang="en-GB" sz="3600" dirty="0"/>
+              <a:t>AI Chatbot using Gemini API</a:t>
+            </a:r>
+          </a:p>
+          <a:p>
+            <a:pPr marL="571500" indent="-571500">
+              <a:buFont typeface="Arial" panose="020B0604020202020204" pitchFamily="34" charset="0"/>
+              <a:buChar char="•"/>
+            </a:pPr>
+            <a:r>
+              <a:rPr lang="en-GB" sz="3600" dirty="0"/>
+              <a:t>HTTP Blocking</a:t>
+            </a:r>
+          </a:p>
+          <a:p>
+            <a:pPr marL="571500" indent="-571500">
+              <a:buFont typeface="Arial" panose="020B0604020202020204" pitchFamily="34" charset="0"/>
+              <a:buChar char="•"/>
+            </a:pPr>
+            <a:r>
+              <a:rPr lang="en-GB" sz="3600" dirty="0"/>
+              <a:t>Downloads Scanning</a:t>
+            </a:r>
+          </a:p>
+          <a:p>
+            <a:pPr marL="571500" indent="-571500">
+              <a:buFont typeface="Arial" panose="020B0604020202020204" pitchFamily="34" charset="0"/>
+              <a:buChar char="•"/>
+            </a:pPr>
+            <a:r>
+              <a:rPr lang="en-GB" sz="3600" dirty="0"/>
+              <a:t>Parental PIN Settings Management</a:t>
+            </a:r>
+          </a:p>
+          <a:p>
+            <a:pPr marL="571500" indent="-571500">
+              <a:buFont typeface="Arial" panose="020B0604020202020204" pitchFamily="34" charset="0"/>
+              <a:buChar char="•"/>
+            </a:pPr>
+            <a:r>
+              <a:rPr lang="en-GB" sz="3600" dirty="0"/>
+              <a:t>Disabled Search History</a:t>
+            </a:r>
+          </a:p>
+          <a:p>
+            <a:pPr marL="571500" indent="-571500">
+              <a:buFont typeface="Arial" panose="020B0604020202020204" pitchFamily="34" charset="0"/>
+              <a:buChar char="•"/>
+            </a:pPr>
+            <a:r>
+              <a:rPr lang="en-GB" sz="3600" dirty="0"/>
+              <a:t>Security Alerts</a:t>
+            </a:r>
+          </a:p>
+          <a:p>
+            <a:pPr marL="571500" indent="-571500">
+              <a:buFont typeface="Arial" panose="020B0604020202020204" pitchFamily="34" charset="0"/>
+              <a:buChar char="•"/>
+            </a:pPr>
+            <a:r>
+              <a:rPr lang="en-GB" sz="3600" dirty="0"/>
+              <a:t>Automatic Cookie Deletion</a:t>
+            </a:r>
+          </a:p>
+          <a:p>
+            <a:pPr marL="571500" indent="-571500">
+              <a:buFont typeface="Arial" panose="020B0604020202020204" pitchFamily="34" charset="0"/>
+              <a:buChar char="•"/>
+            </a:pPr>
+            <a:r>
+              <a:rPr lang="en-GB" sz="3600" dirty="0"/>
+              <a:t>Google OAUTH Sign In</a:t>
+            </a:r>
+          </a:p>
+          <a:p>
+            <a:pPr marL="571500" indent="-571500">
+              <a:buFont typeface="Arial" panose="020B0604020202020204" pitchFamily="34" charset="0"/>
+              <a:buChar char="•"/>
+            </a:pPr>
+            <a:r>
+              <a:rPr lang="en-GB" sz="3600" dirty="0"/>
+              <a:t>Guest Browsing</a:t>
+            </a:r>
+          </a:p>
+          <a:p>
+            <a:pPr marL="571500" indent="-571500">
+              <a:buFont typeface="Arial" panose="020B0604020202020204" pitchFamily="34" charset="0"/>
+              <a:buChar char="•"/>
+            </a:pPr>
+            <a:r>
+              <a:rPr lang="en-GB" sz="3600" dirty="0"/>
+              <a:t>Technical Quizzes</a:t>
+            </a:r>
+          </a:p>
+          <a:p>
+            <a:pPr marL="571500" indent="-571500">
+              <a:buFont typeface="Arial" panose="020B0604020202020204" pitchFamily="34" charset="0"/>
+              <a:buChar char="•"/>
+            </a:pPr>
+            <a:r>
+              <a:rPr lang="en-GB" sz="3600" dirty="0"/>
+              <a:t>Hints and Tips</a:t>
+            </a:r>
+          </a:p>
+          <a:p>
+            <a:pPr marL="571500" indent="-571500">
+              <a:buFont typeface="Arial" panose="020B0604020202020204" pitchFamily="34" charset="0"/>
+              <a:buChar char="•"/>
+            </a:pPr>
+            <a:r>
+              <a:rPr lang="en-GB" sz="3600" dirty="0"/>
+              <a:t>Interactive Challenges</a:t>
+            </a:r>
+          </a:p>
+          <a:p>
+            <a:pPr marL="571500" indent="-571500">
+              <a:buFont typeface="Arial" panose="020B0604020202020204" pitchFamily="34" charset="0"/>
+              <a:buChar char="•"/>
+            </a:pPr>
+            <a:r>
+              <a:rPr lang="en-GB" sz="3600" dirty="0"/>
+              <a:t>Experience Points and Level Progression System</a:t>
+            </a:r>
+          </a:p>
+          <a:p>
+            <a:pPr marL="571500" indent="-571500">
+              <a:buFont typeface="Arial" panose="020B0604020202020204" pitchFamily="34" charset="0"/>
+              <a:buChar char="•"/>
+            </a:pPr>
+            <a:r>
+              <a:rPr lang="en-GB" sz="3600" dirty="0"/>
+              <a:t>Statistics and Charts History</a:t>
+            </a:r>
+          </a:p>
+          <a:p>
+            <a:endParaRPr lang="en-GB" sz="3600" dirty="0"/>
+          </a:p>
+        </p:txBody>
+      </p:sp>
+      <p:sp>
+        <p:nvSpPr>
+          <p:cNvPr id="14" name="TextBox 13">
+            <a:extLst>
+              <a:ext uri="{FF2B5EF4-FFF2-40B4-BE49-F238E27FC236}">
+                <a16:creationId xmlns:a16="http://schemas.microsoft.com/office/drawing/2014/main" id="{B9EEE6AA-99A6-1339-F05E-CE0DC41008C5}"/>
+              </a:ext>
+            </a:extLst>
+          </p:cNvPr>
+          <p:cNvSpPr txBox="1"/>
+          <p:nvPr/>
+        </p:nvSpPr>
+        <p:spPr>
+          <a:xfrm>
+            <a:off x="20068836" y="6495473"/>
+            <a:ext cx="9579858" cy="923330"/>
+          </a:xfrm>
+          <a:prstGeom prst="rect">
+            <a:avLst/>
+          </a:prstGeom>
+          <a:solidFill>
+            <a:schemeClr val="accent1"/>
+          </a:solidFill>
+        </p:spPr>
+        <p:txBody>
+          <a:bodyPr wrap="square" rtlCol="0">
+            <a:spAutoFit/>
+          </a:bodyPr>
+          <a:lstStyle/>
+          <a:p>
+            <a:pPr algn="ctr"/>
+            <a:r>
+              <a:rPr lang="en-US" sz="5400" dirty="0">
+                <a:solidFill>
+                  <a:schemeClr val="bg1"/>
+                </a:solidFill>
+              </a:rPr>
               <a:t>Dashboard</a:t>
             </a:r>
-          </a:p>
-          <a:p>
-            <a:endParaRPr lang="en-GB" sz="1400" dirty="0"/>
-          </a:p>
-          <a:p>
-            <a:pPr marL="285750" indent="-285750">
-              <a:buFontTx/>
-              <a:buChar char="-"/>
-            </a:pPr>
-            <a:r>
-              <a:rPr lang="en-GB" sz="1400" dirty="0"/>
-              <a:t>Shows stats for the user such as their level and </a:t>
-            </a:r>
-            <a:r>
-              <a:rPr lang="en-GB" sz="1400" dirty="0" err="1"/>
-              <a:t>xp</a:t>
-            </a:r>
-            <a:r>
-              <a:rPr lang="en-GB" sz="1400" dirty="0"/>
-              <a:t> points</a:t>
-            </a:r>
-          </a:p>
-          <a:p>
-            <a:pPr marL="285750" indent="-285750">
-              <a:buFontTx/>
-              <a:buChar char="-"/>
-            </a:pPr>
-            <a:r>
-              <a:rPr lang="en-GB" sz="1400" dirty="0"/>
-              <a:t>Allows access to quizzes and challenges for more </a:t>
-            </a:r>
-            <a:r>
-              <a:rPr lang="en-GB" sz="1400" dirty="0" err="1"/>
-              <a:t>xp</a:t>
-            </a:r>
-            <a:endParaRPr lang="en-GB" sz="1400" dirty="0"/>
-          </a:p>
-          <a:p>
-            <a:pPr marL="285750" indent="-285750">
-              <a:buFontTx/>
-              <a:buChar char="-"/>
-            </a:pPr>
-            <a:endParaRPr lang="en-GB" sz="1400" dirty="0"/>
+            <a:endParaRPr lang="en-US" sz="6600" dirty="0">
+              <a:solidFill>
+                <a:schemeClr val="bg1"/>
+              </a:solidFill>
+            </a:endParaRPr>
+          </a:p>
+        </p:txBody>
+      </p:sp>
+      <p:sp>
+        <p:nvSpPr>
+          <p:cNvPr id="15" name="TextBox 14">
+            <a:extLst>
+              <a:ext uri="{FF2B5EF4-FFF2-40B4-BE49-F238E27FC236}">
+                <a16:creationId xmlns:a16="http://schemas.microsoft.com/office/drawing/2014/main" id="{4F13F2C1-A8AC-89FD-2E89-6699EA72FE41}"/>
+              </a:ext>
+            </a:extLst>
+          </p:cNvPr>
+          <p:cNvSpPr txBox="1"/>
+          <p:nvPr/>
+        </p:nvSpPr>
+        <p:spPr>
+          <a:xfrm>
+            <a:off x="626518" y="4842680"/>
+            <a:ext cx="9579858" cy="923330"/>
+          </a:xfrm>
+          <a:prstGeom prst="rect">
+            <a:avLst/>
+          </a:prstGeom>
+          <a:solidFill>
+            <a:schemeClr val="accent1"/>
+          </a:solidFill>
+        </p:spPr>
+        <p:txBody>
+          <a:bodyPr wrap="square" rtlCol="0">
+            <a:spAutoFit/>
+          </a:bodyPr>
+          <a:lstStyle/>
+          <a:p>
+            <a:pPr algn="ctr"/>
+            <a:r>
+              <a:rPr lang="en-US" sz="5400" dirty="0">
+                <a:solidFill>
+                  <a:schemeClr val="bg1"/>
+                </a:solidFill>
+              </a:rPr>
+              <a:t>Why Stronghold?</a:t>
+            </a:r>
+            <a:endParaRPr lang="en-US" sz="6600" dirty="0">
+              <a:solidFill>
+                <a:schemeClr val="bg1"/>
+              </a:solidFill>
+            </a:endParaRPr>
+          </a:p>
+        </p:txBody>
+      </p:sp>
+      <p:sp>
+        <p:nvSpPr>
+          <p:cNvPr id="16" name="TextBox 15">
+            <a:extLst>
+              <a:ext uri="{FF2B5EF4-FFF2-40B4-BE49-F238E27FC236}">
+                <a16:creationId xmlns:a16="http://schemas.microsoft.com/office/drawing/2014/main" id="{DC246ED9-7C98-6341-BB7A-9B2873295576}"/>
+              </a:ext>
+            </a:extLst>
+          </p:cNvPr>
+          <p:cNvSpPr txBox="1"/>
+          <p:nvPr/>
+        </p:nvSpPr>
+        <p:spPr>
+          <a:xfrm>
+            <a:off x="626518" y="12879549"/>
+            <a:ext cx="9579858" cy="923330"/>
+          </a:xfrm>
+          <a:prstGeom prst="rect">
+            <a:avLst/>
+          </a:prstGeom>
+          <a:solidFill>
+            <a:schemeClr val="accent1"/>
+          </a:solidFill>
+        </p:spPr>
+        <p:txBody>
+          <a:bodyPr wrap="square" rtlCol="0">
+            <a:spAutoFit/>
+          </a:bodyPr>
+          <a:lstStyle/>
+          <a:p>
+            <a:pPr algn="ctr"/>
+            <a:r>
+              <a:rPr lang="en-US" sz="5400" dirty="0">
+                <a:solidFill>
+                  <a:schemeClr val="bg1"/>
+                </a:solidFill>
+              </a:rPr>
+              <a:t>What is Stronghold?</a:t>
+            </a:r>
+            <a:endParaRPr lang="en-US" sz="6600" dirty="0">
+              <a:solidFill>
+                <a:schemeClr val="bg1"/>
+              </a:solidFill>
+            </a:endParaRPr>
+          </a:p>
+        </p:txBody>
+      </p:sp>
+      <p:sp>
+        <p:nvSpPr>
+          <p:cNvPr id="29" name="TextBox 28">
+            <a:extLst>
+              <a:ext uri="{FF2B5EF4-FFF2-40B4-BE49-F238E27FC236}">
+                <a16:creationId xmlns:a16="http://schemas.microsoft.com/office/drawing/2014/main" id="{5F0956BA-0F9C-4680-F0AD-E1CC26347EA4}"/>
+              </a:ext>
+            </a:extLst>
+          </p:cNvPr>
+          <p:cNvSpPr txBox="1"/>
+          <p:nvPr/>
+        </p:nvSpPr>
+        <p:spPr>
+          <a:xfrm>
+            <a:off x="11458390" y="6033808"/>
+            <a:ext cx="7358432" cy="923330"/>
+          </a:xfrm>
+          <a:prstGeom prst="rect">
+            <a:avLst/>
+          </a:prstGeom>
+          <a:solidFill>
+            <a:schemeClr val="accent1"/>
+          </a:solidFill>
+        </p:spPr>
+        <p:txBody>
+          <a:bodyPr wrap="square" rtlCol="0">
+            <a:spAutoFit/>
+          </a:bodyPr>
+          <a:lstStyle/>
+          <a:p>
+            <a:pPr algn="ctr"/>
+            <a:r>
+              <a:rPr lang="en-US" sz="5400" dirty="0">
+                <a:solidFill>
+                  <a:schemeClr val="bg1"/>
+                </a:solidFill>
+              </a:rPr>
+              <a:t>Key Features</a:t>
+            </a:r>
+            <a:endParaRPr lang="en-US" sz="6600" dirty="0">
+              <a:solidFill>
+                <a:schemeClr val="bg1"/>
+              </a:solidFill>
+            </a:endParaRPr>
+          </a:p>
+        </p:txBody>
+      </p:sp>
+      <p:sp>
+        <p:nvSpPr>
+          <p:cNvPr id="30" name="TextBox 29">
+            <a:extLst>
+              <a:ext uri="{FF2B5EF4-FFF2-40B4-BE49-F238E27FC236}">
+                <a16:creationId xmlns:a16="http://schemas.microsoft.com/office/drawing/2014/main" id="{207C4476-B449-88E8-708A-990537144516}"/>
+              </a:ext>
+            </a:extLst>
+          </p:cNvPr>
+          <p:cNvSpPr txBox="1"/>
+          <p:nvPr/>
+        </p:nvSpPr>
+        <p:spPr>
+          <a:xfrm>
+            <a:off x="20068836" y="12037681"/>
+            <a:ext cx="9579858" cy="923330"/>
+          </a:xfrm>
+          <a:prstGeom prst="rect">
+            <a:avLst/>
+          </a:prstGeom>
+          <a:solidFill>
+            <a:schemeClr val="accent1"/>
+          </a:solidFill>
+        </p:spPr>
+        <p:txBody>
+          <a:bodyPr wrap="square" rtlCol="0">
+            <a:spAutoFit/>
+          </a:bodyPr>
+          <a:lstStyle/>
+          <a:p>
+            <a:pPr algn="ctr"/>
+            <a:r>
+              <a:rPr lang="en-US" sz="5400" dirty="0">
+                <a:solidFill>
+                  <a:schemeClr val="bg1"/>
+                </a:solidFill>
+              </a:rPr>
+              <a:t>Gamification</a:t>
+            </a:r>
+            <a:endParaRPr lang="en-US" sz="6600" dirty="0">
+              <a:solidFill>
+                <a:schemeClr val="bg1"/>
+              </a:solidFill>
+            </a:endParaRPr>
           </a:p>
         </p:txBody>
       </p:sp>
@@ -3672,7 +3860,7 @@
 <file path=ppt/theme/theme1.xml><?xml version="1.0" encoding="utf-8"?>
 <a:theme xmlns:a="http://schemas.openxmlformats.org/drawingml/2006/main" name="Office Theme">
   <a:themeElements>
-    <a:clrScheme name="Office">
+    <a:clrScheme name="Office Theme">
       <a:dk1>
         <a:sysClr val="windowText" lastClr="000000"/>
       </a:dk1>
@@ -3710,7 +3898,7 @@
         <a:srgbClr val="96607D"/>
       </a:folHlink>
     </a:clrScheme>
-    <a:fontScheme name="Office">
+    <a:fontScheme name="Office Theme">
       <a:majorFont>
         <a:latin typeface="Aptos Display" panose="02110004020202020204"/>
         <a:ea typeface=""/>
@@ -3816,7 +4004,7 @@
         <a:font script="Tfng" typeface="Ebrima"/>
       </a:minorFont>
     </a:fontScheme>
-    <a:fmtScheme name="Office">
+    <a:fmtScheme name="Office Theme">
       <a:fillStyleLst>
         <a:solidFill>
           <a:schemeClr val="phClr"/>

--- a/Poster.pptx
+++ b/Poster.pptx
@@ -243,7 +243,7 @@
           <a:p>
             <a:fld id="{4D8B8339-4FF2-4F94-A1EB-9E8F959F09EC}" type="datetimeFigureOut">
               <a:rPr lang="en-GB" smtClean="0"/>
-              <a:t>14/03/2026</a:t>
+              <a:t>20/04/2026</a:t>
             </a:fld>
             <a:endParaRPr lang="en-GB"/>
           </a:p>
@@ -413,7 +413,7 @@
           <a:p>
             <a:fld id="{4D8B8339-4FF2-4F94-A1EB-9E8F959F09EC}" type="datetimeFigureOut">
               <a:rPr lang="en-GB" smtClean="0"/>
-              <a:t>14/03/2026</a:t>
+              <a:t>20/04/2026</a:t>
             </a:fld>
             <a:endParaRPr lang="en-GB"/>
           </a:p>
@@ -593,7 +593,7 @@
           <a:p>
             <a:fld id="{4D8B8339-4FF2-4F94-A1EB-9E8F959F09EC}" type="datetimeFigureOut">
               <a:rPr lang="en-GB" smtClean="0"/>
-              <a:t>14/03/2026</a:t>
+              <a:t>20/04/2026</a:t>
             </a:fld>
             <a:endParaRPr lang="en-GB"/>
           </a:p>
@@ -763,7 +763,7 @@
           <a:p>
             <a:fld id="{4D8B8339-4FF2-4F94-A1EB-9E8F959F09EC}" type="datetimeFigureOut">
               <a:rPr lang="en-GB" smtClean="0"/>
-              <a:t>14/03/2026</a:t>
+              <a:t>20/04/2026</a:t>
             </a:fld>
             <a:endParaRPr lang="en-GB"/>
           </a:p>
@@ -1009,7 +1009,7 @@
           <a:p>
             <a:fld id="{4D8B8339-4FF2-4F94-A1EB-9E8F959F09EC}" type="datetimeFigureOut">
               <a:rPr lang="en-GB" smtClean="0"/>
-              <a:t>14/03/2026</a:t>
+              <a:t>20/04/2026</a:t>
             </a:fld>
             <a:endParaRPr lang="en-GB"/>
           </a:p>
@@ -1241,7 +1241,7 @@
           <a:p>
             <a:fld id="{4D8B8339-4FF2-4F94-A1EB-9E8F959F09EC}" type="datetimeFigureOut">
               <a:rPr lang="en-GB" smtClean="0"/>
-              <a:t>14/03/2026</a:t>
+              <a:t>20/04/2026</a:t>
             </a:fld>
             <a:endParaRPr lang="en-GB"/>
           </a:p>
@@ -1608,7 +1608,7 @@
           <a:p>
             <a:fld id="{4D8B8339-4FF2-4F94-A1EB-9E8F959F09EC}" type="datetimeFigureOut">
               <a:rPr lang="en-GB" smtClean="0"/>
-              <a:t>14/03/2026</a:t>
+              <a:t>20/04/2026</a:t>
             </a:fld>
             <a:endParaRPr lang="en-GB"/>
           </a:p>
@@ -1726,7 +1726,7 @@
           <a:p>
             <a:fld id="{4D8B8339-4FF2-4F94-A1EB-9E8F959F09EC}" type="datetimeFigureOut">
               <a:rPr lang="en-GB" smtClean="0"/>
-              <a:t>14/03/2026</a:t>
+              <a:t>20/04/2026</a:t>
             </a:fld>
             <a:endParaRPr lang="en-GB"/>
           </a:p>
@@ -1821,7 +1821,7 @@
           <a:p>
             <a:fld id="{4D8B8339-4FF2-4F94-A1EB-9E8F959F09EC}" type="datetimeFigureOut">
               <a:rPr lang="en-GB" smtClean="0"/>
-              <a:t>14/03/2026</a:t>
+              <a:t>20/04/2026</a:t>
             </a:fld>
             <a:endParaRPr lang="en-GB"/>
           </a:p>
@@ -2098,7 +2098,7 @@
           <a:p>
             <a:fld id="{4D8B8339-4FF2-4F94-A1EB-9E8F959F09EC}" type="datetimeFigureOut">
               <a:rPr lang="en-GB" smtClean="0"/>
-              <a:t>14/03/2026</a:t>
+              <a:t>20/04/2026</a:t>
             </a:fld>
             <a:endParaRPr lang="en-GB"/>
           </a:p>
@@ -2355,7 +2355,7 @@
           <a:p>
             <a:fld id="{4D8B8339-4FF2-4F94-A1EB-9E8F959F09EC}" type="datetimeFigureOut">
               <a:rPr lang="en-GB" smtClean="0"/>
-              <a:t>14/03/2026</a:t>
+              <a:t>20/04/2026</a:t>
             </a:fld>
             <a:endParaRPr lang="en-GB"/>
           </a:p>
@@ -2568,7 +2568,7 @@
           <a:p>
             <a:fld id="{4D8B8339-4FF2-4F94-A1EB-9E8F959F09EC}" type="datetimeFigureOut">
               <a:rPr lang="en-GB" smtClean="0"/>
-              <a:t>14/03/2026</a:t>
+              <a:t>20/04/2026</a:t>
             </a:fld>
             <a:endParaRPr lang="en-GB"/>
           </a:p>
@@ -2983,6 +2983,1183 @@
       </p:grpSpPr>
       <p:sp>
         <p:nvSpPr>
+          <p:cNvPr id="2" name="TextBox 1">
+            <a:extLst>
+              <a:ext uri="{FF2B5EF4-FFF2-40B4-BE49-F238E27FC236}">
+                <a16:creationId xmlns:a16="http://schemas.microsoft.com/office/drawing/2014/main" id="{1E1AC732-D44F-24EF-BDB0-A099D4F52527}"/>
+              </a:ext>
+            </a:extLst>
+          </p:cNvPr>
+          <p:cNvSpPr txBox="1"/>
+          <p:nvPr/>
+        </p:nvSpPr>
+        <p:spPr>
+          <a:xfrm>
+            <a:off x="384705" y="5062702"/>
+            <a:ext cx="9579858" cy="5078313"/>
+          </a:xfrm>
+          <a:prstGeom prst="rect">
+            <a:avLst/>
+          </a:prstGeom>
+          <a:gradFill flip="none" rotWithShape="1">
+            <a:gsLst>
+              <a:gs pos="0">
+                <a:schemeClr val="bg1">
+                  <a:lumMod val="65000"/>
+                  <a:tint val="66000"/>
+                  <a:satMod val="160000"/>
+                </a:schemeClr>
+              </a:gs>
+              <a:gs pos="50000">
+                <a:schemeClr val="bg1">
+                  <a:lumMod val="65000"/>
+                  <a:tint val="44500"/>
+                  <a:satMod val="160000"/>
+                </a:schemeClr>
+              </a:gs>
+              <a:gs pos="100000">
+                <a:schemeClr val="bg1">
+                  <a:lumMod val="65000"/>
+                  <a:tint val="23500"/>
+                  <a:satMod val="160000"/>
+                </a:schemeClr>
+              </a:gs>
+            </a:gsLst>
+            <a:path path="circle">
+              <a:fillToRect r="100000" b="100000"/>
+            </a:path>
+            <a:tileRect l="-100000" t="-100000"/>
+          </a:gradFill>
+          <a:ln w="76200">
+            <a:solidFill>
+              <a:schemeClr val="tx1"/>
+            </a:solidFill>
+          </a:ln>
+        </p:spPr>
+        <p:txBody>
+          <a:bodyPr wrap="square" rtlCol="0">
+            <a:spAutoFit/>
+          </a:bodyPr>
+          <a:lstStyle/>
+          <a:p>
+            <a:pPr marL="571500" indent="-571500">
+              <a:lnSpc>
+                <a:spcPct val="150000"/>
+              </a:lnSpc>
+              <a:buFont typeface="Arial" panose="020B0604020202020204" pitchFamily="34" charset="0"/>
+              <a:buChar char="•"/>
+            </a:pPr>
+            <a:r>
+              <a:rPr lang="en-GB" sz="3200" dirty="0">
+                <a:solidFill>
+                  <a:schemeClr val="tx2"/>
+                </a:solidFill>
+                <a:latin typeface="Arial" panose="020B0604020202020204" pitchFamily="34" charset="0"/>
+                <a:cs typeface="Arial" panose="020B0604020202020204" pitchFamily="34" charset="0"/>
+              </a:rPr>
+              <a:t>Children are facing increased online threats as they access the internet at younger ages</a:t>
+            </a:r>
+          </a:p>
+          <a:p>
+            <a:pPr marL="571500" indent="-571500">
+              <a:lnSpc>
+                <a:spcPct val="150000"/>
+              </a:lnSpc>
+              <a:buFont typeface="Arial" panose="020B0604020202020204" pitchFamily="34" charset="0"/>
+              <a:buChar char="•"/>
+            </a:pPr>
+            <a:r>
+              <a:rPr lang="en-GB" sz="3200" dirty="0">
+                <a:solidFill>
+                  <a:schemeClr val="tx2"/>
+                </a:solidFill>
+                <a:latin typeface="Arial" panose="020B0604020202020204" pitchFamily="34" charset="0"/>
+                <a:cs typeface="Arial" panose="020B0604020202020204" pitchFamily="34" charset="0"/>
+              </a:rPr>
+              <a:t>Existing solutions block access without teaching browsing behaviour</a:t>
+            </a:r>
+          </a:p>
+          <a:p>
+            <a:pPr marL="571500" indent="-571500">
+              <a:lnSpc>
+                <a:spcPct val="150000"/>
+              </a:lnSpc>
+              <a:buFont typeface="Arial" panose="020B0604020202020204" pitchFamily="34" charset="0"/>
+              <a:buChar char="•"/>
+            </a:pPr>
+            <a:r>
+              <a:rPr lang="en-GB" sz="3200" dirty="0">
+                <a:solidFill>
+                  <a:schemeClr val="tx2"/>
+                </a:solidFill>
+                <a:latin typeface="Arial" panose="020B0604020202020204" pitchFamily="34" charset="0"/>
+                <a:cs typeface="Arial" panose="020B0604020202020204" pitchFamily="34" charset="0"/>
+              </a:rPr>
+              <a:t>Behavioural conditioning effectively influences behaviour</a:t>
+            </a:r>
+          </a:p>
+          <a:p>
+            <a:endParaRPr lang="en-GB" sz="3600" dirty="0">
+              <a:latin typeface="Arial" panose="020B0604020202020204" pitchFamily="34" charset="0"/>
+              <a:cs typeface="Arial" panose="020B0604020202020204" pitchFamily="34" charset="0"/>
+            </a:endParaRPr>
+          </a:p>
+        </p:txBody>
+      </p:sp>
+      <p:sp>
+        <p:nvSpPr>
+          <p:cNvPr id="5" name="TextBox 4">
+            <a:extLst>
+              <a:ext uri="{FF2B5EF4-FFF2-40B4-BE49-F238E27FC236}">
+                <a16:creationId xmlns:a16="http://schemas.microsoft.com/office/drawing/2014/main" id="{EEBE0434-CEDB-3B4A-8A5D-1223E9884CFB}"/>
+              </a:ext>
+            </a:extLst>
+          </p:cNvPr>
+          <p:cNvSpPr txBox="1"/>
+          <p:nvPr/>
+        </p:nvSpPr>
+        <p:spPr>
+          <a:xfrm>
+            <a:off x="1922757" y="252977"/>
+            <a:ext cx="18930301" cy="3647152"/>
+          </a:xfrm>
+          <a:prstGeom prst="rect">
+            <a:avLst/>
+          </a:prstGeom>
+          <a:noFill/>
+        </p:spPr>
+        <p:txBody>
+          <a:bodyPr wrap="square" rtlCol="0">
+            <a:spAutoFit/>
+          </a:bodyPr>
+          <a:lstStyle/>
+          <a:p>
+            <a:r>
+              <a:rPr lang="en-US" sz="19900" b="1" u="sng" dirty="0">
+                <a:latin typeface="Arial" panose="020B0604020202020204" pitchFamily="34" charset="0"/>
+                <a:cs typeface="Arial" panose="020B0604020202020204" pitchFamily="34" charset="0"/>
+              </a:rPr>
+              <a:t>STRONGHOLD</a:t>
+            </a:r>
+            <a:endParaRPr lang="en-US" sz="11500" b="1" u="sng" dirty="0">
+              <a:latin typeface="Arial" panose="020B0604020202020204" pitchFamily="34" charset="0"/>
+              <a:cs typeface="Arial" panose="020B0604020202020204" pitchFamily="34" charset="0"/>
+            </a:endParaRPr>
+          </a:p>
+          <a:p>
+            <a:pPr algn="ctr"/>
+            <a:r>
+              <a:rPr lang="en-US" sz="3200" b="1" i="1" dirty="0">
+                <a:latin typeface="Arial" panose="020B0604020202020204" pitchFamily="34" charset="0"/>
+                <a:cs typeface="Arial" panose="020B0604020202020204" pitchFamily="34" charset="0"/>
+              </a:rPr>
+              <a:t>By Mark Hardy</a:t>
+            </a:r>
+            <a:endParaRPr lang="en-US" sz="8800" b="1" i="1" dirty="0">
+              <a:latin typeface="Arial" panose="020B0604020202020204" pitchFamily="34" charset="0"/>
+              <a:cs typeface="Arial" panose="020B0604020202020204" pitchFamily="34" charset="0"/>
+            </a:endParaRPr>
+          </a:p>
+        </p:txBody>
+      </p:sp>
+      <p:sp>
+        <p:nvSpPr>
+          <p:cNvPr id="8" name="TextBox 7">
+            <a:extLst>
+              <a:ext uri="{FF2B5EF4-FFF2-40B4-BE49-F238E27FC236}">
+                <a16:creationId xmlns:a16="http://schemas.microsoft.com/office/drawing/2014/main" id="{FDDF774C-E6E4-FABD-CE7E-198541257231}"/>
+              </a:ext>
+            </a:extLst>
+          </p:cNvPr>
+          <p:cNvSpPr txBox="1"/>
+          <p:nvPr/>
+        </p:nvSpPr>
+        <p:spPr>
+          <a:xfrm>
+            <a:off x="936461" y="11400305"/>
+            <a:ext cx="9579857" cy="5755422"/>
+          </a:xfrm>
+          <a:prstGeom prst="rect">
+            <a:avLst/>
+          </a:prstGeom>
+          <a:gradFill flip="none" rotWithShape="1">
+            <a:gsLst>
+              <a:gs pos="0">
+                <a:schemeClr val="bg1">
+                  <a:lumMod val="65000"/>
+                  <a:tint val="66000"/>
+                  <a:satMod val="160000"/>
+                </a:schemeClr>
+              </a:gs>
+              <a:gs pos="50000">
+                <a:schemeClr val="bg1">
+                  <a:lumMod val="65000"/>
+                  <a:tint val="44500"/>
+                  <a:satMod val="160000"/>
+                </a:schemeClr>
+              </a:gs>
+              <a:gs pos="100000">
+                <a:schemeClr val="bg1">
+                  <a:lumMod val="65000"/>
+                  <a:tint val="23500"/>
+                  <a:satMod val="160000"/>
+                </a:schemeClr>
+              </a:gs>
+            </a:gsLst>
+            <a:lin ang="16200000" scaled="1"/>
+            <a:tileRect/>
+          </a:gradFill>
+          <a:ln w="76200">
+            <a:solidFill>
+              <a:schemeClr val="tx1"/>
+            </a:solidFill>
+          </a:ln>
+        </p:spPr>
+        <p:txBody>
+          <a:bodyPr wrap="square" rtlCol="0">
+            <a:spAutoFit/>
+          </a:bodyPr>
+          <a:lstStyle/>
+          <a:p>
+            <a:pPr marL="571500" indent="-571500">
+              <a:lnSpc>
+                <a:spcPct val="150000"/>
+              </a:lnSpc>
+              <a:buFont typeface="Arial" panose="020B0604020202020204" pitchFamily="34" charset="0"/>
+              <a:buChar char="•"/>
+            </a:pPr>
+            <a:r>
+              <a:rPr lang="en-GB" sz="3200" dirty="0">
+                <a:solidFill>
+                  <a:schemeClr val="tx2"/>
+                </a:solidFill>
+                <a:latin typeface="Arial" panose="020B0604020202020204" pitchFamily="34" charset="0"/>
+                <a:cs typeface="Arial" panose="020B0604020202020204" pitchFamily="34" charset="0"/>
+              </a:rPr>
+              <a:t>Security-focussed web browser</a:t>
+            </a:r>
+          </a:p>
+          <a:p>
+            <a:pPr marL="571500" indent="-571500">
+              <a:lnSpc>
+                <a:spcPct val="150000"/>
+              </a:lnSpc>
+              <a:buFont typeface="Arial" panose="020B0604020202020204" pitchFamily="34" charset="0"/>
+              <a:buChar char="•"/>
+            </a:pPr>
+            <a:r>
+              <a:rPr lang="en-GB" sz="3200" dirty="0">
+                <a:solidFill>
+                  <a:schemeClr val="tx2"/>
+                </a:solidFill>
+                <a:latin typeface="Arial" panose="020B0604020202020204" pitchFamily="34" charset="0"/>
+                <a:cs typeface="Arial" panose="020B0604020202020204" pitchFamily="34" charset="0"/>
+              </a:rPr>
+              <a:t>Teach children safe browsing behaviours</a:t>
+            </a:r>
+          </a:p>
+          <a:p>
+            <a:pPr marL="571500" indent="-571500">
+              <a:lnSpc>
+                <a:spcPct val="150000"/>
+              </a:lnSpc>
+              <a:buFont typeface="Arial" panose="020B0604020202020204" pitchFamily="34" charset="0"/>
+              <a:buChar char="•"/>
+            </a:pPr>
+            <a:r>
+              <a:rPr lang="en-GB" sz="3200" dirty="0">
+                <a:solidFill>
+                  <a:schemeClr val="tx2"/>
+                </a:solidFill>
+                <a:latin typeface="Arial" panose="020B0604020202020204" pitchFamily="34" charset="0"/>
+                <a:cs typeface="Arial" panose="020B0604020202020204" pitchFamily="34" charset="0"/>
+              </a:rPr>
+              <a:t>Uses behavioural conditioning and gamification</a:t>
+            </a:r>
+          </a:p>
+          <a:p>
+            <a:pPr marL="571500" indent="-571500">
+              <a:lnSpc>
+                <a:spcPct val="150000"/>
+              </a:lnSpc>
+              <a:buFont typeface="Arial" panose="020B0604020202020204" pitchFamily="34" charset="0"/>
+              <a:buChar char="•"/>
+            </a:pPr>
+            <a:r>
+              <a:rPr lang="en-GB" sz="3200" dirty="0">
+                <a:solidFill>
+                  <a:schemeClr val="tx2"/>
+                </a:solidFill>
+                <a:latin typeface="Arial" panose="020B0604020202020204" pitchFamily="34" charset="0"/>
+                <a:cs typeface="Arial" panose="020B0604020202020204" pitchFamily="34" charset="0"/>
+              </a:rPr>
+              <a:t>Blocks access to malicious content while educating why</a:t>
+            </a:r>
+          </a:p>
+          <a:p>
+            <a:pPr marL="571500" indent="-571500">
+              <a:lnSpc>
+                <a:spcPct val="150000"/>
+              </a:lnSpc>
+              <a:buFont typeface="Arial" panose="020B0604020202020204" pitchFamily="34" charset="0"/>
+              <a:buChar char="•"/>
+            </a:pPr>
+            <a:r>
+              <a:rPr lang="en-GB" sz="3200" dirty="0">
+                <a:solidFill>
+                  <a:schemeClr val="tx2"/>
+                </a:solidFill>
+                <a:latin typeface="Arial" panose="020B0604020202020204" pitchFamily="34" charset="0"/>
+                <a:cs typeface="Arial" panose="020B0604020202020204" pitchFamily="34" charset="0"/>
+              </a:rPr>
+              <a:t>Built using Electron (JavaScript framework)</a:t>
+            </a:r>
+          </a:p>
+          <a:p>
+            <a:pPr marL="571500" indent="-571500">
+              <a:lnSpc>
+                <a:spcPct val="150000"/>
+              </a:lnSpc>
+              <a:buFont typeface="Arial" panose="020B0604020202020204" pitchFamily="34" charset="0"/>
+              <a:buChar char="•"/>
+            </a:pPr>
+            <a:r>
+              <a:rPr lang="en-GB" sz="3200" dirty="0">
+                <a:solidFill>
+                  <a:schemeClr val="tx2"/>
+                </a:solidFill>
+                <a:latin typeface="Arial" panose="020B0604020202020204" pitchFamily="34" charset="0"/>
+                <a:cs typeface="Arial" panose="020B0604020202020204" pitchFamily="34" charset="0"/>
+              </a:rPr>
+              <a:t>Uses Firebase for the backend database</a:t>
+            </a:r>
+          </a:p>
+          <a:p>
+            <a:endParaRPr lang="en-GB" sz="3200" dirty="0">
+              <a:latin typeface="Arial" panose="020B0604020202020204" pitchFamily="34" charset="0"/>
+              <a:cs typeface="Arial" panose="020B0604020202020204" pitchFamily="34" charset="0"/>
+            </a:endParaRPr>
+          </a:p>
+        </p:txBody>
+      </p:sp>
+      <p:sp>
+        <p:nvSpPr>
+          <p:cNvPr id="13" name="TextBox 12">
+            <a:extLst>
+              <a:ext uri="{FF2B5EF4-FFF2-40B4-BE49-F238E27FC236}">
+                <a16:creationId xmlns:a16="http://schemas.microsoft.com/office/drawing/2014/main" id="{E14C5081-44E4-DE23-E173-D0A8E239F4E0}"/>
+              </a:ext>
+            </a:extLst>
+          </p:cNvPr>
+          <p:cNvSpPr txBox="1"/>
+          <p:nvPr/>
+        </p:nvSpPr>
+        <p:spPr>
+          <a:xfrm>
+            <a:off x="22329010" y="1800433"/>
+            <a:ext cx="7358432" cy="17820263"/>
+          </a:xfrm>
+          <a:prstGeom prst="rect">
+            <a:avLst/>
+          </a:prstGeom>
+          <a:gradFill flip="none" rotWithShape="1">
+            <a:gsLst>
+              <a:gs pos="0">
+                <a:schemeClr val="bg1">
+                  <a:lumMod val="65000"/>
+                  <a:tint val="66000"/>
+                  <a:satMod val="160000"/>
+                </a:schemeClr>
+              </a:gs>
+              <a:gs pos="50000">
+                <a:schemeClr val="bg1">
+                  <a:lumMod val="65000"/>
+                  <a:tint val="44500"/>
+                  <a:satMod val="160000"/>
+                </a:schemeClr>
+              </a:gs>
+              <a:gs pos="100000">
+                <a:schemeClr val="bg1">
+                  <a:lumMod val="65000"/>
+                  <a:tint val="23500"/>
+                  <a:satMod val="160000"/>
+                </a:schemeClr>
+              </a:gs>
+            </a:gsLst>
+            <a:lin ang="16200000" scaled="1"/>
+            <a:tileRect/>
+          </a:gradFill>
+          <a:ln w="76200">
+            <a:solidFill>
+              <a:schemeClr val="tx1"/>
+            </a:solidFill>
+          </a:ln>
+        </p:spPr>
+        <p:txBody>
+          <a:bodyPr wrap="square" rtlCol="0">
+            <a:spAutoFit/>
+          </a:bodyPr>
+          <a:lstStyle/>
+          <a:p>
+            <a:endParaRPr lang="en-GB" sz="3200" dirty="0">
+              <a:latin typeface="Arial" panose="020B0604020202020204" pitchFamily="34" charset="0"/>
+              <a:cs typeface="Arial" panose="020B0604020202020204" pitchFamily="34" charset="0"/>
+            </a:endParaRPr>
+          </a:p>
+          <a:p>
+            <a:endParaRPr lang="en-GB" sz="3200" dirty="0">
+              <a:latin typeface="Arial" panose="020B0604020202020204" pitchFamily="34" charset="0"/>
+              <a:cs typeface="Arial" panose="020B0604020202020204" pitchFamily="34" charset="0"/>
+            </a:endParaRPr>
+          </a:p>
+          <a:p>
+            <a:endParaRPr lang="en-GB" sz="3200" dirty="0">
+              <a:latin typeface="Arial" panose="020B0604020202020204" pitchFamily="34" charset="0"/>
+              <a:cs typeface="Arial" panose="020B0604020202020204" pitchFamily="34" charset="0"/>
+            </a:endParaRPr>
+          </a:p>
+          <a:p>
+            <a:endParaRPr lang="en-GB" sz="3200" dirty="0">
+              <a:latin typeface="Arial" panose="020B0604020202020204" pitchFamily="34" charset="0"/>
+              <a:cs typeface="Arial" panose="020B0604020202020204" pitchFamily="34" charset="0"/>
+            </a:endParaRPr>
+          </a:p>
+          <a:p>
+            <a:endParaRPr lang="en-GB" sz="3200" dirty="0">
+              <a:latin typeface="Arial" panose="020B0604020202020204" pitchFamily="34" charset="0"/>
+              <a:cs typeface="Arial" panose="020B0604020202020204" pitchFamily="34" charset="0"/>
+            </a:endParaRPr>
+          </a:p>
+          <a:p>
+            <a:endParaRPr lang="en-GB" sz="3200" dirty="0">
+              <a:latin typeface="Arial" panose="020B0604020202020204" pitchFamily="34" charset="0"/>
+              <a:cs typeface="Arial" panose="020B0604020202020204" pitchFamily="34" charset="0"/>
+            </a:endParaRPr>
+          </a:p>
+          <a:p>
+            <a:endParaRPr lang="en-GB" sz="3200" dirty="0">
+              <a:latin typeface="Arial" panose="020B0604020202020204" pitchFamily="34" charset="0"/>
+              <a:cs typeface="Arial" panose="020B0604020202020204" pitchFamily="34" charset="0"/>
+            </a:endParaRPr>
+          </a:p>
+          <a:p>
+            <a:endParaRPr lang="en-GB" sz="3200" dirty="0">
+              <a:latin typeface="Arial" panose="020B0604020202020204" pitchFamily="34" charset="0"/>
+              <a:cs typeface="Arial" panose="020B0604020202020204" pitchFamily="34" charset="0"/>
+            </a:endParaRPr>
+          </a:p>
+          <a:p>
+            <a:endParaRPr lang="en-GB" sz="3200" dirty="0">
+              <a:latin typeface="Arial" panose="020B0604020202020204" pitchFamily="34" charset="0"/>
+              <a:cs typeface="Arial" panose="020B0604020202020204" pitchFamily="34" charset="0"/>
+            </a:endParaRPr>
+          </a:p>
+          <a:p>
+            <a:endParaRPr lang="en-GB" sz="3200" dirty="0">
+              <a:latin typeface="Arial" panose="020B0604020202020204" pitchFamily="34" charset="0"/>
+              <a:cs typeface="Arial" panose="020B0604020202020204" pitchFamily="34" charset="0"/>
+            </a:endParaRPr>
+          </a:p>
+          <a:p>
+            <a:endParaRPr lang="en-GB" sz="3200" dirty="0">
+              <a:latin typeface="Arial" panose="020B0604020202020204" pitchFamily="34" charset="0"/>
+              <a:cs typeface="Arial" panose="020B0604020202020204" pitchFamily="34" charset="0"/>
+            </a:endParaRPr>
+          </a:p>
+          <a:p>
+            <a:endParaRPr lang="en-GB" sz="3200" dirty="0">
+              <a:latin typeface="Arial" panose="020B0604020202020204" pitchFamily="34" charset="0"/>
+              <a:cs typeface="Arial" panose="020B0604020202020204" pitchFamily="34" charset="0"/>
+            </a:endParaRPr>
+          </a:p>
+          <a:p>
+            <a:endParaRPr lang="en-GB" sz="3200" dirty="0">
+              <a:latin typeface="Arial" panose="020B0604020202020204" pitchFamily="34" charset="0"/>
+              <a:cs typeface="Arial" panose="020B0604020202020204" pitchFamily="34" charset="0"/>
+            </a:endParaRPr>
+          </a:p>
+          <a:p>
+            <a:endParaRPr lang="en-GB" sz="3200" dirty="0">
+              <a:latin typeface="Arial" panose="020B0604020202020204" pitchFamily="34" charset="0"/>
+              <a:cs typeface="Arial" panose="020B0604020202020204" pitchFamily="34" charset="0"/>
+            </a:endParaRPr>
+          </a:p>
+          <a:p>
+            <a:endParaRPr lang="en-GB" sz="3200" dirty="0">
+              <a:latin typeface="Arial" panose="020B0604020202020204" pitchFamily="34" charset="0"/>
+              <a:cs typeface="Arial" panose="020B0604020202020204" pitchFamily="34" charset="0"/>
+            </a:endParaRPr>
+          </a:p>
+          <a:p>
+            <a:endParaRPr lang="en-GB" sz="3200" dirty="0">
+              <a:latin typeface="Arial" panose="020B0604020202020204" pitchFamily="34" charset="0"/>
+              <a:cs typeface="Arial" panose="020B0604020202020204" pitchFamily="34" charset="0"/>
+            </a:endParaRPr>
+          </a:p>
+          <a:p>
+            <a:endParaRPr lang="en-GB" sz="3200" dirty="0">
+              <a:latin typeface="Arial" panose="020B0604020202020204" pitchFamily="34" charset="0"/>
+              <a:cs typeface="Arial" panose="020B0604020202020204" pitchFamily="34" charset="0"/>
+            </a:endParaRPr>
+          </a:p>
+          <a:p>
+            <a:endParaRPr lang="en-GB" sz="3200" dirty="0">
+              <a:latin typeface="Arial" panose="020B0604020202020204" pitchFamily="34" charset="0"/>
+              <a:cs typeface="Arial" panose="020B0604020202020204" pitchFamily="34" charset="0"/>
+            </a:endParaRPr>
+          </a:p>
+          <a:p>
+            <a:endParaRPr lang="en-GB" sz="3200" dirty="0">
+              <a:latin typeface="Arial" panose="020B0604020202020204" pitchFamily="34" charset="0"/>
+              <a:cs typeface="Arial" panose="020B0604020202020204" pitchFamily="34" charset="0"/>
+            </a:endParaRPr>
+          </a:p>
+          <a:p>
+            <a:endParaRPr lang="en-GB" sz="3200" dirty="0">
+              <a:latin typeface="Arial" panose="020B0604020202020204" pitchFamily="34" charset="0"/>
+              <a:cs typeface="Arial" panose="020B0604020202020204" pitchFamily="34" charset="0"/>
+            </a:endParaRPr>
+          </a:p>
+          <a:p>
+            <a:endParaRPr lang="en-GB" sz="3200" dirty="0">
+              <a:latin typeface="Arial" panose="020B0604020202020204" pitchFamily="34" charset="0"/>
+              <a:cs typeface="Arial" panose="020B0604020202020204" pitchFamily="34" charset="0"/>
+            </a:endParaRPr>
+          </a:p>
+          <a:p>
+            <a:endParaRPr lang="en-GB" sz="3200" dirty="0">
+              <a:latin typeface="Arial" panose="020B0604020202020204" pitchFamily="34" charset="0"/>
+              <a:cs typeface="Arial" panose="020B0604020202020204" pitchFamily="34" charset="0"/>
+            </a:endParaRPr>
+          </a:p>
+          <a:p>
+            <a:endParaRPr lang="en-GB" sz="3200" dirty="0">
+              <a:latin typeface="Arial" panose="020B0604020202020204" pitchFamily="34" charset="0"/>
+              <a:cs typeface="Arial" panose="020B0604020202020204" pitchFamily="34" charset="0"/>
+            </a:endParaRPr>
+          </a:p>
+          <a:p>
+            <a:endParaRPr lang="en-GB" sz="3200" dirty="0">
+              <a:latin typeface="Arial" panose="020B0604020202020204" pitchFamily="34" charset="0"/>
+              <a:cs typeface="Arial" panose="020B0604020202020204" pitchFamily="34" charset="0"/>
+            </a:endParaRPr>
+          </a:p>
+          <a:p>
+            <a:endParaRPr lang="en-GB" sz="3200" dirty="0">
+              <a:latin typeface="Arial" panose="020B0604020202020204" pitchFamily="34" charset="0"/>
+              <a:cs typeface="Arial" panose="020B0604020202020204" pitchFamily="34" charset="0"/>
+            </a:endParaRPr>
+          </a:p>
+          <a:p>
+            <a:endParaRPr lang="en-GB" sz="3200" dirty="0">
+              <a:latin typeface="Arial" panose="020B0604020202020204" pitchFamily="34" charset="0"/>
+              <a:cs typeface="Arial" panose="020B0604020202020204" pitchFamily="34" charset="0"/>
+            </a:endParaRPr>
+          </a:p>
+          <a:p>
+            <a:endParaRPr lang="en-GB" sz="3200" dirty="0">
+              <a:latin typeface="Arial" panose="020B0604020202020204" pitchFamily="34" charset="0"/>
+              <a:cs typeface="Arial" panose="020B0604020202020204" pitchFamily="34" charset="0"/>
+            </a:endParaRPr>
+          </a:p>
+          <a:p>
+            <a:endParaRPr lang="en-GB" sz="3200" dirty="0">
+              <a:latin typeface="Arial" panose="020B0604020202020204" pitchFamily="34" charset="0"/>
+              <a:cs typeface="Arial" panose="020B0604020202020204" pitchFamily="34" charset="0"/>
+            </a:endParaRPr>
+          </a:p>
+          <a:p>
+            <a:endParaRPr lang="en-GB" sz="3200" dirty="0">
+              <a:latin typeface="Arial" panose="020B0604020202020204" pitchFamily="34" charset="0"/>
+              <a:cs typeface="Arial" panose="020B0604020202020204" pitchFamily="34" charset="0"/>
+            </a:endParaRPr>
+          </a:p>
+          <a:p>
+            <a:endParaRPr lang="en-GB" sz="3200" dirty="0">
+              <a:latin typeface="Arial" panose="020B0604020202020204" pitchFamily="34" charset="0"/>
+              <a:cs typeface="Arial" panose="020B0604020202020204" pitchFamily="34" charset="0"/>
+            </a:endParaRPr>
+          </a:p>
+          <a:p>
+            <a:endParaRPr lang="en-GB" sz="3200" dirty="0">
+              <a:latin typeface="Arial" panose="020B0604020202020204" pitchFamily="34" charset="0"/>
+              <a:cs typeface="Arial" panose="020B0604020202020204" pitchFamily="34" charset="0"/>
+            </a:endParaRPr>
+          </a:p>
+          <a:p>
+            <a:endParaRPr lang="en-GB" sz="3200" dirty="0">
+              <a:latin typeface="Arial" panose="020B0604020202020204" pitchFamily="34" charset="0"/>
+              <a:cs typeface="Arial" panose="020B0604020202020204" pitchFamily="34" charset="0"/>
+            </a:endParaRPr>
+          </a:p>
+          <a:p>
+            <a:endParaRPr lang="en-GB" sz="3200" dirty="0">
+              <a:latin typeface="Arial" panose="020B0604020202020204" pitchFamily="34" charset="0"/>
+              <a:cs typeface="Arial" panose="020B0604020202020204" pitchFamily="34" charset="0"/>
+            </a:endParaRPr>
+          </a:p>
+          <a:p>
+            <a:endParaRPr lang="en-GB" sz="3200" dirty="0">
+              <a:latin typeface="Arial" panose="020B0604020202020204" pitchFamily="34" charset="0"/>
+              <a:cs typeface="Arial" panose="020B0604020202020204" pitchFamily="34" charset="0"/>
+            </a:endParaRPr>
+          </a:p>
+          <a:p>
+            <a:endParaRPr lang="en-GB" sz="3200" dirty="0">
+              <a:latin typeface="Arial" panose="020B0604020202020204" pitchFamily="34" charset="0"/>
+              <a:cs typeface="Arial" panose="020B0604020202020204" pitchFamily="34" charset="0"/>
+            </a:endParaRPr>
+          </a:p>
+          <a:p>
+            <a:endParaRPr lang="en-GB" sz="3200" dirty="0">
+              <a:latin typeface="Arial" panose="020B0604020202020204" pitchFamily="34" charset="0"/>
+              <a:cs typeface="Arial" panose="020B0604020202020204" pitchFamily="34" charset="0"/>
+            </a:endParaRPr>
+          </a:p>
+        </p:txBody>
+      </p:sp>
+      <p:sp>
+        <p:nvSpPr>
+          <p:cNvPr id="14" name="TextBox 13">
+            <a:extLst>
+              <a:ext uri="{FF2B5EF4-FFF2-40B4-BE49-F238E27FC236}">
+                <a16:creationId xmlns:a16="http://schemas.microsoft.com/office/drawing/2014/main" id="{B9EEE6AA-99A6-1339-F05E-CE0DC41008C5}"/>
+              </a:ext>
+            </a:extLst>
+          </p:cNvPr>
+          <p:cNvSpPr txBox="1"/>
+          <p:nvPr/>
+        </p:nvSpPr>
+        <p:spPr>
+          <a:xfrm>
+            <a:off x="22772727" y="9656934"/>
+            <a:ext cx="6519891" cy="769441"/>
+          </a:xfrm>
+          <a:prstGeom prst="rect">
+            <a:avLst/>
+          </a:prstGeom>
+          <a:gradFill flip="none" rotWithShape="1">
+            <a:gsLst>
+              <a:gs pos="0">
+                <a:schemeClr val="accent1">
+                  <a:tint val="66000"/>
+                  <a:satMod val="160000"/>
+                </a:schemeClr>
+              </a:gs>
+              <a:gs pos="50000">
+                <a:schemeClr val="accent1">
+                  <a:tint val="44500"/>
+                  <a:satMod val="160000"/>
+                </a:schemeClr>
+              </a:gs>
+              <a:gs pos="100000">
+                <a:schemeClr val="accent1">
+                  <a:tint val="23500"/>
+                  <a:satMod val="160000"/>
+                </a:schemeClr>
+              </a:gs>
+            </a:gsLst>
+            <a:path path="circle">
+              <a:fillToRect l="50000" t="50000" r="50000" b="50000"/>
+            </a:path>
+            <a:tileRect/>
+          </a:gradFill>
+          <a:ln w="50800">
+            <a:solidFill>
+              <a:schemeClr val="tx1"/>
+            </a:solidFill>
+          </a:ln>
+        </p:spPr>
+        <p:txBody>
+          <a:bodyPr wrap="square" rtlCol="0">
+            <a:spAutoFit/>
+          </a:bodyPr>
+          <a:lstStyle/>
+          <a:p>
+            <a:pPr algn="ctr"/>
+            <a:r>
+              <a:rPr lang="en-US" sz="4400" b="1" dirty="0">
+                <a:latin typeface="Arial" panose="020B0604020202020204" pitchFamily="34" charset="0"/>
+                <a:cs typeface="Arial" panose="020B0604020202020204" pitchFamily="34" charset="0"/>
+              </a:rPr>
+              <a:t>Dashboard</a:t>
+            </a:r>
+            <a:endParaRPr lang="en-US" sz="5400" b="1" dirty="0">
+              <a:latin typeface="Arial" panose="020B0604020202020204" pitchFamily="34" charset="0"/>
+              <a:cs typeface="Arial" panose="020B0604020202020204" pitchFamily="34" charset="0"/>
+            </a:endParaRPr>
+          </a:p>
+        </p:txBody>
+      </p:sp>
+      <p:sp>
+        <p:nvSpPr>
+          <p:cNvPr id="15" name="TextBox 14">
+            <a:extLst>
+              <a:ext uri="{FF2B5EF4-FFF2-40B4-BE49-F238E27FC236}">
+                <a16:creationId xmlns:a16="http://schemas.microsoft.com/office/drawing/2014/main" id="{4F13F2C1-A8AC-89FD-2E89-6699EA72FE41}"/>
+              </a:ext>
+            </a:extLst>
+          </p:cNvPr>
+          <p:cNvSpPr txBox="1"/>
+          <p:nvPr/>
+        </p:nvSpPr>
+        <p:spPr>
+          <a:xfrm>
+            <a:off x="384705" y="4243398"/>
+            <a:ext cx="9579858" cy="923330"/>
+          </a:xfrm>
+          <a:prstGeom prst="rect">
+            <a:avLst/>
+          </a:prstGeom>
+          <a:gradFill flip="none" rotWithShape="1">
+            <a:gsLst>
+              <a:gs pos="0">
+                <a:schemeClr val="tx2">
+                  <a:lumMod val="25000"/>
+                  <a:lumOff val="75000"/>
+                  <a:tint val="66000"/>
+                  <a:satMod val="160000"/>
+                </a:schemeClr>
+              </a:gs>
+              <a:gs pos="50000">
+                <a:schemeClr val="tx2">
+                  <a:lumMod val="25000"/>
+                  <a:lumOff val="75000"/>
+                  <a:tint val="44500"/>
+                  <a:satMod val="160000"/>
+                </a:schemeClr>
+              </a:gs>
+              <a:gs pos="100000">
+                <a:schemeClr val="tx2">
+                  <a:lumMod val="25000"/>
+                  <a:lumOff val="75000"/>
+                  <a:tint val="23500"/>
+                  <a:satMod val="160000"/>
+                </a:schemeClr>
+              </a:gs>
+            </a:gsLst>
+            <a:lin ang="16200000" scaled="1"/>
+            <a:tileRect/>
+          </a:gradFill>
+          <a:ln w="76200">
+            <a:solidFill>
+              <a:schemeClr val="tx1"/>
+            </a:solidFill>
+          </a:ln>
+        </p:spPr>
+        <p:txBody>
+          <a:bodyPr wrap="square" rtlCol="0">
+            <a:spAutoFit/>
+          </a:bodyPr>
+          <a:lstStyle/>
+          <a:p>
+            <a:pPr algn="ctr"/>
+            <a:r>
+              <a:rPr lang="en-US" sz="5400" b="1" dirty="0">
+                <a:latin typeface="Arial" panose="020B0604020202020204" pitchFamily="34" charset="0"/>
+                <a:cs typeface="Arial" panose="020B0604020202020204" pitchFamily="34" charset="0"/>
+              </a:rPr>
+              <a:t>Why Stronghold?</a:t>
+            </a:r>
+            <a:endParaRPr lang="en-US" sz="6600" b="1" dirty="0">
+              <a:latin typeface="Arial" panose="020B0604020202020204" pitchFamily="34" charset="0"/>
+              <a:cs typeface="Arial" panose="020B0604020202020204" pitchFamily="34" charset="0"/>
+            </a:endParaRPr>
+          </a:p>
+        </p:txBody>
+      </p:sp>
+      <p:sp>
+        <p:nvSpPr>
+          <p:cNvPr id="16" name="TextBox 15">
+            <a:extLst>
+              <a:ext uri="{FF2B5EF4-FFF2-40B4-BE49-F238E27FC236}">
+                <a16:creationId xmlns:a16="http://schemas.microsoft.com/office/drawing/2014/main" id="{DC246ED9-7C98-6341-BB7A-9B2873295576}"/>
+              </a:ext>
+            </a:extLst>
+          </p:cNvPr>
+          <p:cNvSpPr txBox="1"/>
+          <p:nvPr/>
+        </p:nvSpPr>
+        <p:spPr>
+          <a:xfrm>
+            <a:off x="936460" y="10498654"/>
+            <a:ext cx="9579858" cy="923330"/>
+          </a:xfrm>
+          <a:prstGeom prst="rect">
+            <a:avLst/>
+          </a:prstGeom>
+          <a:gradFill flip="none" rotWithShape="1">
+            <a:gsLst>
+              <a:gs pos="0">
+                <a:schemeClr val="tx2">
+                  <a:lumMod val="25000"/>
+                  <a:lumOff val="75000"/>
+                  <a:tint val="66000"/>
+                  <a:satMod val="160000"/>
+                </a:schemeClr>
+              </a:gs>
+              <a:gs pos="50000">
+                <a:schemeClr val="tx2">
+                  <a:lumMod val="25000"/>
+                  <a:lumOff val="75000"/>
+                  <a:tint val="44500"/>
+                  <a:satMod val="160000"/>
+                </a:schemeClr>
+              </a:gs>
+              <a:gs pos="100000">
+                <a:schemeClr val="tx2">
+                  <a:lumMod val="25000"/>
+                  <a:lumOff val="75000"/>
+                  <a:tint val="23500"/>
+                  <a:satMod val="160000"/>
+                </a:schemeClr>
+              </a:gs>
+            </a:gsLst>
+            <a:lin ang="16200000" scaled="1"/>
+            <a:tileRect/>
+          </a:gradFill>
+          <a:ln w="76200">
+            <a:solidFill>
+              <a:schemeClr val="tx1"/>
+            </a:solidFill>
+          </a:ln>
+        </p:spPr>
+        <p:txBody>
+          <a:bodyPr wrap="square" rtlCol="0">
+            <a:spAutoFit/>
+          </a:bodyPr>
+          <a:lstStyle/>
+          <a:p>
+            <a:pPr algn="ctr"/>
+            <a:r>
+              <a:rPr lang="en-US" sz="5400" b="1" dirty="0">
+                <a:latin typeface="Arial" panose="020B0604020202020204" pitchFamily="34" charset="0"/>
+                <a:cs typeface="Arial" panose="020B0604020202020204" pitchFamily="34" charset="0"/>
+              </a:rPr>
+              <a:t>What is Stronghold?</a:t>
+            </a:r>
+            <a:endParaRPr lang="en-US" sz="6600" b="1" dirty="0">
+              <a:latin typeface="Arial" panose="020B0604020202020204" pitchFamily="34" charset="0"/>
+              <a:cs typeface="Arial" panose="020B0604020202020204" pitchFamily="34" charset="0"/>
+            </a:endParaRPr>
+          </a:p>
+        </p:txBody>
+      </p:sp>
+      <p:sp>
+        <p:nvSpPr>
+          <p:cNvPr id="29" name="TextBox 28">
+            <a:extLst>
+              <a:ext uri="{FF2B5EF4-FFF2-40B4-BE49-F238E27FC236}">
+                <a16:creationId xmlns:a16="http://schemas.microsoft.com/office/drawing/2014/main" id="{5F0956BA-0F9C-4680-F0AD-E1CC26347EA4}"/>
+              </a:ext>
+            </a:extLst>
+          </p:cNvPr>
+          <p:cNvSpPr txBox="1"/>
+          <p:nvPr/>
+        </p:nvSpPr>
+        <p:spPr>
+          <a:xfrm>
+            <a:off x="22329236" y="877103"/>
+            <a:ext cx="7358432" cy="923330"/>
+          </a:xfrm>
+          <a:prstGeom prst="rect">
+            <a:avLst/>
+          </a:prstGeom>
+          <a:gradFill flip="none" rotWithShape="1">
+            <a:gsLst>
+              <a:gs pos="0">
+                <a:schemeClr val="tx2">
+                  <a:lumMod val="25000"/>
+                  <a:lumOff val="75000"/>
+                  <a:tint val="66000"/>
+                  <a:satMod val="160000"/>
+                </a:schemeClr>
+              </a:gs>
+              <a:gs pos="50000">
+                <a:schemeClr val="tx2">
+                  <a:lumMod val="25000"/>
+                  <a:lumOff val="75000"/>
+                  <a:tint val="44500"/>
+                  <a:satMod val="160000"/>
+                </a:schemeClr>
+              </a:gs>
+              <a:gs pos="100000">
+                <a:schemeClr val="tx2">
+                  <a:lumMod val="25000"/>
+                  <a:lumOff val="75000"/>
+                  <a:tint val="23500"/>
+                  <a:satMod val="160000"/>
+                </a:schemeClr>
+              </a:gs>
+            </a:gsLst>
+            <a:lin ang="16200000" scaled="1"/>
+            <a:tileRect/>
+          </a:gradFill>
+          <a:ln w="76200">
+            <a:solidFill>
+              <a:schemeClr val="tx1"/>
+            </a:solidFill>
+          </a:ln>
+        </p:spPr>
+        <p:txBody>
+          <a:bodyPr wrap="square" rtlCol="0">
+            <a:spAutoFit/>
+          </a:bodyPr>
+          <a:lstStyle/>
+          <a:p>
+            <a:pPr algn="ctr"/>
+            <a:r>
+              <a:rPr lang="en-US" sz="5400" b="1" dirty="0">
+                <a:latin typeface="Arial" panose="020B0604020202020204" pitchFamily="34" charset="0"/>
+                <a:cs typeface="Arial" panose="020B0604020202020204" pitchFamily="34" charset="0"/>
+              </a:rPr>
+              <a:t>Key Features</a:t>
+            </a:r>
+            <a:endParaRPr lang="en-US" sz="6600" b="1" dirty="0">
+              <a:latin typeface="Arial" panose="020B0604020202020204" pitchFamily="34" charset="0"/>
+              <a:cs typeface="Arial" panose="020B0604020202020204" pitchFamily="34" charset="0"/>
+            </a:endParaRPr>
+          </a:p>
+        </p:txBody>
+      </p:sp>
+      <p:sp>
+        <p:nvSpPr>
+          <p:cNvPr id="30" name="TextBox 29">
+            <a:extLst>
+              <a:ext uri="{FF2B5EF4-FFF2-40B4-BE49-F238E27FC236}">
+                <a16:creationId xmlns:a16="http://schemas.microsoft.com/office/drawing/2014/main" id="{207C4476-B449-88E8-708A-990537144516}"/>
+              </a:ext>
+            </a:extLst>
+          </p:cNvPr>
+          <p:cNvSpPr txBox="1"/>
+          <p:nvPr/>
+        </p:nvSpPr>
+        <p:spPr>
+          <a:xfrm>
+            <a:off x="22772727" y="13565360"/>
+            <a:ext cx="6519891" cy="769441"/>
+          </a:xfrm>
+          <a:prstGeom prst="rect">
+            <a:avLst/>
+          </a:prstGeom>
+          <a:gradFill flip="none" rotWithShape="1">
+            <a:gsLst>
+              <a:gs pos="0">
+                <a:schemeClr val="accent1">
+                  <a:tint val="66000"/>
+                  <a:satMod val="160000"/>
+                </a:schemeClr>
+              </a:gs>
+              <a:gs pos="50000">
+                <a:schemeClr val="accent1">
+                  <a:tint val="44500"/>
+                  <a:satMod val="160000"/>
+                </a:schemeClr>
+              </a:gs>
+              <a:gs pos="100000">
+                <a:schemeClr val="accent1">
+                  <a:tint val="23500"/>
+                  <a:satMod val="160000"/>
+                </a:schemeClr>
+              </a:gs>
+            </a:gsLst>
+            <a:path path="circle">
+              <a:fillToRect l="50000" t="50000" r="50000" b="50000"/>
+            </a:path>
+            <a:tileRect/>
+          </a:gradFill>
+          <a:ln w="50800">
+            <a:solidFill>
+              <a:schemeClr val="tx1"/>
+            </a:solidFill>
+          </a:ln>
+        </p:spPr>
+        <p:txBody>
+          <a:bodyPr wrap="square" rtlCol="0">
+            <a:spAutoFit/>
+          </a:bodyPr>
+          <a:lstStyle/>
+          <a:p>
+            <a:pPr algn="ctr"/>
+            <a:r>
+              <a:rPr lang="en-US" sz="4400" b="1" dirty="0">
+                <a:latin typeface="Arial" panose="020B0604020202020204" pitchFamily="34" charset="0"/>
+                <a:cs typeface="Arial" panose="020B0604020202020204" pitchFamily="34" charset="0"/>
+              </a:rPr>
+              <a:t>Gamification</a:t>
+            </a:r>
+            <a:endParaRPr lang="en-US" sz="5400" b="1" dirty="0">
+              <a:latin typeface="Arial" panose="020B0604020202020204" pitchFamily="34" charset="0"/>
+              <a:cs typeface="Arial" panose="020B0604020202020204" pitchFamily="34" charset="0"/>
+            </a:endParaRPr>
+          </a:p>
+        </p:txBody>
+      </p:sp>
+      <p:sp>
+        <p:nvSpPr>
+          <p:cNvPr id="6" name="Rectangle 5">
+            <a:extLst>
+              <a:ext uri="{FF2B5EF4-FFF2-40B4-BE49-F238E27FC236}">
+                <a16:creationId xmlns:a16="http://schemas.microsoft.com/office/drawing/2014/main" id="{9DB7C77A-2C1E-DBF9-343E-3442F2F4C530}"/>
+              </a:ext>
+            </a:extLst>
+          </p:cNvPr>
+          <p:cNvSpPr/>
+          <p:nvPr/>
+        </p:nvSpPr>
+        <p:spPr>
+          <a:xfrm>
+            <a:off x="4519652" y="19620696"/>
+            <a:ext cx="13229622" cy="1323439"/>
+          </a:xfrm>
+          <a:prstGeom prst="rect">
+            <a:avLst/>
+          </a:prstGeom>
+          <a:noFill/>
+          <a:ln>
+            <a:noFill/>
+          </a:ln>
+        </p:spPr>
+        <p:txBody>
+          <a:bodyPr wrap="square" lIns="91440" tIns="45720" rIns="91440" bIns="45720">
+            <a:spAutoFit/>
+          </a:bodyPr>
+          <a:lstStyle/>
+          <a:p>
+            <a:pPr algn="ctr"/>
+            <a:r>
+              <a:rPr lang="en-GB" sz="8000" b="1" cap="none" spc="0" dirty="0">
+                <a:ln w="12700" cmpd="sng">
+                  <a:solidFill>
+                    <a:srgbClr val="C6DA08"/>
+                  </a:solidFill>
+                  <a:prstDash val="solid"/>
+                </a:ln>
+                <a:solidFill>
+                  <a:srgbClr val="FFFF00"/>
+                </a:solidFill>
+                <a:effectLst/>
+                <a:latin typeface="Arial" panose="020B0604020202020204" pitchFamily="34" charset="0"/>
+                <a:cs typeface="Arial" panose="020B0604020202020204" pitchFamily="34" charset="0"/>
+              </a:rPr>
+              <a:t>User Level Progression</a:t>
+            </a:r>
+          </a:p>
+        </p:txBody>
+      </p:sp>
+      <p:sp>
+        <p:nvSpPr>
+          <p:cNvPr id="12" name="TextBox 11">
+            <a:extLst>
+              <a:ext uri="{FF2B5EF4-FFF2-40B4-BE49-F238E27FC236}">
+                <a16:creationId xmlns:a16="http://schemas.microsoft.com/office/drawing/2014/main" id="{23A98364-3921-7AAB-AE62-75300B0A2958}"/>
+              </a:ext>
+            </a:extLst>
+          </p:cNvPr>
+          <p:cNvSpPr txBox="1"/>
+          <p:nvPr/>
+        </p:nvSpPr>
+        <p:spPr>
+          <a:xfrm>
+            <a:off x="22772727" y="10426375"/>
+            <a:ext cx="6519891" cy="2800767"/>
+          </a:xfrm>
+          <a:prstGeom prst="rect">
+            <a:avLst/>
+          </a:prstGeom>
+          <a:gradFill flip="none" rotWithShape="1">
+            <a:gsLst>
+              <a:gs pos="0">
+                <a:schemeClr val="accent3">
+                  <a:lumMod val="20000"/>
+                  <a:lumOff val="80000"/>
+                  <a:shade val="30000"/>
+                  <a:satMod val="115000"/>
+                </a:schemeClr>
+              </a:gs>
+              <a:gs pos="50000">
+                <a:schemeClr val="accent3">
+                  <a:lumMod val="20000"/>
+                  <a:lumOff val="80000"/>
+                  <a:shade val="67500"/>
+                  <a:satMod val="115000"/>
+                </a:schemeClr>
+              </a:gs>
+              <a:gs pos="100000">
+                <a:schemeClr val="accent3">
+                  <a:lumMod val="20000"/>
+                  <a:lumOff val="80000"/>
+                  <a:shade val="100000"/>
+                  <a:satMod val="115000"/>
+                </a:schemeClr>
+              </a:gs>
+            </a:gsLst>
+            <a:lin ang="16200000" scaled="1"/>
+            <a:tileRect/>
+          </a:gradFill>
+          <a:ln w="50800">
+            <a:solidFill>
+              <a:schemeClr val="tx1"/>
+            </a:solidFill>
+          </a:ln>
+        </p:spPr>
+        <p:txBody>
+          <a:bodyPr wrap="square" rtlCol="0">
+            <a:spAutoFit/>
+          </a:bodyPr>
+          <a:lstStyle/>
+          <a:p>
+            <a:pPr marL="571500" indent="-571500">
+              <a:lnSpc>
+                <a:spcPct val="150000"/>
+              </a:lnSpc>
+              <a:buFont typeface="Arial" panose="020B0604020202020204" pitchFamily="34" charset="0"/>
+              <a:buChar char="•"/>
+            </a:pPr>
+            <a:r>
+              <a:rPr lang="en-GB" sz="3200" dirty="0">
+                <a:solidFill>
+                  <a:srgbClr val="002060"/>
+                </a:solidFill>
+                <a:latin typeface="Arial" panose="020B0604020202020204" pitchFamily="34" charset="0"/>
+                <a:cs typeface="Arial" panose="020B0604020202020204" pitchFamily="34" charset="0"/>
+              </a:rPr>
+              <a:t>Displays user browsing stats</a:t>
+            </a:r>
+          </a:p>
+          <a:p>
+            <a:pPr marL="571500" indent="-571500">
+              <a:lnSpc>
+                <a:spcPct val="150000"/>
+              </a:lnSpc>
+              <a:buFont typeface="Arial" panose="020B0604020202020204" pitchFamily="34" charset="0"/>
+              <a:buChar char="•"/>
+            </a:pPr>
+            <a:r>
+              <a:rPr lang="en-GB" sz="3200" dirty="0">
+                <a:solidFill>
+                  <a:srgbClr val="002060"/>
+                </a:solidFill>
+                <a:latin typeface="Arial" panose="020B0604020202020204" pitchFamily="34" charset="0"/>
+                <a:cs typeface="Arial" panose="020B0604020202020204" pitchFamily="34" charset="0"/>
+              </a:rPr>
+              <a:t>Security-focussed quizzes and challenges</a:t>
+            </a:r>
+            <a:endParaRPr lang="en-GB" sz="3200" dirty="0">
+              <a:latin typeface="Arial" panose="020B0604020202020204" pitchFamily="34" charset="0"/>
+              <a:cs typeface="Arial" panose="020B0604020202020204" pitchFamily="34" charset="0"/>
+            </a:endParaRPr>
+          </a:p>
+          <a:p>
+            <a:endParaRPr lang="en-GB" sz="3200" dirty="0">
+              <a:latin typeface="Arial" panose="020B0604020202020204" pitchFamily="34" charset="0"/>
+              <a:cs typeface="Arial" panose="020B0604020202020204" pitchFamily="34" charset="0"/>
+            </a:endParaRPr>
+          </a:p>
+        </p:txBody>
+      </p:sp>
+      <p:sp>
+        <p:nvSpPr>
           <p:cNvPr id="11" name="TextBox 10">
             <a:extLst>
               <a:ext uri="{FF2B5EF4-FFF2-40B4-BE49-F238E27FC236}">
@@ -2995,91 +4172,532 @@
         </p:nvSpPr>
         <p:spPr>
           <a:xfrm>
-            <a:off x="20068836" y="12961011"/>
-            <a:ext cx="9579858" cy="4524315"/>
+            <a:off x="22772727" y="14334801"/>
+            <a:ext cx="6519891" cy="5016758"/>
+          </a:xfrm>
+          <a:prstGeom prst="rect">
+            <a:avLst/>
+          </a:prstGeom>
+          <a:gradFill flip="none" rotWithShape="1">
+            <a:gsLst>
+              <a:gs pos="0">
+                <a:schemeClr val="accent3">
+                  <a:lumMod val="20000"/>
+                  <a:lumOff val="80000"/>
+                  <a:shade val="30000"/>
+                  <a:satMod val="115000"/>
+                </a:schemeClr>
+              </a:gs>
+              <a:gs pos="50000">
+                <a:schemeClr val="accent3">
+                  <a:lumMod val="20000"/>
+                  <a:lumOff val="80000"/>
+                  <a:shade val="67500"/>
+                  <a:satMod val="115000"/>
+                </a:schemeClr>
+              </a:gs>
+              <a:gs pos="100000">
+                <a:schemeClr val="accent3">
+                  <a:lumMod val="20000"/>
+                  <a:lumOff val="80000"/>
+                  <a:shade val="100000"/>
+                  <a:satMod val="115000"/>
+                </a:schemeClr>
+              </a:gs>
+            </a:gsLst>
+            <a:lin ang="16200000" scaled="1"/>
+            <a:tileRect/>
+          </a:gradFill>
+          <a:ln w="50800">
+            <a:solidFill>
+              <a:schemeClr val="tx1"/>
+            </a:solidFill>
+          </a:ln>
+        </p:spPr>
+        <p:txBody>
+          <a:bodyPr wrap="square" rtlCol="0">
+            <a:spAutoFit/>
+          </a:bodyPr>
+          <a:lstStyle/>
+          <a:p>
+            <a:pPr marL="457200" indent="-457200">
+              <a:lnSpc>
+                <a:spcPct val="150000"/>
+              </a:lnSpc>
+              <a:buFont typeface="Arial" panose="020B0604020202020204" pitchFamily="34" charset="0"/>
+              <a:buChar char="•"/>
+            </a:pPr>
+            <a:r>
+              <a:rPr lang="en-GB" sz="3200" dirty="0">
+                <a:solidFill>
+                  <a:schemeClr val="tx2"/>
+                </a:solidFill>
+                <a:latin typeface="Arial" panose="020B0604020202020204" pitchFamily="34" charset="0"/>
+                <a:cs typeface="Arial" panose="020B0604020202020204" pitchFamily="34" charset="0"/>
+              </a:rPr>
+              <a:t>Rewards for secure behaviour</a:t>
+            </a:r>
+          </a:p>
+          <a:p>
+            <a:pPr marL="457200" indent="-457200">
+              <a:lnSpc>
+                <a:spcPct val="150000"/>
+              </a:lnSpc>
+              <a:buFont typeface="Arial" panose="020B0604020202020204" pitchFamily="34" charset="0"/>
+              <a:buChar char="•"/>
+            </a:pPr>
+            <a:r>
+              <a:rPr lang="en-GB" sz="3200" dirty="0">
+                <a:solidFill>
+                  <a:schemeClr val="tx2"/>
+                </a:solidFill>
+                <a:latin typeface="Arial" panose="020B0604020202020204" pitchFamily="34" charset="0"/>
+                <a:cs typeface="Arial" panose="020B0604020202020204" pitchFamily="34" charset="0"/>
+              </a:rPr>
+              <a:t>Penalises for risky behaviour</a:t>
+            </a:r>
+          </a:p>
+          <a:p>
+            <a:pPr marL="457200" indent="-457200">
+              <a:lnSpc>
+                <a:spcPct val="150000"/>
+              </a:lnSpc>
+              <a:buFont typeface="Arial" panose="020B0604020202020204" pitchFamily="34" charset="0"/>
+              <a:buChar char="•"/>
+            </a:pPr>
+            <a:r>
+              <a:rPr lang="en-GB" sz="3200" dirty="0">
+                <a:solidFill>
+                  <a:schemeClr val="tx2"/>
+                </a:solidFill>
+                <a:latin typeface="Arial" panose="020B0604020202020204" pitchFamily="34" charset="0"/>
+                <a:cs typeface="Arial" panose="020B0604020202020204" pitchFamily="34" charset="0"/>
+              </a:rPr>
+              <a:t>Based on behavioural conditioning principles</a:t>
+            </a:r>
+          </a:p>
+          <a:p>
+            <a:pPr marL="457200" indent="-457200">
+              <a:lnSpc>
+                <a:spcPct val="150000"/>
+              </a:lnSpc>
+              <a:buFont typeface="Arial" panose="020B0604020202020204" pitchFamily="34" charset="0"/>
+              <a:buChar char="•"/>
+            </a:pPr>
+            <a:r>
+              <a:rPr lang="en-GB" sz="3200" dirty="0">
+                <a:solidFill>
+                  <a:schemeClr val="tx2"/>
+                </a:solidFill>
+                <a:latin typeface="Arial" panose="020B0604020202020204" pitchFamily="34" charset="0"/>
+                <a:cs typeface="Arial" panose="020B0604020202020204" pitchFamily="34" charset="0"/>
+              </a:rPr>
+              <a:t>Teaches and reinforces safe browsing behaviour</a:t>
+            </a:r>
+          </a:p>
+          <a:p>
+            <a:endParaRPr lang="en-GB" sz="3200" dirty="0">
+              <a:latin typeface="Arial" panose="020B0604020202020204" pitchFamily="34" charset="0"/>
+              <a:cs typeface="Arial" panose="020B0604020202020204" pitchFamily="34" charset="0"/>
+            </a:endParaRPr>
+          </a:p>
+        </p:txBody>
+      </p:sp>
+      <p:sp>
+        <p:nvSpPr>
+          <p:cNvPr id="10" name="TextBox 9">
+            <a:extLst>
+              <a:ext uri="{FF2B5EF4-FFF2-40B4-BE49-F238E27FC236}">
+                <a16:creationId xmlns:a16="http://schemas.microsoft.com/office/drawing/2014/main" id="{8C06970B-65CC-1C67-C4D7-D20DD445F0B6}"/>
+              </a:ext>
+            </a:extLst>
+          </p:cNvPr>
+          <p:cNvSpPr txBox="1"/>
+          <p:nvPr/>
+        </p:nvSpPr>
+        <p:spPr>
+          <a:xfrm>
+            <a:off x="22772729" y="2069570"/>
+            <a:ext cx="6519891" cy="769441"/>
+          </a:xfrm>
+          <a:prstGeom prst="rect">
+            <a:avLst/>
+          </a:prstGeom>
+          <a:gradFill flip="none" rotWithShape="1">
+            <a:gsLst>
+              <a:gs pos="0">
+                <a:schemeClr val="accent1">
+                  <a:tint val="66000"/>
+                  <a:satMod val="160000"/>
+                </a:schemeClr>
+              </a:gs>
+              <a:gs pos="50000">
+                <a:schemeClr val="accent1">
+                  <a:tint val="44500"/>
+                  <a:satMod val="160000"/>
+                </a:schemeClr>
+              </a:gs>
+              <a:gs pos="100000">
+                <a:schemeClr val="accent1">
+                  <a:tint val="23500"/>
+                  <a:satMod val="160000"/>
+                </a:schemeClr>
+              </a:gs>
+            </a:gsLst>
+            <a:path path="circle">
+              <a:fillToRect l="50000" t="50000" r="50000" b="50000"/>
+            </a:path>
+            <a:tileRect/>
+          </a:gradFill>
+          <a:ln w="50800">
+            <a:solidFill>
+              <a:schemeClr val="tx1"/>
+            </a:solidFill>
+          </a:ln>
+        </p:spPr>
+        <p:txBody>
+          <a:bodyPr wrap="square" rtlCol="0">
+            <a:spAutoFit/>
+          </a:bodyPr>
+          <a:lstStyle/>
+          <a:p>
+            <a:pPr algn="ctr"/>
+            <a:r>
+              <a:rPr lang="en-US" sz="4400" b="1" dirty="0">
+                <a:latin typeface="Arial" panose="020B0604020202020204" pitchFamily="34" charset="0"/>
+                <a:cs typeface="Arial" panose="020B0604020202020204" pitchFamily="34" charset="0"/>
+              </a:rPr>
+              <a:t>Security</a:t>
+            </a:r>
+            <a:endParaRPr lang="en-US" sz="6000" b="1" dirty="0">
+              <a:latin typeface="Arial" panose="020B0604020202020204" pitchFamily="34" charset="0"/>
+              <a:cs typeface="Arial" panose="020B0604020202020204" pitchFamily="34" charset="0"/>
+            </a:endParaRPr>
+          </a:p>
+        </p:txBody>
+      </p:sp>
+      <p:sp>
+        <p:nvSpPr>
+          <p:cNvPr id="17" name="TextBox 16">
+            <a:extLst>
+              <a:ext uri="{FF2B5EF4-FFF2-40B4-BE49-F238E27FC236}">
+                <a16:creationId xmlns:a16="http://schemas.microsoft.com/office/drawing/2014/main" id="{C0B9B8F7-936D-165A-96EC-9DDA0C766973}"/>
+              </a:ext>
+            </a:extLst>
+          </p:cNvPr>
+          <p:cNvSpPr txBox="1"/>
+          <p:nvPr/>
+        </p:nvSpPr>
+        <p:spPr>
+          <a:xfrm>
+            <a:off x="22772727" y="2839011"/>
+            <a:ext cx="6519891" cy="6494085"/>
+          </a:xfrm>
+          <a:prstGeom prst="rect">
+            <a:avLst/>
+          </a:prstGeom>
+          <a:gradFill flip="none" rotWithShape="1">
+            <a:gsLst>
+              <a:gs pos="0">
+                <a:schemeClr val="accent3">
+                  <a:lumMod val="20000"/>
+                  <a:lumOff val="80000"/>
+                  <a:shade val="30000"/>
+                  <a:satMod val="115000"/>
+                </a:schemeClr>
+              </a:gs>
+              <a:gs pos="50000">
+                <a:schemeClr val="accent3">
+                  <a:lumMod val="20000"/>
+                  <a:lumOff val="80000"/>
+                  <a:shade val="67500"/>
+                  <a:satMod val="115000"/>
+                </a:schemeClr>
+              </a:gs>
+              <a:gs pos="100000">
+                <a:schemeClr val="accent3">
+                  <a:lumMod val="20000"/>
+                  <a:lumOff val="80000"/>
+                  <a:shade val="100000"/>
+                  <a:satMod val="115000"/>
+                </a:schemeClr>
+              </a:gs>
+            </a:gsLst>
+            <a:lin ang="16200000" scaled="1"/>
+            <a:tileRect/>
+          </a:gradFill>
+          <a:ln w="50800">
+            <a:solidFill>
+              <a:schemeClr val="tx1"/>
+            </a:solidFill>
+          </a:ln>
+        </p:spPr>
+        <p:txBody>
+          <a:bodyPr wrap="square" rtlCol="0">
+            <a:spAutoFit/>
+          </a:bodyPr>
+          <a:lstStyle/>
+          <a:p>
+            <a:pPr marL="571500" indent="-571500">
+              <a:lnSpc>
+                <a:spcPct val="150000"/>
+              </a:lnSpc>
+              <a:buFont typeface="Arial" panose="020B0604020202020204" pitchFamily="34" charset="0"/>
+              <a:buChar char="•"/>
+            </a:pPr>
+            <a:r>
+              <a:rPr lang="en-GB" sz="3200" dirty="0">
+                <a:solidFill>
+                  <a:srgbClr val="002060"/>
+                </a:solidFill>
+                <a:latin typeface="Arial" panose="020B0604020202020204" pitchFamily="34" charset="0"/>
+                <a:cs typeface="Arial" panose="020B0604020202020204" pitchFamily="34" charset="0"/>
+              </a:rPr>
+              <a:t>Customisable URL Risk Score</a:t>
+            </a:r>
+          </a:p>
+          <a:p>
+            <a:pPr marL="571500" indent="-571500">
+              <a:lnSpc>
+                <a:spcPct val="150000"/>
+              </a:lnSpc>
+              <a:buFont typeface="Arial" panose="020B0604020202020204" pitchFamily="34" charset="0"/>
+              <a:buChar char="•"/>
+            </a:pPr>
+            <a:r>
+              <a:rPr lang="en-GB" sz="3200" dirty="0">
+                <a:solidFill>
+                  <a:srgbClr val="002060"/>
+                </a:solidFill>
+                <a:latin typeface="Arial" panose="020B0604020202020204" pitchFamily="34" charset="0"/>
+                <a:cs typeface="Arial" panose="020B0604020202020204" pitchFamily="34" charset="0"/>
+              </a:rPr>
+              <a:t>Download Scanning</a:t>
+            </a:r>
+          </a:p>
+          <a:p>
+            <a:pPr marL="571500" indent="-571500">
+              <a:lnSpc>
+                <a:spcPct val="150000"/>
+              </a:lnSpc>
+              <a:buFont typeface="Arial" panose="020B0604020202020204" pitchFamily="34" charset="0"/>
+              <a:buChar char="•"/>
+            </a:pPr>
+            <a:r>
+              <a:rPr lang="en-GB" sz="3200" dirty="0">
+                <a:solidFill>
+                  <a:srgbClr val="002060"/>
+                </a:solidFill>
+                <a:latin typeface="Arial" panose="020B0604020202020204" pitchFamily="34" charset="0"/>
+                <a:cs typeface="Arial" panose="020B0604020202020204" pitchFamily="34" charset="0"/>
+              </a:rPr>
+              <a:t>Disabled Search History</a:t>
+            </a:r>
+          </a:p>
+          <a:p>
+            <a:pPr marL="571500" indent="-571500">
+              <a:lnSpc>
+                <a:spcPct val="150000"/>
+              </a:lnSpc>
+              <a:buFont typeface="Arial" panose="020B0604020202020204" pitchFamily="34" charset="0"/>
+              <a:buChar char="•"/>
+            </a:pPr>
+            <a:r>
+              <a:rPr lang="en-GB" sz="3200" dirty="0">
+                <a:solidFill>
+                  <a:srgbClr val="002060"/>
+                </a:solidFill>
+                <a:latin typeface="Arial" panose="020B0604020202020204" pitchFamily="34" charset="0"/>
+                <a:cs typeface="Arial" panose="020B0604020202020204" pitchFamily="34" charset="0"/>
+              </a:rPr>
+              <a:t>Auto Cookie Deletion</a:t>
+            </a:r>
+          </a:p>
+          <a:p>
+            <a:pPr marL="571500" indent="-571500">
+              <a:lnSpc>
+                <a:spcPct val="150000"/>
+              </a:lnSpc>
+              <a:buFont typeface="Arial" panose="020B0604020202020204" pitchFamily="34" charset="0"/>
+              <a:buChar char="•"/>
+            </a:pPr>
+            <a:r>
+              <a:rPr lang="en-GB" sz="3200" dirty="0">
+                <a:solidFill>
+                  <a:srgbClr val="002060"/>
+                </a:solidFill>
+                <a:latin typeface="Arial" panose="020B0604020202020204" pitchFamily="34" charset="0"/>
+                <a:cs typeface="Arial" panose="020B0604020202020204" pitchFamily="34" charset="0"/>
+              </a:rPr>
+              <a:t>Google OAUTH Sign In</a:t>
+            </a:r>
+          </a:p>
+          <a:p>
+            <a:pPr marL="571500" indent="-571500">
+              <a:lnSpc>
+                <a:spcPct val="150000"/>
+              </a:lnSpc>
+              <a:buFont typeface="Arial" panose="020B0604020202020204" pitchFamily="34" charset="0"/>
+              <a:buChar char="•"/>
+            </a:pPr>
+            <a:r>
+              <a:rPr lang="en-GB" sz="3200" dirty="0">
+                <a:solidFill>
+                  <a:srgbClr val="002060"/>
+                </a:solidFill>
+                <a:latin typeface="Arial" panose="020B0604020202020204" pitchFamily="34" charset="0"/>
+                <a:cs typeface="Arial" panose="020B0604020202020204" pitchFamily="34" charset="0"/>
+              </a:rPr>
+              <a:t>Guest Browsing</a:t>
+            </a:r>
+          </a:p>
+          <a:p>
+            <a:pPr marL="571500" indent="-571500">
+              <a:lnSpc>
+                <a:spcPct val="150000"/>
+              </a:lnSpc>
+              <a:buFont typeface="Arial" panose="020B0604020202020204" pitchFamily="34" charset="0"/>
+              <a:buChar char="•"/>
+            </a:pPr>
+            <a:r>
+              <a:rPr lang="en-GB" sz="3200" dirty="0">
+                <a:solidFill>
+                  <a:srgbClr val="002060"/>
+                </a:solidFill>
+                <a:latin typeface="Arial" panose="020B0604020202020204" pitchFamily="34" charset="0"/>
+                <a:cs typeface="Arial" panose="020B0604020202020204" pitchFamily="34" charset="0"/>
+              </a:rPr>
+              <a:t>Real-time Security Alerts &amp; Explanations</a:t>
+            </a:r>
+          </a:p>
+          <a:p>
+            <a:endParaRPr lang="en-GB" sz="3200" dirty="0">
+              <a:latin typeface="Arial" panose="020B0604020202020204" pitchFamily="34" charset="0"/>
+              <a:cs typeface="Arial" panose="020B0604020202020204" pitchFamily="34" charset="0"/>
+            </a:endParaRPr>
+          </a:p>
+        </p:txBody>
+      </p:sp>
+      <p:sp>
+        <p:nvSpPr>
+          <p:cNvPr id="18" name="Rectangle 17">
+            <a:extLst>
+              <a:ext uri="{FF2B5EF4-FFF2-40B4-BE49-F238E27FC236}">
+                <a16:creationId xmlns:a16="http://schemas.microsoft.com/office/drawing/2014/main" id="{9F652AD3-CDBE-2076-06E1-062940F49C39}"/>
+              </a:ext>
+            </a:extLst>
+          </p:cNvPr>
+          <p:cNvSpPr/>
+          <p:nvPr/>
+        </p:nvSpPr>
+        <p:spPr>
+          <a:xfrm>
+            <a:off x="1415868" y="17612980"/>
+            <a:ext cx="19437190" cy="1862048"/>
           </a:xfrm>
           <a:prstGeom prst="rect">
             <a:avLst/>
           </a:prstGeom>
           <a:solidFill>
-            <a:schemeClr val="bg1">
-              <a:lumMod val="85000"/>
+            <a:schemeClr val="tx1">
+              <a:lumMod val="50000"/>
+              <a:lumOff val="50000"/>
             </a:schemeClr>
           </a:solidFill>
-          <a:ln>
+          <a:ln w="76200">
             <a:solidFill>
               <a:schemeClr val="tx1"/>
             </a:solidFill>
           </a:ln>
         </p:spPr>
-        <p:txBody>
-          <a:bodyPr wrap="square" rtlCol="0">
-            <a:spAutoFit/>
-          </a:bodyPr>
-          <a:lstStyle/>
-          <a:p>
-            <a:pPr marL="571500" indent="-571500">
-              <a:buFont typeface="Arial" panose="020B0604020202020204" pitchFamily="34" charset="0"/>
-              <a:buChar char="•"/>
-            </a:pPr>
-            <a:r>
-              <a:rPr lang="en-GB" sz="3600" dirty="0"/>
-              <a:t>Encourages user engagement while remaining educational</a:t>
-            </a:r>
-          </a:p>
-          <a:p>
-            <a:pPr marL="571500" indent="-571500">
-              <a:buFont typeface="Arial" panose="020B0604020202020204" pitchFamily="34" charset="0"/>
-              <a:buChar char="•"/>
-            </a:pPr>
-            <a:r>
-              <a:rPr lang="en-GB" sz="3600" dirty="0">
-                <a:solidFill>
-                  <a:schemeClr val="accent6">
-                    <a:lumMod val="75000"/>
-                  </a:schemeClr>
-                </a:solidFill>
-              </a:rPr>
-              <a:t>Provides experience points on safe browsing</a:t>
-            </a:r>
-          </a:p>
-          <a:p>
-            <a:pPr marL="571500" indent="-571500">
-              <a:buFont typeface="Arial" panose="020B0604020202020204" pitchFamily="34" charset="0"/>
-              <a:buChar char="•"/>
-            </a:pPr>
-            <a:r>
-              <a:rPr lang="en-GB" sz="3600" dirty="0">
-                <a:solidFill>
-                  <a:schemeClr val="accent2">
-                    <a:lumMod val="75000"/>
-                  </a:schemeClr>
-                </a:solidFill>
-              </a:rPr>
-              <a:t>Removes experience points on unsafe browsing</a:t>
-            </a:r>
-          </a:p>
-          <a:p>
-            <a:pPr marL="571500" indent="-571500">
-              <a:buFont typeface="Arial" panose="020B0604020202020204" pitchFamily="34" charset="0"/>
-              <a:buChar char="•"/>
-            </a:pPr>
-            <a:r>
-              <a:rPr lang="en-GB" sz="3600" dirty="0"/>
-              <a:t>Higher levels unlock additional features to encourage gameplay</a:t>
-            </a:r>
-          </a:p>
-          <a:p>
-            <a:endParaRPr lang="en-GB" sz="3600" dirty="0"/>
-          </a:p>
-        </p:txBody>
-      </p:sp>
-      <p:sp>
-        <p:nvSpPr>
-          <p:cNvPr id="12" name="TextBox 11">
+        <p:style>
+          <a:lnRef idx="2">
+            <a:schemeClr val="accent1">
+              <a:shade val="15000"/>
+            </a:schemeClr>
+          </a:lnRef>
+          <a:fillRef idx="1">
+            <a:schemeClr val="accent1"/>
+          </a:fillRef>
+          <a:effectRef idx="0">
+            <a:schemeClr val="accent1"/>
+          </a:effectRef>
+          <a:fontRef idx="minor">
+            <a:schemeClr val="lt1"/>
+          </a:fontRef>
+        </p:style>
+        <p:txBody>
+          <a:bodyPr rtlCol="0" anchor="ctr"/>
+          <a:lstStyle/>
+          <a:p>
+            <a:pPr algn="ctr"/>
+            <a:endParaRPr lang="en-GB">
+              <a:latin typeface="Arial" panose="020B0604020202020204" pitchFamily="34" charset="0"/>
+              <a:cs typeface="Arial" panose="020B0604020202020204" pitchFamily="34" charset="0"/>
+            </a:endParaRPr>
+          </a:p>
+        </p:txBody>
+      </p:sp>
+      <p:sp>
+        <p:nvSpPr>
+          <p:cNvPr id="19" name="Rectangle 18">
             <a:extLst>
               <a:ext uri="{FF2B5EF4-FFF2-40B4-BE49-F238E27FC236}">
-                <a16:creationId xmlns:a16="http://schemas.microsoft.com/office/drawing/2014/main" id="{23A98364-3921-7AAB-AE62-75300B0A2958}"/>
+                <a16:creationId xmlns:a16="http://schemas.microsoft.com/office/drawing/2014/main" id="{8BAB5865-B787-3585-247D-05831192E1DA}"/>
+              </a:ext>
+            </a:extLst>
+          </p:cNvPr>
+          <p:cNvSpPr/>
+          <p:nvPr/>
+        </p:nvSpPr>
+        <p:spPr>
+          <a:xfrm>
+            <a:off x="1674968" y="17956249"/>
+            <a:ext cx="16766799" cy="1175510"/>
+          </a:xfrm>
+          <a:prstGeom prst="rect">
+            <a:avLst/>
+          </a:prstGeom>
+          <a:solidFill>
+            <a:schemeClr val="accent6">
+              <a:lumMod val="75000"/>
+            </a:schemeClr>
+          </a:solidFill>
+        </p:spPr>
+        <p:style>
+          <a:lnRef idx="2">
+            <a:schemeClr val="accent1">
+              <a:shade val="15000"/>
+            </a:schemeClr>
+          </a:lnRef>
+          <a:fillRef idx="1">
+            <a:schemeClr val="accent1"/>
+          </a:fillRef>
+          <a:effectRef idx="0">
+            <a:schemeClr val="accent1"/>
+          </a:effectRef>
+          <a:fontRef idx="minor">
+            <a:schemeClr val="lt1"/>
+          </a:fontRef>
+        </p:style>
+        <p:txBody>
+          <a:bodyPr rtlCol="0" anchor="ctr"/>
+          <a:lstStyle/>
+          <a:p>
+            <a:pPr algn="ctr"/>
+            <a:endParaRPr lang="en-GB">
+              <a:latin typeface="Arial" panose="020B0604020202020204" pitchFamily="34" charset="0"/>
+              <a:cs typeface="Arial" panose="020B0604020202020204" pitchFamily="34" charset="0"/>
+            </a:endParaRPr>
+          </a:p>
+        </p:txBody>
+      </p:sp>
+      <p:sp>
+        <p:nvSpPr>
+          <p:cNvPr id="21" name="TextBox 20">
+            <a:extLst>
+              <a:ext uri="{FF2B5EF4-FFF2-40B4-BE49-F238E27FC236}">
+                <a16:creationId xmlns:a16="http://schemas.microsoft.com/office/drawing/2014/main" id="{E748ECB0-06C1-ADA6-D88D-5FBC18D0FD9F}"/>
               </a:ext>
             </a:extLst>
           </p:cNvPr>
@@ -3088,184 +4706,8 @@
         </p:nvSpPr>
         <p:spPr>
           <a:xfrm>
-            <a:off x="20068836" y="7418803"/>
-            <a:ext cx="9579858" cy="3970318"/>
-          </a:xfrm>
-          <a:prstGeom prst="rect">
-            <a:avLst/>
-          </a:prstGeom>
-          <a:solidFill>
-            <a:schemeClr val="bg1">
-              <a:lumMod val="85000"/>
-            </a:schemeClr>
-          </a:solidFill>
-          <a:ln>
-            <a:solidFill>
-              <a:schemeClr val="tx1"/>
-            </a:solidFill>
-          </a:ln>
-        </p:spPr>
-        <p:txBody>
-          <a:bodyPr wrap="square" rtlCol="0">
-            <a:spAutoFit/>
-          </a:bodyPr>
-          <a:lstStyle/>
-          <a:p>
-            <a:pPr marL="571500" indent="-571500">
-              <a:buFont typeface="Arial" panose="020B0604020202020204" pitchFamily="34" charset="0"/>
-              <a:buChar char="•"/>
-            </a:pPr>
-            <a:r>
-              <a:rPr lang="en-GB" sz="3600" dirty="0"/>
-              <a:t>Tracks user’s stats such as levels and experience points</a:t>
-            </a:r>
-          </a:p>
-          <a:p>
-            <a:pPr marL="571500" indent="-571500">
-              <a:buFont typeface="Arial" panose="020B0604020202020204" pitchFamily="34" charset="0"/>
-              <a:buChar char="•"/>
-            </a:pPr>
-            <a:r>
-              <a:rPr lang="en-GB" sz="3600" dirty="0"/>
-              <a:t>Contains quizzes and challenges</a:t>
-            </a:r>
-          </a:p>
-          <a:p>
-            <a:pPr marL="571500" indent="-571500">
-              <a:buFont typeface="Arial" panose="020B0604020202020204" pitchFamily="34" charset="0"/>
-              <a:buChar char="•"/>
-            </a:pPr>
-            <a:r>
-              <a:rPr lang="en-GB" sz="3600" dirty="0"/>
-              <a:t>Displays user’s browsing safety</a:t>
-            </a:r>
-          </a:p>
-          <a:p>
-            <a:pPr marL="571500" indent="-571500">
-              <a:buFont typeface="Arial" panose="020B0604020202020204" pitchFamily="34" charset="0"/>
-              <a:buChar char="•"/>
-            </a:pPr>
-            <a:r>
-              <a:rPr lang="en-GB" sz="3600" dirty="0"/>
-              <a:t>Charts which can show averages and safety history</a:t>
-            </a:r>
-          </a:p>
-          <a:p>
-            <a:endParaRPr lang="en-GB" sz="3600" dirty="0"/>
-          </a:p>
-        </p:txBody>
-      </p:sp>
-      <p:sp>
-        <p:nvSpPr>
-          <p:cNvPr id="2" name="TextBox 1">
-            <a:extLst>
-              <a:ext uri="{FF2B5EF4-FFF2-40B4-BE49-F238E27FC236}">
-                <a16:creationId xmlns:a16="http://schemas.microsoft.com/office/drawing/2014/main" id="{1E1AC732-D44F-24EF-BDB0-A099D4F52527}"/>
-              </a:ext>
-            </a:extLst>
-          </p:cNvPr>
-          <p:cNvSpPr txBox="1"/>
-          <p:nvPr/>
-        </p:nvSpPr>
-        <p:spPr>
-          <a:xfrm>
-            <a:off x="626518" y="5766010"/>
-            <a:ext cx="9579858" cy="6186309"/>
-          </a:xfrm>
-          <a:prstGeom prst="rect">
-            <a:avLst/>
-          </a:prstGeom>
-          <a:solidFill>
-            <a:schemeClr val="bg1">
-              <a:lumMod val="85000"/>
-            </a:schemeClr>
-          </a:solidFill>
-          <a:ln>
-            <a:solidFill>
-              <a:schemeClr val="tx1"/>
-            </a:solidFill>
-          </a:ln>
-        </p:spPr>
-        <p:txBody>
-          <a:bodyPr wrap="square" rtlCol="0">
-            <a:spAutoFit/>
-          </a:bodyPr>
-          <a:lstStyle/>
-          <a:p>
-            <a:pPr marL="571500" indent="-571500">
-              <a:buFont typeface="Arial" panose="020B0604020202020204" pitchFamily="34" charset="0"/>
-              <a:buChar char="•"/>
-            </a:pPr>
-            <a:r>
-              <a:rPr lang="en-GB" sz="3600" dirty="0"/>
-              <a:t>Children are accessing the internet at increasingly younger ages</a:t>
-            </a:r>
-          </a:p>
-          <a:p>
-            <a:pPr marL="571500" indent="-571500">
-              <a:buFont typeface="Arial" panose="020B0604020202020204" pitchFamily="34" charset="0"/>
-              <a:buChar char="•"/>
-            </a:pPr>
-            <a:r>
-              <a:rPr lang="en-GB" sz="3600" dirty="0"/>
-              <a:t>They lack awareness of potential threats while online</a:t>
-            </a:r>
-          </a:p>
-          <a:p>
-            <a:pPr marL="571500" indent="-571500">
-              <a:buFont typeface="Arial" panose="020B0604020202020204" pitchFamily="34" charset="0"/>
-              <a:buChar char="•"/>
-            </a:pPr>
-            <a:r>
-              <a:rPr lang="en-GB" sz="3600" dirty="0"/>
-              <a:t>Traditional parental controls block behaviour but do not teach</a:t>
-            </a:r>
-          </a:p>
-          <a:p>
-            <a:pPr marL="571500" indent="-571500">
-              <a:buFont typeface="Arial" panose="020B0604020202020204" pitchFamily="34" charset="0"/>
-              <a:buChar char="•"/>
-            </a:pPr>
-            <a:r>
-              <a:rPr lang="en-GB" sz="3600" dirty="0"/>
-              <a:t>Stronghold aims to teach why a behaviour is dangerous while preventing it</a:t>
-            </a:r>
-          </a:p>
-          <a:p>
-            <a:pPr marL="571500" indent="-571500">
-              <a:buFont typeface="Arial" panose="020B0604020202020204" pitchFamily="34" charset="0"/>
-              <a:buChar char="•"/>
-            </a:pPr>
-            <a:r>
-              <a:rPr lang="en-GB" sz="3600" dirty="0"/>
-              <a:t>Behavioural conditioning is a highly effective method for modifying behaviour</a:t>
-            </a:r>
-          </a:p>
-          <a:p>
-            <a:pPr marL="571500" indent="-571500">
-              <a:buFont typeface="Arial" panose="020B0604020202020204" pitchFamily="34" charset="0"/>
-              <a:buChar char="•"/>
-            </a:pPr>
-            <a:endParaRPr lang="en-GB" sz="3600" dirty="0"/>
-          </a:p>
-        </p:txBody>
-      </p:sp>
-      <p:sp>
-        <p:nvSpPr>
-          <p:cNvPr id="5" name="TextBox 4">
-            <a:extLst>
-              <a:ext uri="{FF2B5EF4-FFF2-40B4-BE49-F238E27FC236}">
-                <a16:creationId xmlns:a16="http://schemas.microsoft.com/office/drawing/2014/main" id="{EEBE0434-CEDB-3B4A-8A5D-1223E9884CFB}"/>
-              </a:ext>
-            </a:extLst>
-          </p:cNvPr>
-          <p:cNvSpPr txBox="1"/>
-          <p:nvPr/>
-        </p:nvSpPr>
-        <p:spPr>
-          <a:xfrm>
-            <a:off x="10206376" y="2302017"/>
-            <a:ext cx="9862458" cy="2477601"/>
+            <a:off x="18882099" y="17956249"/>
+            <a:ext cx="1530626" cy="1200329"/>
           </a:xfrm>
           <a:prstGeom prst="rect">
             <a:avLst/>
@@ -3279,26 +4721,352 @@
           <a:lstStyle/>
           <a:p>
             <a:r>
-              <a:rPr lang="en-US" sz="11500" b="1" u="sng" dirty="0"/>
-              <a:t>STRONGHOLD</a:t>
-            </a:r>
-          </a:p>
-          <a:p>
-            <a:pPr algn="ctr"/>
-            <a:r>
-              <a:rPr lang="en-US" sz="4000" i="1" dirty="0"/>
-              <a:t>By Mark Hardy</a:t>
-            </a:r>
-            <a:endParaRPr lang="en-US" sz="11500" i="1" dirty="0"/>
-          </a:p>
-        </p:txBody>
-      </p:sp>
-      <p:sp>
-        <p:nvSpPr>
-          <p:cNvPr id="8" name="TextBox 7">
+              <a:rPr lang="en-GB" sz="7200" dirty="0">
+                <a:latin typeface="Arial" panose="020B0604020202020204" pitchFamily="34" charset="0"/>
+                <a:cs typeface="Arial" panose="020B0604020202020204" pitchFamily="34" charset="0"/>
+              </a:rPr>
+              <a:t>XP</a:t>
+            </a:r>
+            <a:endParaRPr lang="en-GB" sz="1400" dirty="0">
+              <a:latin typeface="Arial" panose="020B0604020202020204" pitchFamily="34" charset="0"/>
+              <a:cs typeface="Arial" panose="020B0604020202020204" pitchFamily="34" charset="0"/>
+            </a:endParaRPr>
+          </a:p>
+        </p:txBody>
+      </p:sp>
+      <p:sp>
+        <p:nvSpPr>
+          <p:cNvPr id="22" name="Rectangle 21">
             <a:extLst>
               <a:ext uri="{FF2B5EF4-FFF2-40B4-BE49-F238E27FC236}">
-                <a16:creationId xmlns:a16="http://schemas.microsoft.com/office/drawing/2014/main" id="{FDDF774C-E6E4-FABD-CE7E-198541257231}"/>
+                <a16:creationId xmlns:a16="http://schemas.microsoft.com/office/drawing/2014/main" id="{5DBA381E-68F7-6329-CAED-E50229084F9A}"/>
+              </a:ext>
+            </a:extLst>
+          </p:cNvPr>
+          <p:cNvSpPr/>
+          <p:nvPr/>
+        </p:nvSpPr>
+        <p:spPr>
+          <a:xfrm>
+            <a:off x="12120990" y="6571672"/>
+            <a:ext cx="7056783" cy="1569204"/>
+          </a:xfrm>
+          <a:prstGeom prst="rect">
+            <a:avLst/>
+          </a:prstGeom>
+          <a:solidFill>
+            <a:schemeClr val="accent2">
+              <a:lumMod val="20000"/>
+              <a:lumOff val="80000"/>
+            </a:schemeClr>
+          </a:solidFill>
+          <a:ln w="50800">
+            <a:solidFill>
+              <a:schemeClr val="tx1"/>
+            </a:solidFill>
+          </a:ln>
+        </p:spPr>
+        <p:style>
+          <a:lnRef idx="2">
+            <a:schemeClr val="accent1">
+              <a:shade val="15000"/>
+            </a:schemeClr>
+          </a:lnRef>
+          <a:fillRef idx="1">
+            <a:schemeClr val="accent1"/>
+          </a:fillRef>
+          <a:effectRef idx="0">
+            <a:schemeClr val="accent1"/>
+          </a:effectRef>
+          <a:fontRef idx="minor">
+            <a:schemeClr val="lt1"/>
+          </a:fontRef>
+        </p:style>
+        <p:txBody>
+          <a:bodyPr rtlCol="0" anchor="ctr"/>
+          <a:lstStyle/>
+          <a:p>
+            <a:pPr algn="ctr"/>
+            <a:r>
+              <a:rPr lang="en-GB" sz="3200" dirty="0">
+                <a:solidFill>
+                  <a:schemeClr val="tx2"/>
+                </a:solidFill>
+                <a:latin typeface="Arial" panose="020B0604020202020204" pitchFamily="34" charset="0"/>
+                <a:cs typeface="Arial" panose="020B0604020202020204" pitchFamily="34" charset="0"/>
+              </a:rPr>
+              <a:t>Site or Download is warned against accessing</a:t>
+            </a:r>
+          </a:p>
+        </p:txBody>
+      </p:sp>
+      <p:sp>
+        <p:nvSpPr>
+          <p:cNvPr id="23" name="Diamond 22">
+            <a:extLst>
+              <a:ext uri="{FF2B5EF4-FFF2-40B4-BE49-F238E27FC236}">
+                <a16:creationId xmlns:a16="http://schemas.microsoft.com/office/drawing/2014/main" id="{9162A61A-D469-C403-F612-AA3AE96921BB}"/>
+              </a:ext>
+            </a:extLst>
+          </p:cNvPr>
+          <p:cNvSpPr/>
+          <p:nvPr/>
+        </p:nvSpPr>
+        <p:spPr>
+          <a:xfrm>
+            <a:off x="11356052" y="9700868"/>
+            <a:ext cx="4624350" cy="3928660"/>
+          </a:xfrm>
+          <a:prstGeom prst="diamond">
+            <a:avLst/>
+          </a:prstGeom>
+          <a:solidFill>
+            <a:schemeClr val="accent2">
+              <a:lumMod val="20000"/>
+              <a:lumOff val="80000"/>
+            </a:schemeClr>
+          </a:solidFill>
+          <a:ln w="50800">
+            <a:solidFill>
+              <a:schemeClr val="tx1"/>
+            </a:solidFill>
+          </a:ln>
+        </p:spPr>
+        <p:style>
+          <a:lnRef idx="2">
+            <a:schemeClr val="accent1">
+              <a:shade val="15000"/>
+            </a:schemeClr>
+          </a:lnRef>
+          <a:fillRef idx="1">
+            <a:schemeClr val="accent1"/>
+          </a:fillRef>
+          <a:effectRef idx="0">
+            <a:schemeClr val="accent1"/>
+          </a:effectRef>
+          <a:fontRef idx="minor">
+            <a:schemeClr val="lt1"/>
+          </a:fontRef>
+        </p:style>
+        <p:txBody>
+          <a:bodyPr rtlCol="0" anchor="ctr"/>
+          <a:lstStyle/>
+          <a:p>
+            <a:pPr algn="ctr"/>
+            <a:r>
+              <a:rPr lang="en-GB" sz="3200" dirty="0">
+                <a:solidFill>
+                  <a:schemeClr val="tx2"/>
+                </a:solidFill>
+                <a:latin typeface="Arial" panose="020B0604020202020204" pitchFamily="34" charset="0"/>
+                <a:cs typeface="Arial" panose="020B0604020202020204" pitchFamily="34" charset="0"/>
+              </a:rPr>
+              <a:t>Is the safe choice made?</a:t>
+            </a:r>
+          </a:p>
+        </p:txBody>
+      </p:sp>
+      <p:cxnSp>
+        <p:nvCxnSpPr>
+          <p:cNvPr id="25" name="Straight Arrow Connector 24">
+            <a:extLst>
+              <a:ext uri="{FF2B5EF4-FFF2-40B4-BE49-F238E27FC236}">
+                <a16:creationId xmlns:a16="http://schemas.microsoft.com/office/drawing/2014/main" id="{CE0F8F35-1BC7-3E83-BC5C-E5F8239D4885}"/>
+              </a:ext>
+            </a:extLst>
+          </p:cNvPr>
+          <p:cNvCxnSpPr>
+            <a:cxnSpLocks/>
+            <a:endCxn id="23" idx="0"/>
+          </p:cNvCxnSpPr>
+          <p:nvPr/>
+        </p:nvCxnSpPr>
+        <p:spPr>
+          <a:xfrm>
+            <a:off x="13668227" y="8150087"/>
+            <a:ext cx="0" cy="1550781"/>
+          </a:xfrm>
+          <a:prstGeom prst="straightConnector1">
+            <a:avLst/>
+          </a:prstGeom>
+          <a:ln w="127000">
+            <a:tailEnd type="triangle"/>
+          </a:ln>
+        </p:spPr>
+        <p:style>
+          <a:lnRef idx="2">
+            <a:schemeClr val="accent1"/>
+          </a:lnRef>
+          <a:fillRef idx="0">
+            <a:schemeClr val="accent1"/>
+          </a:fillRef>
+          <a:effectRef idx="1">
+            <a:schemeClr val="accent1"/>
+          </a:effectRef>
+          <a:fontRef idx="minor">
+            <a:schemeClr val="tx1"/>
+          </a:fontRef>
+        </p:style>
+      </p:cxnSp>
+      <p:cxnSp>
+        <p:nvCxnSpPr>
+          <p:cNvPr id="28" name="Straight Arrow Connector 27">
+            <a:extLst>
+              <a:ext uri="{FF2B5EF4-FFF2-40B4-BE49-F238E27FC236}">
+                <a16:creationId xmlns:a16="http://schemas.microsoft.com/office/drawing/2014/main" id="{0AB8AD18-29FD-4E3E-4319-8760580C80D4}"/>
+              </a:ext>
+            </a:extLst>
+          </p:cNvPr>
+          <p:cNvCxnSpPr>
+            <a:cxnSpLocks/>
+          </p:cNvCxnSpPr>
+          <p:nvPr/>
+        </p:nvCxnSpPr>
+        <p:spPr>
+          <a:xfrm>
+            <a:off x="11715098" y="12026348"/>
+            <a:ext cx="0" cy="5586632"/>
+          </a:xfrm>
+          <a:prstGeom prst="straightConnector1">
+            <a:avLst/>
+          </a:prstGeom>
+          <a:ln w="127000">
+            <a:tailEnd type="triangle"/>
+          </a:ln>
+        </p:spPr>
+        <p:style>
+          <a:lnRef idx="2">
+            <a:schemeClr val="accent1"/>
+          </a:lnRef>
+          <a:fillRef idx="0">
+            <a:schemeClr val="accent1"/>
+          </a:fillRef>
+          <a:effectRef idx="1">
+            <a:schemeClr val="accent1"/>
+          </a:effectRef>
+          <a:fontRef idx="minor">
+            <a:schemeClr val="tx1"/>
+          </a:fontRef>
+        </p:style>
+      </p:cxnSp>
+      <p:sp>
+        <p:nvSpPr>
+          <p:cNvPr id="59" name="Rectangle 58">
+            <a:extLst>
+              <a:ext uri="{FF2B5EF4-FFF2-40B4-BE49-F238E27FC236}">
+                <a16:creationId xmlns:a16="http://schemas.microsoft.com/office/drawing/2014/main" id="{AD93D66C-F0D9-CD4B-3D92-57BD1A2FEAC1}"/>
+              </a:ext>
+            </a:extLst>
+          </p:cNvPr>
+          <p:cNvSpPr/>
+          <p:nvPr/>
+        </p:nvSpPr>
+        <p:spPr>
+          <a:xfrm>
+            <a:off x="14990858" y="13098180"/>
+            <a:ext cx="6799481" cy="999929"/>
+          </a:xfrm>
+          <a:prstGeom prst="rect">
+            <a:avLst/>
+          </a:prstGeom>
+          <a:solidFill>
+            <a:schemeClr val="tx1">
+              <a:lumMod val="50000"/>
+              <a:lumOff val="50000"/>
+            </a:schemeClr>
+          </a:solidFill>
+          <a:ln w="76200">
+            <a:solidFill>
+              <a:schemeClr val="tx1"/>
+            </a:solidFill>
+          </a:ln>
+        </p:spPr>
+        <p:style>
+          <a:lnRef idx="2">
+            <a:schemeClr val="accent1">
+              <a:shade val="15000"/>
+            </a:schemeClr>
+          </a:lnRef>
+          <a:fillRef idx="1">
+            <a:schemeClr val="accent1"/>
+          </a:fillRef>
+          <a:effectRef idx="0">
+            <a:schemeClr val="accent1"/>
+          </a:effectRef>
+          <a:fontRef idx="minor">
+            <a:schemeClr val="lt1"/>
+          </a:fontRef>
+        </p:style>
+        <p:txBody>
+          <a:bodyPr rtlCol="0" anchor="ctr"/>
+          <a:lstStyle/>
+          <a:p>
+            <a:pPr algn="ctr"/>
+            <a:endParaRPr lang="en-GB">
+              <a:latin typeface="Arial" panose="020B0604020202020204" pitchFamily="34" charset="0"/>
+              <a:cs typeface="Arial" panose="020B0604020202020204" pitchFamily="34" charset="0"/>
+            </a:endParaRPr>
+          </a:p>
+        </p:txBody>
+      </p:sp>
+      <p:sp>
+        <p:nvSpPr>
+          <p:cNvPr id="60" name="Rectangle 59">
+            <a:extLst>
+              <a:ext uri="{FF2B5EF4-FFF2-40B4-BE49-F238E27FC236}">
+                <a16:creationId xmlns:a16="http://schemas.microsoft.com/office/drawing/2014/main" id="{FB724D19-D7F4-EFE1-8405-B78452136877}"/>
+              </a:ext>
+            </a:extLst>
+          </p:cNvPr>
+          <p:cNvSpPr/>
+          <p:nvPr/>
+        </p:nvSpPr>
+        <p:spPr>
+          <a:xfrm>
+            <a:off x="15133214" y="13245710"/>
+            <a:ext cx="5540493" cy="684319"/>
+          </a:xfrm>
+          <a:prstGeom prst="rect">
+            <a:avLst/>
+          </a:prstGeom>
+          <a:solidFill>
+            <a:schemeClr val="bg1"/>
+          </a:solidFill>
+        </p:spPr>
+        <p:style>
+          <a:lnRef idx="2">
+            <a:schemeClr val="accent1">
+              <a:shade val="15000"/>
+            </a:schemeClr>
+          </a:lnRef>
+          <a:fillRef idx="1">
+            <a:schemeClr val="accent1"/>
+          </a:fillRef>
+          <a:effectRef idx="0">
+            <a:schemeClr val="accent1"/>
+          </a:effectRef>
+          <a:fontRef idx="minor">
+            <a:schemeClr val="lt1"/>
+          </a:fontRef>
+        </p:style>
+        <p:txBody>
+          <a:bodyPr rtlCol="0" anchor="ctr"/>
+          <a:lstStyle/>
+          <a:p>
+            <a:pPr algn="ctr"/>
+            <a:endParaRPr lang="en-GB" dirty="0">
+              <a:latin typeface="Arial" panose="020B0604020202020204" pitchFamily="34" charset="0"/>
+              <a:cs typeface="Arial" panose="020B0604020202020204" pitchFamily="34" charset="0"/>
+            </a:endParaRPr>
+          </a:p>
+        </p:txBody>
+      </p:sp>
+      <p:sp>
+        <p:nvSpPr>
+          <p:cNvPr id="61" name="TextBox 60">
+            <a:extLst>
+              <a:ext uri="{FF2B5EF4-FFF2-40B4-BE49-F238E27FC236}">
+                <a16:creationId xmlns:a16="http://schemas.microsoft.com/office/drawing/2014/main" id="{5EADF882-0E10-D609-B2CF-5F050FFB12BB}"/>
               </a:ext>
             </a:extLst>
           </p:cNvPr>
@@ -3307,18 +5075,222 @@
         </p:nvSpPr>
         <p:spPr>
           <a:xfrm>
-            <a:off x="626519" y="13781200"/>
-            <a:ext cx="9579857" cy="5632311"/>
+            <a:off x="20815548" y="13335735"/>
+            <a:ext cx="780719" cy="584775"/>
           </a:xfrm>
           <a:prstGeom prst="rect">
             <a:avLst/>
           </a:prstGeom>
-          <a:solidFill>
-            <a:schemeClr val="bg1">
-              <a:lumMod val="85000"/>
-            </a:schemeClr>
-          </a:solidFill>
-          <a:ln>
+          <a:noFill/>
+        </p:spPr>
+        <p:txBody>
+          <a:bodyPr wrap="square" rtlCol="0">
+            <a:spAutoFit/>
+          </a:bodyPr>
+          <a:lstStyle/>
+          <a:p>
+            <a:r>
+              <a:rPr lang="en-GB" sz="3200" dirty="0">
+                <a:latin typeface="Arial" panose="020B0604020202020204" pitchFamily="34" charset="0"/>
+                <a:cs typeface="Arial" panose="020B0604020202020204" pitchFamily="34" charset="0"/>
+              </a:rPr>
+              <a:t>XP</a:t>
+            </a:r>
+            <a:endParaRPr lang="en-GB" sz="300" dirty="0">
+              <a:latin typeface="Arial" panose="020B0604020202020204" pitchFamily="34" charset="0"/>
+              <a:cs typeface="Arial" panose="020B0604020202020204" pitchFamily="34" charset="0"/>
+            </a:endParaRPr>
+          </a:p>
+        </p:txBody>
+      </p:sp>
+      <p:cxnSp>
+        <p:nvCxnSpPr>
+          <p:cNvPr id="63" name="Straight Arrow Connector 62">
+            <a:extLst>
+              <a:ext uri="{FF2B5EF4-FFF2-40B4-BE49-F238E27FC236}">
+                <a16:creationId xmlns:a16="http://schemas.microsoft.com/office/drawing/2014/main" id="{4E405603-5685-F654-20FF-CE664D705690}"/>
+              </a:ext>
+            </a:extLst>
+          </p:cNvPr>
+          <p:cNvCxnSpPr>
+            <a:cxnSpLocks/>
+          </p:cNvCxnSpPr>
+          <p:nvPr/>
+        </p:nvCxnSpPr>
+        <p:spPr>
+          <a:xfrm>
+            <a:off x="15933212" y="11704789"/>
+            <a:ext cx="47190" cy="1467156"/>
+          </a:xfrm>
+          <a:prstGeom prst="straightConnector1">
+            <a:avLst/>
+          </a:prstGeom>
+          <a:ln w="127000">
+            <a:tailEnd type="triangle"/>
+          </a:ln>
+        </p:spPr>
+        <p:style>
+          <a:lnRef idx="2">
+            <a:schemeClr val="accent1"/>
+          </a:lnRef>
+          <a:fillRef idx="0">
+            <a:schemeClr val="accent1"/>
+          </a:fillRef>
+          <a:effectRef idx="1">
+            <a:schemeClr val="accent1"/>
+          </a:effectRef>
+          <a:fontRef idx="minor">
+            <a:schemeClr val="tx1"/>
+          </a:fontRef>
+        </p:style>
+      </p:cxnSp>
+      <p:sp>
+        <p:nvSpPr>
+          <p:cNvPr id="69" name="TextBox 68">
+            <a:extLst>
+              <a:ext uri="{FF2B5EF4-FFF2-40B4-BE49-F238E27FC236}">
+                <a16:creationId xmlns:a16="http://schemas.microsoft.com/office/drawing/2014/main" id="{D2BBD6BD-06AB-8E24-05D9-55DBB7D568CD}"/>
+              </a:ext>
+            </a:extLst>
+          </p:cNvPr>
+          <p:cNvSpPr txBox="1"/>
+          <p:nvPr/>
+        </p:nvSpPr>
+        <p:spPr>
+          <a:xfrm>
+            <a:off x="11903029" y="15967380"/>
+            <a:ext cx="5391058" cy="769441"/>
+          </a:xfrm>
+          <a:prstGeom prst="rect">
+            <a:avLst/>
+          </a:prstGeom>
+          <a:noFill/>
+        </p:spPr>
+        <p:txBody>
+          <a:bodyPr wrap="square" rtlCol="0">
+            <a:spAutoFit/>
+          </a:bodyPr>
+          <a:lstStyle/>
+          <a:p>
+            <a:r>
+              <a:rPr lang="en-GB" sz="4400" b="1" dirty="0">
+                <a:solidFill>
+                  <a:srgbClr val="92D050"/>
+                </a:solidFill>
+                <a:latin typeface="Arial" panose="020B0604020202020204" pitchFamily="34" charset="0"/>
+                <a:cs typeface="Arial" panose="020B0604020202020204" pitchFamily="34" charset="0"/>
+              </a:rPr>
+              <a:t>Secure Behaviour</a:t>
+            </a:r>
+            <a:endParaRPr lang="en-GB" sz="1100" b="1" dirty="0">
+              <a:solidFill>
+                <a:srgbClr val="92D050"/>
+              </a:solidFill>
+              <a:latin typeface="Arial" panose="020B0604020202020204" pitchFamily="34" charset="0"/>
+              <a:cs typeface="Arial" panose="020B0604020202020204" pitchFamily="34" charset="0"/>
+            </a:endParaRPr>
+          </a:p>
+        </p:txBody>
+      </p:sp>
+      <p:sp>
+        <p:nvSpPr>
+          <p:cNvPr id="70" name="TextBox 69">
+            <a:extLst>
+              <a:ext uri="{FF2B5EF4-FFF2-40B4-BE49-F238E27FC236}">
+                <a16:creationId xmlns:a16="http://schemas.microsoft.com/office/drawing/2014/main" id="{E7F4234C-C298-DFBF-9616-A922F53B7192}"/>
+              </a:ext>
+            </a:extLst>
+          </p:cNvPr>
+          <p:cNvSpPr txBox="1"/>
+          <p:nvPr/>
+        </p:nvSpPr>
+        <p:spPr>
+          <a:xfrm>
+            <a:off x="16115258" y="12071923"/>
+            <a:ext cx="4282131" cy="646331"/>
+          </a:xfrm>
+          <a:prstGeom prst="rect">
+            <a:avLst/>
+          </a:prstGeom>
+          <a:noFill/>
+        </p:spPr>
+        <p:txBody>
+          <a:bodyPr wrap="square" rtlCol="0">
+            <a:spAutoFit/>
+          </a:bodyPr>
+          <a:lstStyle/>
+          <a:p>
+            <a:r>
+              <a:rPr lang="en-GB" sz="3600" b="1" dirty="0">
+                <a:solidFill>
+                  <a:srgbClr val="FF0000"/>
+                </a:solidFill>
+                <a:latin typeface="Arial" panose="020B0604020202020204" pitchFamily="34" charset="0"/>
+                <a:cs typeface="Arial" panose="020B0604020202020204" pitchFamily="34" charset="0"/>
+              </a:rPr>
+              <a:t>Risky Behaviour</a:t>
+            </a:r>
+            <a:endParaRPr lang="en-GB" sz="1000" b="1" dirty="0">
+              <a:solidFill>
+                <a:srgbClr val="FF0000"/>
+              </a:solidFill>
+              <a:latin typeface="Arial" panose="020B0604020202020204" pitchFamily="34" charset="0"/>
+              <a:cs typeface="Arial" panose="020B0604020202020204" pitchFamily="34" charset="0"/>
+            </a:endParaRPr>
+          </a:p>
+        </p:txBody>
+      </p:sp>
+      <p:sp>
+        <p:nvSpPr>
+          <p:cNvPr id="71" name="TextBox 70">
+            <a:extLst>
+              <a:ext uri="{FF2B5EF4-FFF2-40B4-BE49-F238E27FC236}">
+                <a16:creationId xmlns:a16="http://schemas.microsoft.com/office/drawing/2014/main" id="{1C019C46-C865-39FF-B34B-4608A39780D2}"/>
+              </a:ext>
+            </a:extLst>
+          </p:cNvPr>
+          <p:cNvSpPr txBox="1"/>
+          <p:nvPr/>
+        </p:nvSpPr>
+        <p:spPr>
+          <a:xfrm>
+            <a:off x="10771979" y="4674665"/>
+            <a:ext cx="9754804" cy="1569660"/>
+          </a:xfrm>
+          <a:prstGeom prst="rect">
+            <a:avLst/>
+          </a:prstGeom>
+          <a:gradFill flip="none" rotWithShape="1">
+            <a:gsLst>
+              <a:gs pos="0">
+                <a:schemeClr val="tx2">
+                  <a:lumMod val="25000"/>
+                  <a:lumOff val="75000"/>
+                  <a:tint val="66000"/>
+                  <a:satMod val="160000"/>
+                </a:schemeClr>
+              </a:gs>
+              <a:gs pos="50000">
+                <a:schemeClr val="tx2">
+                  <a:lumMod val="25000"/>
+                  <a:lumOff val="75000"/>
+                  <a:tint val="44500"/>
+                  <a:satMod val="160000"/>
+                </a:schemeClr>
+              </a:gs>
+              <a:gs pos="100000">
+                <a:schemeClr val="tx2">
+                  <a:lumMod val="25000"/>
+                  <a:lumOff val="75000"/>
+                  <a:tint val="23500"/>
+                  <a:satMod val="160000"/>
+                </a:schemeClr>
+              </a:gs>
+            </a:gsLst>
+            <a:lin ang="16200000" scaled="1"/>
+            <a:tileRect/>
+          </a:gradFill>
+          <a:ln w="76200">
             <a:solidFill>
               <a:schemeClr val="tx1"/>
             </a:solidFill>
@@ -3330,516 +5302,17 @@
           </a:bodyPr>
           <a:lstStyle/>
           <a:p>
-            <a:pPr marL="571500" indent="-571500">
-              <a:buFont typeface="Arial" panose="020B0604020202020204" pitchFamily="34" charset="0"/>
-              <a:buChar char="•"/>
-            </a:pPr>
-            <a:r>
-              <a:rPr lang="en-GB" sz="3600" dirty="0"/>
-              <a:t>Security-focussed web browser</a:t>
-            </a:r>
-          </a:p>
-          <a:p>
-            <a:pPr marL="571500" indent="-571500">
-              <a:buFont typeface="Arial" panose="020B0604020202020204" pitchFamily="34" charset="0"/>
-              <a:buChar char="•"/>
-            </a:pPr>
-            <a:r>
-              <a:rPr lang="en-GB" sz="3600" dirty="0"/>
-              <a:t>Teach children safe browsing behaviours</a:t>
-            </a:r>
-          </a:p>
-          <a:p>
-            <a:pPr marL="571500" indent="-571500">
-              <a:buFont typeface="Arial" panose="020B0604020202020204" pitchFamily="34" charset="0"/>
-              <a:buChar char="•"/>
-            </a:pPr>
-            <a:r>
-              <a:rPr lang="en-GB" sz="3600" dirty="0"/>
-              <a:t>Uses behavioural conditioning and gamification</a:t>
-            </a:r>
-          </a:p>
-          <a:p>
-            <a:pPr marL="571500" indent="-571500">
-              <a:buFont typeface="Arial" panose="020B0604020202020204" pitchFamily="34" charset="0"/>
-              <a:buChar char="•"/>
-            </a:pPr>
-            <a:r>
-              <a:rPr lang="en-GB" sz="3600" dirty="0">
-                <a:solidFill>
-                  <a:schemeClr val="accent6">
-                    <a:lumMod val="75000"/>
-                  </a:schemeClr>
-                </a:solidFill>
+            <a:pPr algn="ctr"/>
+            <a:r>
+              <a:rPr lang="en-GB" sz="4800" b="1" dirty="0">
+                <a:latin typeface="Arial" panose="020B0604020202020204" pitchFamily="34" charset="0"/>
+                <a:cs typeface="Arial" panose="020B0604020202020204" pitchFamily="34" charset="0"/>
               </a:rPr>
-              <a:t>Rewards for safe browsing</a:t>
-            </a:r>
-          </a:p>
-          <a:p>
-            <a:pPr marL="571500" indent="-571500">
-              <a:buFont typeface="Arial" panose="020B0604020202020204" pitchFamily="34" charset="0"/>
-              <a:buChar char="•"/>
-            </a:pPr>
-            <a:r>
-              <a:rPr lang="en-GB" sz="3600" dirty="0">
-                <a:solidFill>
-                  <a:schemeClr val="accent2">
-                    <a:lumMod val="75000"/>
-                  </a:schemeClr>
-                </a:solidFill>
-              </a:rPr>
-              <a:t>Penalises unsafe browsing</a:t>
-            </a:r>
-          </a:p>
-          <a:p>
-            <a:pPr marL="571500" indent="-571500">
-              <a:buFont typeface="Arial" panose="020B0604020202020204" pitchFamily="34" charset="0"/>
-              <a:buChar char="•"/>
-            </a:pPr>
-            <a:r>
-              <a:rPr lang="en-GB" sz="3600" dirty="0">
-                <a:solidFill>
-                  <a:schemeClr val="accent6">
-                    <a:lumMod val="75000"/>
-                  </a:schemeClr>
-                </a:solidFill>
-              </a:rPr>
-              <a:t>Educates through hints and challenges providing interactive feedback</a:t>
-            </a:r>
-          </a:p>
-          <a:p>
-            <a:pPr marL="571500" indent="-571500">
-              <a:buFont typeface="Arial" panose="020B0604020202020204" pitchFamily="34" charset="0"/>
-              <a:buChar char="•"/>
-            </a:pPr>
-            <a:r>
-              <a:rPr lang="en-GB" sz="3600" dirty="0">
-                <a:solidFill>
-                  <a:schemeClr val="accent2">
-                    <a:lumMod val="75000"/>
-                  </a:schemeClr>
-                </a:solidFill>
-              </a:rPr>
-              <a:t>Blocks malicious content and explains risks</a:t>
-            </a:r>
-          </a:p>
-          <a:p>
-            <a:endParaRPr lang="en-GB" sz="3600" dirty="0"/>
-          </a:p>
-        </p:txBody>
-      </p:sp>
-      <p:sp>
-        <p:nvSpPr>
-          <p:cNvPr id="13" name="TextBox 12">
-            <a:extLst>
-              <a:ext uri="{FF2B5EF4-FFF2-40B4-BE49-F238E27FC236}">
-                <a16:creationId xmlns:a16="http://schemas.microsoft.com/office/drawing/2014/main" id="{E14C5081-44E4-DE23-E173-D0A8E239F4E0}"/>
-              </a:ext>
-            </a:extLst>
-          </p:cNvPr>
-          <p:cNvSpPr txBox="1"/>
-          <p:nvPr/>
-        </p:nvSpPr>
-        <p:spPr>
-          <a:xfrm>
-            <a:off x="11458390" y="6957138"/>
-            <a:ext cx="7358432" cy="9510296"/>
-          </a:xfrm>
-          <a:prstGeom prst="rect">
-            <a:avLst/>
-          </a:prstGeom>
-          <a:solidFill>
-            <a:schemeClr val="bg1">
-              <a:lumMod val="85000"/>
-            </a:schemeClr>
-          </a:solidFill>
-          <a:ln>
-            <a:solidFill>
-              <a:schemeClr val="tx1"/>
-            </a:solidFill>
-          </a:ln>
-        </p:spPr>
-        <p:txBody>
-          <a:bodyPr wrap="square" rtlCol="0">
-            <a:spAutoFit/>
-          </a:bodyPr>
-          <a:lstStyle/>
-          <a:p>
-            <a:pPr marL="571500" indent="-571500">
-              <a:buFont typeface="Arial" panose="020B0604020202020204" pitchFamily="34" charset="0"/>
-              <a:buChar char="•"/>
-            </a:pPr>
-            <a:r>
-              <a:rPr lang="en-GB" sz="3600" dirty="0"/>
-              <a:t>AI Chatbot using Gemini API</a:t>
-            </a:r>
-          </a:p>
-          <a:p>
-            <a:pPr marL="571500" indent="-571500">
-              <a:buFont typeface="Arial" panose="020B0604020202020204" pitchFamily="34" charset="0"/>
-              <a:buChar char="•"/>
-            </a:pPr>
-            <a:r>
-              <a:rPr lang="en-GB" sz="3600" dirty="0"/>
-              <a:t>HTTP Blocking</a:t>
-            </a:r>
-          </a:p>
-          <a:p>
-            <a:pPr marL="571500" indent="-571500">
-              <a:buFont typeface="Arial" panose="020B0604020202020204" pitchFamily="34" charset="0"/>
-              <a:buChar char="•"/>
-            </a:pPr>
-            <a:r>
-              <a:rPr lang="en-GB" sz="3600" dirty="0"/>
-              <a:t>Downloads Scanning</a:t>
-            </a:r>
-          </a:p>
-          <a:p>
-            <a:pPr marL="571500" indent="-571500">
-              <a:buFont typeface="Arial" panose="020B0604020202020204" pitchFamily="34" charset="0"/>
-              <a:buChar char="•"/>
-            </a:pPr>
-            <a:r>
-              <a:rPr lang="en-GB" sz="3600" dirty="0"/>
-              <a:t>Parental PIN Settings Management</a:t>
-            </a:r>
-          </a:p>
-          <a:p>
-            <a:pPr marL="571500" indent="-571500">
-              <a:buFont typeface="Arial" panose="020B0604020202020204" pitchFamily="34" charset="0"/>
-              <a:buChar char="•"/>
-            </a:pPr>
-            <a:r>
-              <a:rPr lang="en-GB" sz="3600" dirty="0"/>
-              <a:t>Disabled Search History</a:t>
-            </a:r>
-          </a:p>
-          <a:p>
-            <a:pPr marL="571500" indent="-571500">
-              <a:buFont typeface="Arial" panose="020B0604020202020204" pitchFamily="34" charset="0"/>
-              <a:buChar char="•"/>
-            </a:pPr>
-            <a:r>
-              <a:rPr lang="en-GB" sz="3600" dirty="0"/>
-              <a:t>Security Alerts</a:t>
-            </a:r>
-          </a:p>
-          <a:p>
-            <a:pPr marL="571500" indent="-571500">
-              <a:buFont typeface="Arial" panose="020B0604020202020204" pitchFamily="34" charset="0"/>
-              <a:buChar char="•"/>
-            </a:pPr>
-            <a:r>
-              <a:rPr lang="en-GB" sz="3600" dirty="0"/>
-              <a:t>Automatic Cookie Deletion</a:t>
-            </a:r>
-          </a:p>
-          <a:p>
-            <a:pPr marL="571500" indent="-571500">
-              <a:buFont typeface="Arial" panose="020B0604020202020204" pitchFamily="34" charset="0"/>
-              <a:buChar char="•"/>
-            </a:pPr>
-            <a:r>
-              <a:rPr lang="en-GB" sz="3600" dirty="0"/>
-              <a:t>Google OAUTH Sign In</a:t>
-            </a:r>
-          </a:p>
-          <a:p>
-            <a:pPr marL="571500" indent="-571500">
-              <a:buFont typeface="Arial" panose="020B0604020202020204" pitchFamily="34" charset="0"/>
-              <a:buChar char="•"/>
-            </a:pPr>
-            <a:r>
-              <a:rPr lang="en-GB" sz="3600" dirty="0"/>
-              <a:t>Guest Browsing</a:t>
-            </a:r>
-          </a:p>
-          <a:p>
-            <a:pPr marL="571500" indent="-571500">
-              <a:buFont typeface="Arial" panose="020B0604020202020204" pitchFamily="34" charset="0"/>
-              <a:buChar char="•"/>
-            </a:pPr>
-            <a:r>
-              <a:rPr lang="en-GB" sz="3600" dirty="0"/>
-              <a:t>Technical Quizzes</a:t>
-            </a:r>
-          </a:p>
-          <a:p>
-            <a:pPr marL="571500" indent="-571500">
-              <a:buFont typeface="Arial" panose="020B0604020202020204" pitchFamily="34" charset="0"/>
-              <a:buChar char="•"/>
-            </a:pPr>
-            <a:r>
-              <a:rPr lang="en-GB" sz="3600" dirty="0"/>
-              <a:t>Hints and Tips</a:t>
-            </a:r>
-          </a:p>
-          <a:p>
-            <a:pPr marL="571500" indent="-571500">
-              <a:buFont typeface="Arial" panose="020B0604020202020204" pitchFamily="34" charset="0"/>
-              <a:buChar char="•"/>
-            </a:pPr>
-            <a:r>
-              <a:rPr lang="en-GB" sz="3600" dirty="0"/>
-              <a:t>Interactive Challenges</a:t>
-            </a:r>
-          </a:p>
-          <a:p>
-            <a:pPr marL="571500" indent="-571500">
-              <a:buFont typeface="Arial" panose="020B0604020202020204" pitchFamily="34" charset="0"/>
-              <a:buChar char="•"/>
-            </a:pPr>
-            <a:r>
-              <a:rPr lang="en-GB" sz="3600" dirty="0"/>
-              <a:t>Experience Points and Level Progression System</a:t>
-            </a:r>
-          </a:p>
-          <a:p>
-            <a:pPr marL="571500" indent="-571500">
-              <a:buFont typeface="Arial" panose="020B0604020202020204" pitchFamily="34" charset="0"/>
-              <a:buChar char="•"/>
-            </a:pPr>
-            <a:r>
-              <a:rPr lang="en-GB" sz="3600" dirty="0"/>
-              <a:t>Statistics and Charts History</a:t>
-            </a:r>
-          </a:p>
-          <a:p>
-            <a:endParaRPr lang="en-GB" sz="3600" dirty="0"/>
-          </a:p>
-        </p:txBody>
-      </p:sp>
-      <p:sp>
-        <p:nvSpPr>
-          <p:cNvPr id="14" name="TextBox 13">
-            <a:extLst>
-              <a:ext uri="{FF2B5EF4-FFF2-40B4-BE49-F238E27FC236}">
-                <a16:creationId xmlns:a16="http://schemas.microsoft.com/office/drawing/2014/main" id="{B9EEE6AA-99A6-1339-F05E-CE0DC41008C5}"/>
-              </a:ext>
-            </a:extLst>
-          </p:cNvPr>
-          <p:cNvSpPr txBox="1"/>
-          <p:nvPr/>
-        </p:nvSpPr>
-        <p:spPr>
-          <a:xfrm>
-            <a:off x="20068836" y="6495473"/>
-            <a:ext cx="9579858" cy="923330"/>
-          </a:xfrm>
-          <a:prstGeom prst="rect">
-            <a:avLst/>
-          </a:prstGeom>
-          <a:solidFill>
-            <a:schemeClr val="accent1"/>
-          </a:solidFill>
-        </p:spPr>
-        <p:txBody>
-          <a:bodyPr wrap="square" rtlCol="0">
-            <a:spAutoFit/>
-          </a:bodyPr>
-          <a:lstStyle/>
-          <a:p>
-            <a:pPr algn="ctr"/>
-            <a:r>
-              <a:rPr lang="en-US" sz="5400" dirty="0">
-                <a:solidFill>
-                  <a:schemeClr val="bg1"/>
-                </a:solidFill>
-              </a:rPr>
-              <a:t>Dashboard</a:t>
-            </a:r>
-            <a:endParaRPr lang="en-US" sz="6600" dirty="0">
-              <a:solidFill>
-                <a:schemeClr val="bg1"/>
-              </a:solidFill>
-            </a:endParaRPr>
-          </a:p>
-        </p:txBody>
-      </p:sp>
-      <p:sp>
-        <p:nvSpPr>
-          <p:cNvPr id="15" name="TextBox 14">
-            <a:extLst>
-              <a:ext uri="{FF2B5EF4-FFF2-40B4-BE49-F238E27FC236}">
-                <a16:creationId xmlns:a16="http://schemas.microsoft.com/office/drawing/2014/main" id="{4F13F2C1-A8AC-89FD-2E89-6699EA72FE41}"/>
-              </a:ext>
-            </a:extLst>
-          </p:cNvPr>
-          <p:cNvSpPr txBox="1"/>
-          <p:nvPr/>
-        </p:nvSpPr>
-        <p:spPr>
-          <a:xfrm>
-            <a:off x="626518" y="4842680"/>
-            <a:ext cx="9579858" cy="923330"/>
-          </a:xfrm>
-          <a:prstGeom prst="rect">
-            <a:avLst/>
-          </a:prstGeom>
-          <a:solidFill>
-            <a:schemeClr val="accent1"/>
-          </a:solidFill>
-        </p:spPr>
-        <p:txBody>
-          <a:bodyPr wrap="square" rtlCol="0">
-            <a:spAutoFit/>
-          </a:bodyPr>
-          <a:lstStyle/>
-          <a:p>
-            <a:pPr algn="ctr"/>
-            <a:r>
-              <a:rPr lang="en-US" sz="5400" dirty="0">
-                <a:solidFill>
-                  <a:schemeClr val="bg1"/>
-                </a:solidFill>
-              </a:rPr>
-              <a:t>Why Stronghold?</a:t>
-            </a:r>
-            <a:endParaRPr lang="en-US" sz="6600" dirty="0">
-              <a:solidFill>
-                <a:schemeClr val="bg1"/>
-              </a:solidFill>
-            </a:endParaRPr>
-          </a:p>
-        </p:txBody>
-      </p:sp>
-      <p:sp>
-        <p:nvSpPr>
-          <p:cNvPr id="16" name="TextBox 15">
-            <a:extLst>
-              <a:ext uri="{FF2B5EF4-FFF2-40B4-BE49-F238E27FC236}">
-                <a16:creationId xmlns:a16="http://schemas.microsoft.com/office/drawing/2014/main" id="{DC246ED9-7C98-6341-BB7A-9B2873295576}"/>
-              </a:ext>
-            </a:extLst>
-          </p:cNvPr>
-          <p:cNvSpPr txBox="1"/>
-          <p:nvPr/>
-        </p:nvSpPr>
-        <p:spPr>
-          <a:xfrm>
-            <a:off x="626518" y="12879549"/>
-            <a:ext cx="9579858" cy="923330"/>
-          </a:xfrm>
-          <a:prstGeom prst="rect">
-            <a:avLst/>
-          </a:prstGeom>
-          <a:solidFill>
-            <a:schemeClr val="accent1"/>
-          </a:solidFill>
-        </p:spPr>
-        <p:txBody>
-          <a:bodyPr wrap="square" rtlCol="0">
-            <a:spAutoFit/>
-          </a:bodyPr>
-          <a:lstStyle/>
-          <a:p>
-            <a:pPr algn="ctr"/>
-            <a:r>
-              <a:rPr lang="en-US" sz="5400" dirty="0">
-                <a:solidFill>
-                  <a:schemeClr val="bg1"/>
-                </a:solidFill>
-              </a:rPr>
-              <a:t>What is Stronghold?</a:t>
-            </a:r>
-            <a:endParaRPr lang="en-US" sz="6600" dirty="0">
-              <a:solidFill>
-                <a:schemeClr val="bg1"/>
-              </a:solidFill>
-            </a:endParaRPr>
-          </a:p>
-        </p:txBody>
-      </p:sp>
-      <p:sp>
-        <p:nvSpPr>
-          <p:cNvPr id="29" name="TextBox 28">
-            <a:extLst>
-              <a:ext uri="{FF2B5EF4-FFF2-40B4-BE49-F238E27FC236}">
-                <a16:creationId xmlns:a16="http://schemas.microsoft.com/office/drawing/2014/main" id="{5F0956BA-0F9C-4680-F0AD-E1CC26347EA4}"/>
-              </a:ext>
-            </a:extLst>
-          </p:cNvPr>
-          <p:cNvSpPr txBox="1"/>
-          <p:nvPr/>
-        </p:nvSpPr>
-        <p:spPr>
-          <a:xfrm>
-            <a:off x="11458390" y="6033808"/>
-            <a:ext cx="7358432" cy="923330"/>
-          </a:xfrm>
-          <a:prstGeom prst="rect">
-            <a:avLst/>
-          </a:prstGeom>
-          <a:solidFill>
-            <a:schemeClr val="accent1"/>
-          </a:solidFill>
-        </p:spPr>
-        <p:txBody>
-          <a:bodyPr wrap="square" rtlCol="0">
-            <a:spAutoFit/>
-          </a:bodyPr>
-          <a:lstStyle/>
-          <a:p>
-            <a:pPr algn="ctr"/>
-            <a:r>
-              <a:rPr lang="en-US" sz="5400" dirty="0">
-                <a:solidFill>
-                  <a:schemeClr val="bg1"/>
-                </a:solidFill>
-              </a:rPr>
-              <a:t>Key Features</a:t>
-            </a:r>
-            <a:endParaRPr lang="en-US" sz="6600" dirty="0">
-              <a:solidFill>
-                <a:schemeClr val="bg1"/>
-              </a:solidFill>
-            </a:endParaRPr>
-          </a:p>
-        </p:txBody>
-      </p:sp>
-      <p:sp>
-        <p:nvSpPr>
-          <p:cNvPr id="30" name="TextBox 29">
-            <a:extLst>
-              <a:ext uri="{FF2B5EF4-FFF2-40B4-BE49-F238E27FC236}">
-                <a16:creationId xmlns:a16="http://schemas.microsoft.com/office/drawing/2014/main" id="{207C4476-B449-88E8-708A-990537144516}"/>
-              </a:ext>
-            </a:extLst>
-          </p:cNvPr>
-          <p:cNvSpPr txBox="1"/>
-          <p:nvPr/>
-        </p:nvSpPr>
-        <p:spPr>
-          <a:xfrm>
-            <a:off x="20068836" y="12037681"/>
-            <a:ext cx="9579858" cy="923330"/>
-          </a:xfrm>
-          <a:prstGeom prst="rect">
-            <a:avLst/>
-          </a:prstGeom>
-          <a:solidFill>
-            <a:schemeClr val="accent1"/>
-          </a:solidFill>
-        </p:spPr>
-        <p:txBody>
-          <a:bodyPr wrap="square" rtlCol="0">
-            <a:spAutoFit/>
-          </a:bodyPr>
-          <a:lstStyle/>
-          <a:p>
-            <a:pPr algn="ctr"/>
-            <a:r>
-              <a:rPr lang="en-US" sz="5400" dirty="0">
-                <a:solidFill>
-                  <a:schemeClr val="bg1"/>
-                </a:solidFill>
-              </a:rPr>
-              <a:t>Gamification</a:t>
-            </a:r>
-            <a:endParaRPr lang="en-US" sz="6600" dirty="0">
-              <a:solidFill>
-                <a:schemeClr val="bg1"/>
-              </a:solidFill>
+              <a:t>Behavioural Conditioning Process</a:t>
+            </a:r>
+            <a:endParaRPr lang="en-GB" b="1" dirty="0">
+              <a:latin typeface="Arial" panose="020B0604020202020204" pitchFamily="34" charset="0"/>
+              <a:cs typeface="Arial" panose="020B0604020202020204" pitchFamily="34" charset="0"/>
             </a:endParaRPr>
           </a:p>
         </p:txBody>
